--- a/Java_Week11_LE.pptx
+++ b/Java_Week11_LE.pptx
@@ -6,30 +6,34 @@
     <p:sldMasterId id="2147483796" r:id="rId2"/>
   </p:sldMasterIdLst>
   <p:notesMasterIdLst>
-    <p:notesMasterId r:id="rId21"/>
+    <p:notesMasterId r:id="rId25"/>
   </p:notesMasterIdLst>
   <p:handoutMasterIdLst>
-    <p:handoutMasterId r:id="rId22"/>
+    <p:handoutMasterId r:id="rId26"/>
   </p:handoutMasterIdLst>
   <p:sldIdLst>
     <p:sldId id="689" r:id="rId3"/>
-    <p:sldId id="705" r:id="rId4"/>
-    <p:sldId id="696" r:id="rId5"/>
-    <p:sldId id="698" r:id="rId6"/>
-    <p:sldId id="695" r:id="rId7"/>
-    <p:sldId id="699" r:id="rId8"/>
-    <p:sldId id="700" r:id="rId9"/>
-    <p:sldId id="690" r:id="rId10"/>
-    <p:sldId id="706" r:id="rId11"/>
-    <p:sldId id="708" r:id="rId12"/>
-    <p:sldId id="710" r:id="rId13"/>
-    <p:sldId id="692" r:id="rId14"/>
-    <p:sldId id="691" r:id="rId15"/>
-    <p:sldId id="693" r:id="rId16"/>
-    <p:sldId id="702" r:id="rId17"/>
-    <p:sldId id="703" r:id="rId18"/>
-    <p:sldId id="704" r:id="rId19"/>
-    <p:sldId id="711" r:id="rId20"/>
+    <p:sldId id="257" r:id="rId4"/>
+    <p:sldId id="258" r:id="rId5"/>
+    <p:sldId id="259" r:id="rId6"/>
+    <p:sldId id="260" r:id="rId7"/>
+    <p:sldId id="705" r:id="rId8"/>
+    <p:sldId id="696" r:id="rId9"/>
+    <p:sldId id="698" r:id="rId10"/>
+    <p:sldId id="695" r:id="rId11"/>
+    <p:sldId id="699" r:id="rId12"/>
+    <p:sldId id="700" r:id="rId13"/>
+    <p:sldId id="690" r:id="rId14"/>
+    <p:sldId id="692" r:id="rId15"/>
+    <p:sldId id="706" r:id="rId16"/>
+    <p:sldId id="708" r:id="rId17"/>
+    <p:sldId id="710" r:id="rId18"/>
+    <p:sldId id="691" r:id="rId19"/>
+    <p:sldId id="693" r:id="rId20"/>
+    <p:sldId id="702" r:id="rId21"/>
+    <p:sldId id="703" r:id="rId22"/>
+    <p:sldId id="704" r:id="rId23"/>
+    <p:sldId id="711" r:id="rId24"/>
   </p:sldIdLst>
   <p:sldSz cx="9906000" cy="6858000" type="A4"/>
   <p:notesSz cx="7104063" cy="10234613"/>
@@ -1245,6 +1249,342 @@
 </p:notesMaster>
 </file>
 
+<file path=ppt/notesSlides/notesSlide1.xml><?xml version="1.0" encoding="utf-8"?>
+<p:notes xmlns:a="http://schemas.openxmlformats.org/drawingml/2006/main" xmlns:r="http://schemas.openxmlformats.org/officeDocument/2006/relationships" xmlns:p="http://schemas.openxmlformats.org/presentationml/2006/main">
+  <p:cSld>
+    <p:spTree>
+      <p:nvGrpSpPr>
+        <p:cNvPr id="1" name=""/>
+        <p:cNvGrpSpPr/>
+        <p:nvPr/>
+      </p:nvGrpSpPr>
+      <p:grpSpPr>
+        <a:xfrm>
+          <a:off x="0" y="0"/>
+          <a:ext cx="0" cy="0"/>
+          <a:chOff x="0" y="0"/>
+          <a:chExt cx="0" cy="0"/>
+        </a:xfrm>
+      </p:grpSpPr>
+      <p:sp>
+        <p:nvSpPr>
+          <p:cNvPr id="2" name="Slide Image Placeholder 1"/>
+          <p:cNvSpPr>
+            <a:spLocks noGrp="1" noRot="1" noChangeAspect="1"/>
+          </p:cNvSpPr>
+          <p:nvPr>
+            <p:ph type="sldImg"/>
+          </p:nvPr>
+        </p:nvSpPr>
+        <p:spPr/>
+      </p:sp>
+      <p:sp>
+        <p:nvSpPr>
+          <p:cNvPr id="3" name="Notes Placeholder 2"/>
+          <p:cNvSpPr>
+            <a:spLocks noGrp="1"/>
+          </p:cNvSpPr>
+          <p:nvPr>
+            <p:ph type="body" idx="1"/>
+          </p:nvPr>
+        </p:nvSpPr>
+        <p:spPr/>
+        <p:txBody>
+          <a:bodyPr/>
+          <a:lstStyle/>
+          <a:p>
+            <a:endParaRPr lang="en-US" dirty="0"/>
+          </a:p>
+        </p:txBody>
+      </p:sp>
+      <p:sp>
+        <p:nvSpPr>
+          <p:cNvPr id="4" name="Slide Number Placeholder 3"/>
+          <p:cNvSpPr>
+            <a:spLocks noGrp="1"/>
+          </p:cNvSpPr>
+          <p:nvPr>
+            <p:ph type="sldNum" sz="quarter" idx="10"/>
+          </p:nvPr>
+        </p:nvSpPr>
+        <p:spPr/>
+        <p:txBody>
+          <a:bodyPr/>
+          <a:lstStyle/>
+          <a:p>
+            <a:fld id="{F7021451-1387-4CA6-816F-3879F97B5CBC}" type="slidenum">
+              <a:rPr lang="en-US"/>
+              <a:t>2</a:t>
+            </a:fld>
+            <a:endParaRPr lang="en-US"/>
+          </a:p>
+        </p:txBody>
+      </p:sp>
+    </p:spTree>
+    <p:extLst>
+      <p:ext uri="{BB962C8B-B14F-4D97-AF65-F5344CB8AC3E}">
+        <p14:creationId xmlns:p14="http://schemas.microsoft.com/office/powerpoint/2010/main" val="3955833012"/>
+      </p:ext>
+    </p:extLst>
+  </p:cSld>
+  <p:clrMapOvr>
+    <a:masterClrMapping/>
+  </p:clrMapOvr>
+</p:notes>
+</file>
+
+<file path=ppt/notesSlides/notesSlide2.xml><?xml version="1.0" encoding="utf-8"?>
+<p:notes xmlns:a="http://schemas.openxmlformats.org/drawingml/2006/main" xmlns:r="http://schemas.openxmlformats.org/officeDocument/2006/relationships" xmlns:p="http://schemas.openxmlformats.org/presentationml/2006/main">
+  <p:cSld>
+    <p:spTree>
+      <p:nvGrpSpPr>
+        <p:cNvPr id="1" name=""/>
+        <p:cNvGrpSpPr/>
+        <p:nvPr/>
+      </p:nvGrpSpPr>
+      <p:grpSpPr>
+        <a:xfrm>
+          <a:off x="0" y="0"/>
+          <a:ext cx="0" cy="0"/>
+          <a:chOff x="0" y="0"/>
+          <a:chExt cx="0" cy="0"/>
+        </a:xfrm>
+      </p:grpSpPr>
+      <p:sp>
+        <p:nvSpPr>
+          <p:cNvPr id="2" name="Slide Image Placeholder 1"/>
+          <p:cNvSpPr>
+            <a:spLocks noGrp="1" noRot="1" noChangeAspect="1"/>
+          </p:cNvSpPr>
+          <p:nvPr>
+            <p:ph type="sldImg"/>
+          </p:nvPr>
+        </p:nvSpPr>
+        <p:spPr/>
+      </p:sp>
+      <p:sp>
+        <p:nvSpPr>
+          <p:cNvPr id="3" name="Notes Placeholder 2"/>
+          <p:cNvSpPr>
+            <a:spLocks noGrp="1"/>
+          </p:cNvSpPr>
+          <p:nvPr>
+            <p:ph type="body" idx="1"/>
+          </p:nvPr>
+        </p:nvSpPr>
+        <p:spPr/>
+        <p:txBody>
+          <a:bodyPr/>
+          <a:lstStyle/>
+          <a:p>
+            <a:endParaRPr lang="en-US" dirty="0"/>
+          </a:p>
+        </p:txBody>
+      </p:sp>
+      <p:sp>
+        <p:nvSpPr>
+          <p:cNvPr id="4" name="Slide Number Placeholder 3"/>
+          <p:cNvSpPr>
+            <a:spLocks noGrp="1"/>
+          </p:cNvSpPr>
+          <p:nvPr>
+            <p:ph type="sldNum" sz="quarter" idx="10"/>
+          </p:nvPr>
+        </p:nvSpPr>
+        <p:spPr/>
+        <p:txBody>
+          <a:bodyPr/>
+          <a:lstStyle/>
+          <a:p>
+            <a:fld id="{F7021451-1387-4CA6-816F-3879F97B5CBC}" type="slidenum">
+              <a:rPr lang="en-US"/>
+              <a:t>3</a:t>
+            </a:fld>
+            <a:endParaRPr lang="en-US"/>
+          </a:p>
+        </p:txBody>
+      </p:sp>
+    </p:spTree>
+    <p:extLst>
+      <p:ext uri="{BB962C8B-B14F-4D97-AF65-F5344CB8AC3E}">
+        <p14:creationId xmlns:p14="http://schemas.microsoft.com/office/powerpoint/2010/main" val="77340710"/>
+      </p:ext>
+    </p:extLst>
+  </p:cSld>
+  <p:clrMapOvr>
+    <a:masterClrMapping/>
+  </p:clrMapOvr>
+</p:notes>
+</file>
+
+<file path=ppt/notesSlides/notesSlide3.xml><?xml version="1.0" encoding="utf-8"?>
+<p:notes xmlns:a="http://schemas.openxmlformats.org/drawingml/2006/main" xmlns:r="http://schemas.openxmlformats.org/officeDocument/2006/relationships" xmlns:p="http://schemas.openxmlformats.org/presentationml/2006/main">
+  <p:cSld>
+    <p:spTree>
+      <p:nvGrpSpPr>
+        <p:cNvPr id="1" name=""/>
+        <p:cNvGrpSpPr/>
+        <p:nvPr/>
+      </p:nvGrpSpPr>
+      <p:grpSpPr>
+        <a:xfrm>
+          <a:off x="0" y="0"/>
+          <a:ext cx="0" cy="0"/>
+          <a:chOff x="0" y="0"/>
+          <a:chExt cx="0" cy="0"/>
+        </a:xfrm>
+      </p:grpSpPr>
+      <p:sp>
+        <p:nvSpPr>
+          <p:cNvPr id="2" name="Slide Image Placeholder 1"/>
+          <p:cNvSpPr>
+            <a:spLocks noGrp="1" noRot="1" noChangeAspect="1"/>
+          </p:cNvSpPr>
+          <p:nvPr>
+            <p:ph type="sldImg"/>
+          </p:nvPr>
+        </p:nvSpPr>
+        <p:spPr/>
+      </p:sp>
+      <p:sp>
+        <p:nvSpPr>
+          <p:cNvPr id="3" name="Notes Placeholder 2"/>
+          <p:cNvSpPr>
+            <a:spLocks noGrp="1"/>
+          </p:cNvSpPr>
+          <p:nvPr>
+            <p:ph type="body" idx="1"/>
+          </p:nvPr>
+        </p:nvSpPr>
+        <p:spPr/>
+        <p:txBody>
+          <a:bodyPr/>
+          <a:lstStyle/>
+          <a:p>
+            <a:endParaRPr lang="en-US" dirty="0"/>
+          </a:p>
+        </p:txBody>
+      </p:sp>
+      <p:sp>
+        <p:nvSpPr>
+          <p:cNvPr id="4" name="Slide Number Placeholder 3"/>
+          <p:cNvSpPr>
+            <a:spLocks noGrp="1"/>
+          </p:cNvSpPr>
+          <p:nvPr>
+            <p:ph type="sldNum" sz="quarter" idx="10"/>
+          </p:nvPr>
+        </p:nvSpPr>
+        <p:spPr/>
+        <p:txBody>
+          <a:bodyPr/>
+          <a:lstStyle/>
+          <a:p>
+            <a:fld id="{F7021451-1387-4CA6-816F-3879F97B5CBC}" type="slidenum">
+              <a:rPr lang="en-US"/>
+              <a:t>4</a:t>
+            </a:fld>
+            <a:endParaRPr lang="en-US"/>
+          </a:p>
+        </p:txBody>
+      </p:sp>
+    </p:spTree>
+    <p:extLst>
+      <p:ext uri="{BB962C8B-B14F-4D97-AF65-F5344CB8AC3E}">
+        <p14:creationId xmlns:p14="http://schemas.microsoft.com/office/powerpoint/2010/main" val="2897709910"/>
+      </p:ext>
+    </p:extLst>
+  </p:cSld>
+  <p:clrMapOvr>
+    <a:masterClrMapping/>
+  </p:clrMapOvr>
+</p:notes>
+</file>
+
+<file path=ppt/notesSlides/notesSlide4.xml><?xml version="1.0" encoding="utf-8"?>
+<p:notes xmlns:a="http://schemas.openxmlformats.org/drawingml/2006/main" xmlns:r="http://schemas.openxmlformats.org/officeDocument/2006/relationships" xmlns:p="http://schemas.openxmlformats.org/presentationml/2006/main">
+  <p:cSld>
+    <p:spTree>
+      <p:nvGrpSpPr>
+        <p:cNvPr id="1" name=""/>
+        <p:cNvGrpSpPr/>
+        <p:nvPr/>
+      </p:nvGrpSpPr>
+      <p:grpSpPr>
+        <a:xfrm>
+          <a:off x="0" y="0"/>
+          <a:ext cx="0" cy="0"/>
+          <a:chOff x="0" y="0"/>
+          <a:chExt cx="0" cy="0"/>
+        </a:xfrm>
+      </p:grpSpPr>
+      <p:sp>
+        <p:nvSpPr>
+          <p:cNvPr id="2" name="Slide Image Placeholder 1"/>
+          <p:cNvSpPr>
+            <a:spLocks noGrp="1" noRot="1" noChangeAspect="1"/>
+          </p:cNvSpPr>
+          <p:nvPr>
+            <p:ph type="sldImg"/>
+          </p:nvPr>
+        </p:nvSpPr>
+        <p:spPr/>
+      </p:sp>
+      <p:sp>
+        <p:nvSpPr>
+          <p:cNvPr id="3" name="Notes Placeholder 2"/>
+          <p:cNvSpPr>
+            <a:spLocks noGrp="1"/>
+          </p:cNvSpPr>
+          <p:nvPr>
+            <p:ph type="body" idx="1"/>
+          </p:nvPr>
+        </p:nvSpPr>
+        <p:spPr/>
+        <p:txBody>
+          <a:bodyPr/>
+          <a:lstStyle/>
+          <a:p>
+            <a:endParaRPr lang="en-US" dirty="0"/>
+          </a:p>
+        </p:txBody>
+      </p:sp>
+      <p:sp>
+        <p:nvSpPr>
+          <p:cNvPr id="4" name="Slide Number Placeholder 3"/>
+          <p:cNvSpPr>
+            <a:spLocks noGrp="1"/>
+          </p:cNvSpPr>
+          <p:nvPr>
+            <p:ph type="sldNum" sz="quarter" idx="10"/>
+          </p:nvPr>
+        </p:nvSpPr>
+        <p:spPr/>
+        <p:txBody>
+          <a:bodyPr/>
+          <a:lstStyle/>
+          <a:p>
+            <a:fld id="{F7021451-1387-4CA6-816F-3879F97B5CBC}" type="slidenum">
+              <a:rPr lang="en-US"/>
+              <a:t>5</a:t>
+            </a:fld>
+            <a:endParaRPr lang="en-US"/>
+          </a:p>
+        </p:txBody>
+      </p:sp>
+    </p:spTree>
+    <p:extLst>
+      <p:ext uri="{BB962C8B-B14F-4D97-AF65-F5344CB8AC3E}">
+        <p14:creationId xmlns:p14="http://schemas.microsoft.com/office/powerpoint/2010/main" val="3640096455"/>
+      </p:ext>
+    </p:extLst>
+  </p:cSld>
+  <p:clrMapOvr>
+    <a:masterClrMapping/>
+  </p:clrMapOvr>
+</p:notes>
+</file>
+
 <file path=ppt/slideLayouts/slideLayout1.xml><?xml version="1.0" encoding="utf-8"?>
 <p:sldLayout xmlns:a="http://schemas.openxmlformats.org/drawingml/2006/main" xmlns:r="http://schemas.openxmlformats.org/officeDocument/2006/relationships" xmlns:p="http://schemas.openxmlformats.org/presentationml/2006/main" type="title" preserve="1">
   <p:cSld name="タイトル スライド">
@@ -2543,6 +2883,41 @@
 </file>
 
 <file path=ppt/slideLayouts/slideLayout7.xml><?xml version="1.0" encoding="utf-8"?>
+<p:sldLayout xmlns:a="http://schemas.openxmlformats.org/drawingml/2006/main" xmlns:r="http://schemas.openxmlformats.org/officeDocument/2006/relationships" xmlns:p="http://schemas.openxmlformats.org/presentationml/2006/main">
+  <p:cSld name="DEFAULT">
+    <p:bg>
+      <p:bgRef idx="1001">
+        <a:schemeClr val="bg1"/>
+      </p:bgRef>
+    </p:bg>
+    <p:spTree>
+      <p:nvGrpSpPr>
+        <p:cNvPr id="1" name=""/>
+        <p:cNvGrpSpPr/>
+        <p:nvPr/>
+      </p:nvGrpSpPr>
+      <p:grpSpPr>
+        <a:xfrm>
+          <a:off x="0" y="0"/>
+          <a:ext cx="0" cy="0"/>
+          <a:chOff x="0" y="0"/>
+          <a:chExt cx="0" cy="0"/>
+        </a:xfrm>
+      </p:grpSpPr>
+    </p:spTree>
+    <p:extLst>
+      <p:ext uri="{BB962C8B-B14F-4D97-AF65-F5344CB8AC3E}">
+        <p14:creationId xmlns:p14="http://schemas.microsoft.com/office/powerpoint/2010/main" val="871723924"/>
+      </p:ext>
+    </p:extLst>
+  </p:cSld>
+  <p:clrMapOvr>
+    <a:masterClrMapping/>
+  </p:clrMapOvr>
+</p:sldLayout>
+</file>
+
+<file path=ppt/slideLayouts/slideLayout8.xml><?xml version="1.0" encoding="utf-8"?>
 <p:sldLayout xmlns:a="http://schemas.openxmlformats.org/drawingml/2006/main" xmlns:r="http://schemas.openxmlformats.org/officeDocument/2006/relationships" xmlns:p="http://schemas.openxmlformats.org/presentationml/2006/main" type="blank" preserve="1">
   <p:cSld name="白紙">
     <p:spTree>
@@ -2582,7 +2957,7 @@
           <a:p>
             <a:fld id="{A1E4D65A-0EC1-4CBC-8539-F9FD2B92F981}" type="datetimeFigureOut">
               <a:rPr kumimoji="1" lang="ja-JP" altLang="en-US" smtClean="0"/>
-              <a:t>2026/9/28</a:t>
+              <a:t>2026/9/30</a:t>
             </a:fld>
             <a:endParaRPr kumimoji="1" lang="ja-JP" altLang="en-US"/>
           </a:p>
@@ -3289,7 +3664,7 @@
           <p:nvPr userDrawn="1"/>
         </p:nvPicPr>
         <p:blipFill>
-          <a:blip r:embed="rId8">
+          <a:blip r:embed="rId9">
             <a:extLst>
               <a:ext uri="{28A0092B-C50C-407E-A947-70E740481C1C}">
                 <a14:useLocalDpi xmlns:a14="http://schemas.microsoft.com/office/drawing/2010/main" val="0"/>
@@ -4325,7 +4700,7 @@
                 <a14:useLocalDpi xmlns:a14="http://schemas.microsoft.com/office/drawing/2010/main"/>
               </a:ext>
               <a:ext uri="{96DAC541-7B7A-43D3-8B79-37D633B846F1}">
-                <asvg:svgBlip xmlns:asvg="http://schemas.microsoft.com/office/drawing/2016/SVG/main" r:embed="rId9"/>
+                <asvg:svgBlip xmlns:asvg="http://schemas.microsoft.com/office/drawing/2016/SVG/main" r:embed="rId10"/>
               </a:ext>
             </a:extLst>
           </a:blip>
@@ -4353,6 +4728,7 @@
     <p:sldLayoutId id="2147483792" r:id="rId4"/>
     <p:sldLayoutId id="2147483789" r:id="rId5"/>
     <p:sldLayoutId id="2147483793" r:id="rId6"/>
+    <p:sldLayoutId id="2147483804" r:id="rId7"/>
   </p:sldLayoutIdLst>
   <p:hf hdr="0" ftr="0" dt="0"/>
   <p:txStyles>
@@ -4944,7 +5320,7 @@
           <a:p>
             <a:fld id="{A1E4D65A-0EC1-4CBC-8539-F9FD2B92F981}" type="datetimeFigureOut">
               <a:rPr kumimoji="1" lang="ja-JP" altLang="en-US" smtClean="0"/>
-              <a:t>2026/9/28</a:t>
+              <a:t>2026/9/30</a:t>
             </a:fld>
             <a:endParaRPr kumimoji="1" lang="ja-JP" altLang="en-US"/>
           </a:p>
@@ -5543,6 +5919,1626 @@
   <p:cSld>
     <p:spTree>
       <p:nvGrpSpPr>
+        <p:cNvPr id="1" name=""/>
+        <p:cNvGrpSpPr/>
+        <p:nvPr/>
+      </p:nvGrpSpPr>
+      <p:grpSpPr>
+        <a:xfrm>
+          <a:off x="0" y="0"/>
+          <a:ext cx="0" cy="0"/>
+          <a:chOff x="0" y="0"/>
+          <a:chExt cx="0" cy="0"/>
+        </a:xfrm>
+      </p:grpSpPr>
+      <p:sp>
+        <p:nvSpPr>
+          <p:cNvPr id="2" name="Title 1">
+            <a:extLst>
+              <a:ext uri="{FF2B5EF4-FFF2-40B4-BE49-F238E27FC236}">
+                <a16:creationId xmlns:a16="http://schemas.microsoft.com/office/drawing/2014/main" id="{80E151F3-AF55-B341-D706-F3866DA32372}"/>
+              </a:ext>
+            </a:extLst>
+          </p:cNvPr>
+          <p:cNvSpPr>
+            <a:spLocks noGrp="1"/>
+          </p:cNvSpPr>
+          <p:nvPr>
+            <p:ph type="title"/>
+          </p:nvPr>
+        </p:nvSpPr>
+        <p:spPr/>
+        <p:txBody>
+          <a:bodyPr>
+            <a:noAutofit/>
+          </a:bodyPr>
+          <a:lstStyle/>
+          <a:p>
+            <a:r>
+              <a:rPr kumimoji="1" lang="en-US" altLang="ja-JP" sz="4000" dirty="0"/>
+              <a:t>So </a:t>
+            </a:r>
+            <a:r>
+              <a:rPr kumimoji="1" lang="en-US" altLang="ja-JP" sz="4000" dirty="0" err="1"/>
+              <a:t>sánh</a:t>
+            </a:r>
+            <a:r>
+              <a:rPr kumimoji="1" lang="en-US" altLang="ja-JP" sz="4000" dirty="0"/>
+              <a:t> </a:t>
+            </a:r>
+            <a:r>
+              <a:rPr kumimoji="1" lang="en-US" altLang="ja-JP" sz="4000" dirty="0" err="1"/>
+              <a:t>phong</a:t>
+            </a:r>
+            <a:r>
+              <a:rPr kumimoji="1" lang="en-US" altLang="ja-JP" sz="4000" dirty="0"/>
+              <a:t> </a:t>
+            </a:r>
+            <a:r>
+              <a:rPr kumimoji="1" lang="en-US" altLang="ja-JP" sz="4000" dirty="0" err="1"/>
+              <a:t>cách</a:t>
+            </a:r>
+            <a:r>
+              <a:rPr kumimoji="1" lang="en-US" altLang="ja-JP" sz="4000" dirty="0"/>
+              <a:t> </a:t>
+            </a:r>
+            <a:r>
+              <a:rPr kumimoji="1" lang="en-US" altLang="ja-JP" sz="4000" dirty="0" err="1"/>
+              <a:t>lập</a:t>
+            </a:r>
+            <a:r>
+              <a:rPr kumimoji="1" lang="en-US" altLang="ja-JP" sz="4000" dirty="0"/>
+              <a:t> </a:t>
+            </a:r>
+            <a:r>
+              <a:rPr kumimoji="1" lang="en-US" altLang="ja-JP" sz="4000" dirty="0" err="1"/>
+              <a:t>trình</a:t>
+            </a:r>
+            <a:endParaRPr kumimoji="1" lang="ja-JP" altLang="en-US" sz="4000" dirty="0"/>
+          </a:p>
+        </p:txBody>
+      </p:sp>
+      <p:graphicFrame>
+        <p:nvGraphicFramePr>
+          <p:cNvPr id="5" name="Content Placeholder 4">
+            <a:extLst>
+              <a:ext uri="{FF2B5EF4-FFF2-40B4-BE49-F238E27FC236}">
+                <a16:creationId xmlns:a16="http://schemas.microsoft.com/office/drawing/2014/main" id="{73F46A97-CCDC-DAD5-29D5-81885FFEC3D1}"/>
+              </a:ext>
+            </a:extLst>
+          </p:cNvPr>
+          <p:cNvGraphicFramePr>
+            <a:graphicFrameLocks noGrp="1"/>
+          </p:cNvGraphicFramePr>
+          <p:nvPr>
+            <p:ph idx="1"/>
+            <p:extLst>
+              <p:ext uri="{D42A27DB-BD31-4B8C-83A1-F6EECF244321}">
+                <p14:modId xmlns:p14="http://schemas.microsoft.com/office/powerpoint/2010/main" val="13757083"/>
+              </p:ext>
+            </p:extLst>
+          </p:nvPr>
+        </p:nvGraphicFramePr>
+        <p:xfrm>
+          <a:off x="128588" y="1447800"/>
+          <a:ext cx="9648824" cy="4649650"/>
+        </p:xfrm>
+        <a:graphic>
+          <a:graphicData uri="http://schemas.openxmlformats.org/drawingml/2006/table">
+            <a:tbl>
+              <a:tblPr>
+                <a:tableStyleId>{5C22544A-7EE6-4342-B048-85BDC9FD1C3A}</a:tableStyleId>
+              </a:tblPr>
+              <a:tblGrid>
+                <a:gridCol w="4824412">
+                  <a:extLst>
+                    <a:ext uri="{9D8B030D-6E8A-4147-A177-3AD203B41FA5}">
+                      <a16:colId xmlns:a16="http://schemas.microsoft.com/office/drawing/2014/main" val="1500319441"/>
+                    </a:ext>
+                  </a:extLst>
+                </a:gridCol>
+                <a:gridCol w="4824412">
+                  <a:extLst>
+                    <a:ext uri="{9D8B030D-6E8A-4147-A177-3AD203B41FA5}">
+                      <a16:colId xmlns:a16="http://schemas.microsoft.com/office/drawing/2014/main" val="4046171375"/>
+                    </a:ext>
+                  </a:extLst>
+                </a:gridCol>
+              </a:tblGrid>
+              <a:tr h="665959">
+                <a:tc>
+                  <a:txBody>
+                    <a:bodyPr/>
+                    <a:lstStyle/>
+                    <a:p>
+                      <a:pPr>
+                        <a:buNone/>
+                      </a:pPr>
+                      <a:r>
+                        <a:rPr lang="ja-JP" sz="2800">
+                          <a:effectLst/>
+                        </a:rPr>
+                        <a:t>Imperative</a:t>
+                      </a:r>
+                    </a:p>
+                  </a:txBody>
+                  <a:tcPr marL="90458" marR="90458" marT="45229" marB="45229" anchor="ctr"/>
+                </a:tc>
+                <a:tc>
+                  <a:txBody>
+                    <a:bodyPr/>
+                    <a:lstStyle/>
+                    <a:p>
+                      <a:pPr>
+                        <a:buNone/>
+                      </a:pPr>
+                      <a:r>
+                        <a:rPr lang="ja-JP" sz="2800" dirty="0">
+                          <a:effectLst/>
+                        </a:rPr>
+                        <a:t>Declarative</a:t>
+                      </a:r>
+                    </a:p>
+                  </a:txBody>
+                  <a:tcPr marL="90458" marR="90458" marT="45229" marB="45229" anchor="ctr"/>
+                </a:tc>
+                <a:extLst>
+                  <a:ext uri="{0D108BD9-81ED-4DB2-BD59-A6C34878D82A}">
+                    <a16:rowId xmlns:a16="http://schemas.microsoft.com/office/drawing/2014/main" val="3236088624"/>
+                  </a:ext>
+                </a:extLst>
+              </a:tr>
+              <a:tr h="665959">
+                <a:tc>
+                  <a:txBody>
+                    <a:bodyPr/>
+                    <a:lstStyle/>
+                    <a:p>
+                      <a:pPr>
+                        <a:buNone/>
+                      </a:pPr>
+                      <a:r>
+                        <a:rPr lang="ja-JP" sz="2800" dirty="0">
+                          <a:effectLst/>
+                        </a:rPr>
+                        <a:t>Mô tả cách làm</a:t>
+                      </a:r>
+                    </a:p>
+                  </a:txBody>
+                  <a:tcPr marL="90458" marR="90458" marT="45229" marB="45229" anchor="ctr"/>
+                </a:tc>
+                <a:tc>
+                  <a:txBody>
+                    <a:bodyPr/>
+                    <a:lstStyle/>
+                    <a:p>
+                      <a:pPr>
+                        <a:buNone/>
+                      </a:pPr>
+                      <a:r>
+                        <a:rPr lang="ja-JP" sz="2800">
+                          <a:effectLst/>
+                        </a:rPr>
+                        <a:t>Mô tả kết quả</a:t>
+                      </a:r>
+                    </a:p>
+                  </a:txBody>
+                  <a:tcPr marL="90458" marR="90458" marT="45229" marB="45229" anchor="ctr"/>
+                </a:tc>
+                <a:extLst>
+                  <a:ext uri="{0D108BD9-81ED-4DB2-BD59-A6C34878D82A}">
+                    <a16:rowId xmlns:a16="http://schemas.microsoft.com/office/drawing/2014/main" val="87048020"/>
+                  </a:ext>
+                </a:extLst>
+              </a:tr>
+              <a:tr h="665959">
+                <a:tc>
+                  <a:txBody>
+                    <a:bodyPr/>
+                    <a:lstStyle/>
+                    <a:p>
+                      <a:pPr>
+                        <a:buNone/>
+                      </a:pPr>
+                      <a:r>
+                        <a:rPr lang="ja-JP" sz="2800" dirty="0">
+                          <a:effectLst/>
+                        </a:rPr>
+                        <a:t>Tập trung vào "How"</a:t>
+                      </a:r>
+                    </a:p>
+                  </a:txBody>
+                  <a:tcPr marL="90458" marR="90458" marT="45229" marB="45229" anchor="ctr"/>
+                </a:tc>
+                <a:tc>
+                  <a:txBody>
+                    <a:bodyPr/>
+                    <a:lstStyle/>
+                    <a:p>
+                      <a:pPr>
+                        <a:buNone/>
+                      </a:pPr>
+                      <a:r>
+                        <a:rPr lang="ja-JP" sz="2800">
+                          <a:effectLst/>
+                        </a:rPr>
+                        <a:t>Tập trung vào "What"</a:t>
+                      </a:r>
+                    </a:p>
+                  </a:txBody>
+                  <a:tcPr marL="90458" marR="90458" marT="45229" marB="45229" anchor="ctr"/>
+                </a:tc>
+                <a:extLst>
+                  <a:ext uri="{0D108BD9-81ED-4DB2-BD59-A6C34878D82A}">
+                    <a16:rowId xmlns:a16="http://schemas.microsoft.com/office/drawing/2014/main" val="2165300534"/>
+                  </a:ext>
+                </a:extLst>
+              </a:tr>
+              <a:tr h="1215437">
+                <a:tc>
+                  <a:txBody>
+                    <a:bodyPr/>
+                    <a:lstStyle/>
+                    <a:p>
+                      <a:pPr>
+                        <a:buNone/>
+                      </a:pPr>
+                      <a:r>
+                        <a:rPr lang="ja-JP" sz="2800">
+                          <a:effectLst/>
+                        </a:rPr>
+                        <a:t>Dùng vòng lặp, biến trạng thái</a:t>
+                      </a:r>
+                    </a:p>
+                  </a:txBody>
+                  <a:tcPr marL="90458" marR="90458" marT="45229" marB="45229" anchor="ctr"/>
+                </a:tc>
+                <a:tc>
+                  <a:txBody>
+                    <a:bodyPr/>
+                    <a:lstStyle/>
+                    <a:p>
+                      <a:pPr>
+                        <a:buNone/>
+                      </a:pPr>
+                      <a:r>
+                        <a:rPr lang="ja-JP" sz="2800" dirty="0">
+                          <a:effectLst/>
+                        </a:rPr>
+                        <a:t>Dùng biểu thức, pipeline</a:t>
+                      </a:r>
+                    </a:p>
+                  </a:txBody>
+                  <a:tcPr marL="90458" marR="90458" marT="45229" marB="45229" anchor="ctr"/>
+                </a:tc>
+                <a:extLst>
+                  <a:ext uri="{0D108BD9-81ED-4DB2-BD59-A6C34878D82A}">
+                    <a16:rowId xmlns:a16="http://schemas.microsoft.com/office/drawing/2014/main" val="2378857263"/>
+                  </a:ext>
+                </a:extLst>
+              </a:tr>
+              <a:tr h="665959">
+                <a:tc>
+                  <a:txBody>
+                    <a:bodyPr/>
+                    <a:lstStyle/>
+                    <a:p>
+                      <a:pPr>
+                        <a:buNone/>
+                      </a:pPr>
+                      <a:r>
+                        <a:rPr lang="ja-JP" sz="2800">
+                          <a:effectLst/>
+                        </a:rPr>
+                        <a:t>Kiểm soát chi tiết</a:t>
+                      </a:r>
+                    </a:p>
+                  </a:txBody>
+                  <a:tcPr marL="90458" marR="90458" marT="45229" marB="45229" anchor="ctr"/>
+                </a:tc>
+                <a:tc>
+                  <a:txBody>
+                    <a:bodyPr/>
+                    <a:lstStyle/>
+                    <a:p>
+                      <a:pPr>
+                        <a:buNone/>
+                      </a:pPr>
+                      <a:r>
+                        <a:rPr lang="ja-JP" sz="2800">
+                          <a:effectLst/>
+                        </a:rPr>
+                        <a:t>Trừu tượng cao</a:t>
+                      </a:r>
+                    </a:p>
+                  </a:txBody>
+                  <a:tcPr marL="90458" marR="90458" marT="45229" marB="45229" anchor="ctr"/>
+                </a:tc>
+                <a:extLst>
+                  <a:ext uri="{0D108BD9-81ED-4DB2-BD59-A6C34878D82A}">
+                    <a16:rowId xmlns:a16="http://schemas.microsoft.com/office/drawing/2014/main" val="2971337053"/>
+                  </a:ext>
+                </a:extLst>
+              </a:tr>
+              <a:tr h="770377">
+                <a:tc>
+                  <a:txBody>
+                    <a:bodyPr/>
+                    <a:lstStyle/>
+                    <a:p>
+                      <a:pPr>
+                        <a:buNone/>
+                      </a:pPr>
+                      <a:r>
+                        <a:rPr lang="ja-JP" sz="2800">
+                          <a:effectLst/>
+                        </a:rPr>
+                        <a:t>Code thường dài hơn</a:t>
+                      </a:r>
+                    </a:p>
+                  </a:txBody>
+                  <a:tcPr marL="90458" marR="90458" marT="45229" marB="45229" anchor="ctr"/>
+                </a:tc>
+                <a:tc>
+                  <a:txBody>
+                    <a:bodyPr/>
+                    <a:lstStyle/>
+                    <a:p>
+                      <a:pPr fontAlgn="t">
+                        <a:lnSpc>
+                          <a:spcPct val="119048"/>
+                        </a:lnSpc>
+                        <a:buNone/>
+                      </a:pPr>
+                      <a:r>
+                        <a:rPr lang="ja-JP" sz="2800" dirty="0">
+                          <a:effectLst/>
+                        </a:rPr>
+                        <a:t>Code thường ngắn gọn hơn</a:t>
+                      </a:r>
+                      <a:endParaRPr lang="ja-JP" sz="1200" b="0" i="0" dirty="0">
+                        <a:effectLst/>
+                        <a:latin typeface="Segoe UI" panose="020B0502040204020203" pitchFamily="34" charset="0"/>
+                      </a:endParaRPr>
+                    </a:p>
+                  </a:txBody>
+                  <a:tcPr marL="90458" marR="90458" marT="45229" marB="45229" anchor="ctr"/>
+                </a:tc>
+                <a:extLst>
+                  <a:ext uri="{0D108BD9-81ED-4DB2-BD59-A6C34878D82A}">
+                    <a16:rowId xmlns:a16="http://schemas.microsoft.com/office/drawing/2014/main" val="3972626888"/>
+                  </a:ext>
+                </a:extLst>
+              </a:tr>
+            </a:tbl>
+          </a:graphicData>
+        </a:graphic>
+      </p:graphicFrame>
+      <p:sp>
+        <p:nvSpPr>
+          <p:cNvPr id="4" name="Slide Number Placeholder 3">
+            <a:extLst>
+              <a:ext uri="{FF2B5EF4-FFF2-40B4-BE49-F238E27FC236}">
+                <a16:creationId xmlns:a16="http://schemas.microsoft.com/office/drawing/2014/main" id="{890183B7-5A29-B9FA-9867-553F77D67520}"/>
+              </a:ext>
+            </a:extLst>
+          </p:cNvPr>
+          <p:cNvSpPr>
+            <a:spLocks noGrp="1"/>
+          </p:cNvSpPr>
+          <p:nvPr>
+            <p:ph type="sldNum" sz="quarter" idx="11"/>
+          </p:nvPr>
+        </p:nvSpPr>
+        <p:spPr/>
+        <p:txBody>
+          <a:bodyPr/>
+          <a:lstStyle/>
+          <a:p>
+            <a:pPr>
+              <a:defRPr/>
+            </a:pPr>
+            <a:r>
+              <a:rPr lang="en-US" altLang="ja-JP"/>
+              <a:t>Page:</a:t>
+            </a:r>
+            <a:r>
+              <a:rPr lang="ja-JP" altLang="en-US"/>
+              <a:t> </a:t>
+            </a:r>
+            <a:fld id="{DC07468E-517B-4E9D-8840-A4568A307980}" type="slidenum">
+              <a:rPr lang="en-US" altLang="ja-JP" smtClean="0"/>
+              <a:pPr>
+                <a:defRPr/>
+              </a:pPr>
+              <a:t>10</a:t>
+            </a:fld>
+            <a:endParaRPr lang="en-US" altLang="ja-JP"/>
+          </a:p>
+        </p:txBody>
+      </p:sp>
+    </p:spTree>
+    <p:extLst>
+      <p:ext uri="{BB962C8B-B14F-4D97-AF65-F5344CB8AC3E}">
+        <p14:creationId xmlns:p14="http://schemas.microsoft.com/office/powerpoint/2010/main" val="3445657805"/>
+      </p:ext>
+    </p:extLst>
+  </p:cSld>
+  <p:clrMapOvr>
+    <a:masterClrMapping/>
+  </p:clrMapOvr>
+</p:sld>
+</file>
+
+<file path=ppt/slides/slide11.xml><?xml version="1.0" encoding="utf-8"?>
+<p:sld xmlns:a="http://schemas.openxmlformats.org/drawingml/2006/main" xmlns:r="http://schemas.openxmlformats.org/officeDocument/2006/relationships" xmlns:p="http://schemas.openxmlformats.org/presentationml/2006/main">
+  <p:cSld>
+    <p:spTree>
+      <p:nvGrpSpPr>
+        <p:cNvPr id="1" name=""/>
+        <p:cNvGrpSpPr/>
+        <p:nvPr/>
+      </p:nvGrpSpPr>
+      <p:grpSpPr>
+        <a:xfrm>
+          <a:off x="0" y="0"/>
+          <a:ext cx="0" cy="0"/>
+          <a:chOff x="0" y="0"/>
+          <a:chExt cx="0" cy="0"/>
+        </a:xfrm>
+      </p:grpSpPr>
+      <p:sp>
+        <p:nvSpPr>
+          <p:cNvPr id="2" name="Title 1">
+            <a:extLst>
+              <a:ext uri="{FF2B5EF4-FFF2-40B4-BE49-F238E27FC236}">
+                <a16:creationId xmlns:a16="http://schemas.microsoft.com/office/drawing/2014/main" id="{14AA90DC-076A-E9E6-69E1-7EA02A5E4161}"/>
+              </a:ext>
+            </a:extLst>
+          </p:cNvPr>
+          <p:cNvSpPr>
+            <a:spLocks noGrp="1"/>
+          </p:cNvSpPr>
+          <p:nvPr>
+            <p:ph type="title"/>
+          </p:nvPr>
+        </p:nvSpPr>
+        <p:spPr/>
+        <p:txBody>
+          <a:bodyPr>
+            <a:normAutofit fontScale="90000"/>
+          </a:bodyPr>
+          <a:lstStyle/>
+          <a:p>
+            <a:r>
+              <a:rPr lang="ja-JP" altLang="ja-JP" b="1" dirty="0"/>
+              <a:t>Trong thực tế Java</a:t>
+            </a:r>
+            <a:endParaRPr kumimoji="1" lang="ja-JP" altLang="en-US" dirty="0"/>
+          </a:p>
+        </p:txBody>
+      </p:sp>
+      <p:sp>
+        <p:nvSpPr>
+          <p:cNvPr id="3" name="Content Placeholder 2">
+            <a:extLst>
+              <a:ext uri="{FF2B5EF4-FFF2-40B4-BE49-F238E27FC236}">
+                <a16:creationId xmlns:a16="http://schemas.microsoft.com/office/drawing/2014/main" id="{8ECD80A5-39B0-0CAE-4EA8-7C30EE8C5FDC}"/>
+              </a:ext>
+            </a:extLst>
+          </p:cNvPr>
+          <p:cNvSpPr>
+            <a:spLocks noGrp="1"/>
+          </p:cNvSpPr>
+          <p:nvPr>
+            <p:ph idx="1"/>
+          </p:nvPr>
+        </p:nvSpPr>
+        <p:spPr/>
+        <p:txBody>
+          <a:bodyPr>
+            <a:normAutofit/>
+          </a:bodyPr>
+          <a:lstStyle/>
+          <a:p>
+            <a:pPr algn="just" fontAlgn="t">
+              <a:lnSpc>
+                <a:spcPct val="100000"/>
+              </a:lnSpc>
+              <a:buNone/>
+            </a:pPr>
+            <a:r>
+              <a:rPr lang="ja-JP" altLang="ja-JP" dirty="0"/>
+              <a:t>Lập trình Java thường là </a:t>
+            </a:r>
+            <a:r>
+              <a:rPr lang="ja-JP" altLang="ja-JP" b="1" dirty="0"/>
+              <a:t>kết hợp cả hai</a:t>
+            </a:r>
+            <a:r>
+              <a:rPr lang="ja-JP" altLang="ja-JP" dirty="0"/>
+              <a:t>:</a:t>
+            </a:r>
+          </a:p>
+          <a:p>
+            <a:pPr lvl="0" algn="just" fontAlgn="t">
+              <a:buFont typeface="Arial" panose="020B0604020202020204" pitchFamily="34" charset="0"/>
+              <a:buChar char="•"/>
+            </a:pPr>
+            <a:r>
+              <a:rPr lang="ja-JP" altLang="ja-JP" dirty="0"/>
+              <a:t>Xử lý nghiệp vụ đơn giản</a:t>
+            </a:r>
+            <a:r>
+              <a:rPr lang="en-US" altLang="ja-JP" dirty="0"/>
+              <a:t> </a:t>
+            </a:r>
+            <a:r>
+              <a:rPr lang="ja-JP" altLang="ja-JP" dirty="0"/>
+              <a:t>→ </a:t>
+            </a:r>
+            <a:r>
+              <a:rPr lang="ja-JP" altLang="ja-JP" b="1" dirty="0"/>
+              <a:t>Declarative</a:t>
+            </a:r>
+            <a:endParaRPr lang="ja-JP" altLang="ja-JP" dirty="0"/>
+          </a:p>
+          <a:p>
+            <a:pPr lvl="0" algn="just" fontAlgn="t">
+              <a:buFont typeface="Arial" panose="020B0604020202020204" pitchFamily="34" charset="0"/>
+              <a:buChar char="•"/>
+            </a:pPr>
+            <a:r>
+              <a:rPr lang="ja-JP" altLang="ja-JP" dirty="0"/>
+              <a:t>Thuật toán phức tạp, cấu trúc dữ liệu, tối ưu hiệu năng → </a:t>
+            </a:r>
+            <a:r>
+              <a:rPr lang="ja-JP" altLang="ja-JP" b="1" dirty="0"/>
+              <a:t>Imperative</a:t>
+            </a:r>
+            <a:endParaRPr lang="ja-JP" altLang="ja-JP" dirty="0"/>
+          </a:p>
+          <a:p>
+            <a:pPr algn="just"/>
+            <a:endParaRPr kumimoji="1" lang="ja-JP" altLang="en-US" dirty="0"/>
+          </a:p>
+        </p:txBody>
+      </p:sp>
+      <p:sp>
+        <p:nvSpPr>
+          <p:cNvPr id="4" name="Slide Number Placeholder 3">
+            <a:extLst>
+              <a:ext uri="{FF2B5EF4-FFF2-40B4-BE49-F238E27FC236}">
+                <a16:creationId xmlns:a16="http://schemas.microsoft.com/office/drawing/2014/main" id="{7E7ACA87-BAB9-9107-6C03-B64427197081}"/>
+              </a:ext>
+            </a:extLst>
+          </p:cNvPr>
+          <p:cNvSpPr>
+            <a:spLocks noGrp="1"/>
+          </p:cNvSpPr>
+          <p:nvPr>
+            <p:ph type="sldNum" sz="quarter" idx="11"/>
+          </p:nvPr>
+        </p:nvSpPr>
+        <p:spPr/>
+        <p:txBody>
+          <a:bodyPr/>
+          <a:lstStyle/>
+          <a:p>
+            <a:pPr>
+              <a:defRPr/>
+            </a:pPr>
+            <a:r>
+              <a:rPr lang="en-US" altLang="ja-JP"/>
+              <a:t>Page:</a:t>
+            </a:r>
+            <a:r>
+              <a:rPr lang="ja-JP" altLang="en-US"/>
+              <a:t> </a:t>
+            </a:r>
+            <a:fld id="{DC07468E-517B-4E9D-8840-A4568A307980}" type="slidenum">
+              <a:rPr lang="en-US" altLang="ja-JP" smtClean="0"/>
+              <a:pPr>
+                <a:defRPr/>
+              </a:pPr>
+              <a:t>11</a:t>
+            </a:fld>
+            <a:endParaRPr lang="en-US" altLang="ja-JP"/>
+          </a:p>
+        </p:txBody>
+      </p:sp>
+    </p:spTree>
+    <p:extLst>
+      <p:ext uri="{BB962C8B-B14F-4D97-AF65-F5344CB8AC3E}">
+        <p14:creationId xmlns:p14="http://schemas.microsoft.com/office/powerpoint/2010/main" val="3048535641"/>
+      </p:ext>
+    </p:extLst>
+  </p:cSld>
+  <p:clrMapOvr>
+    <a:masterClrMapping/>
+  </p:clrMapOvr>
+</p:sld>
+</file>
+
+<file path=ppt/slides/slide12.xml><?xml version="1.0" encoding="utf-8"?>
+<p:sld xmlns:a="http://schemas.openxmlformats.org/drawingml/2006/main" xmlns:r="http://schemas.openxmlformats.org/officeDocument/2006/relationships" xmlns:p="http://schemas.openxmlformats.org/presentationml/2006/main">
+  <p:cSld>
+    <p:spTree>
+      <p:nvGrpSpPr>
+        <p:cNvPr id="1" name=""/>
+        <p:cNvGrpSpPr/>
+        <p:nvPr/>
+      </p:nvGrpSpPr>
+      <p:grpSpPr>
+        <a:xfrm>
+          <a:off x="0" y="0"/>
+          <a:ext cx="0" cy="0"/>
+          <a:chOff x="0" y="0"/>
+          <a:chExt cx="0" cy="0"/>
+        </a:xfrm>
+      </p:grpSpPr>
+      <p:sp>
+        <p:nvSpPr>
+          <p:cNvPr id="2" name="Title 1">
+            <a:extLst>
+              <a:ext uri="{FF2B5EF4-FFF2-40B4-BE49-F238E27FC236}">
+                <a16:creationId xmlns:a16="http://schemas.microsoft.com/office/drawing/2014/main" id="{6D131171-3C82-C10D-1DBF-6AC8797546A3}"/>
+              </a:ext>
+            </a:extLst>
+          </p:cNvPr>
+          <p:cNvSpPr>
+            <a:spLocks noGrp="1"/>
+          </p:cNvSpPr>
+          <p:nvPr>
+            <p:ph type="title"/>
+          </p:nvPr>
+        </p:nvSpPr>
+        <p:spPr/>
+        <p:txBody>
+          <a:bodyPr>
+            <a:normAutofit fontScale="90000"/>
+          </a:bodyPr>
+          <a:lstStyle/>
+          <a:p>
+            <a:r>
+              <a:rPr lang="ja-JP" altLang="ja-JP" b="1" dirty="0"/>
+              <a:t>Biểu Thức Lambda</a:t>
+            </a:r>
+            <a:endParaRPr kumimoji="1" lang="ja-JP" altLang="en-US" dirty="0"/>
+          </a:p>
+        </p:txBody>
+      </p:sp>
+      <p:sp>
+        <p:nvSpPr>
+          <p:cNvPr id="3" name="Content Placeholder 2">
+            <a:extLst>
+              <a:ext uri="{FF2B5EF4-FFF2-40B4-BE49-F238E27FC236}">
+                <a16:creationId xmlns:a16="http://schemas.microsoft.com/office/drawing/2014/main" id="{C5901082-898B-062E-EF7E-20E35A93A344}"/>
+              </a:ext>
+            </a:extLst>
+          </p:cNvPr>
+          <p:cNvSpPr>
+            <a:spLocks noGrp="1"/>
+          </p:cNvSpPr>
+          <p:nvPr>
+            <p:ph idx="1"/>
+          </p:nvPr>
+        </p:nvSpPr>
+        <p:spPr/>
+        <p:txBody>
+          <a:bodyPr>
+            <a:normAutofit fontScale="92500" lnSpcReduction="20000"/>
+          </a:bodyPr>
+          <a:lstStyle/>
+          <a:p>
+            <a:pPr algn="just"/>
+            <a:r>
+              <a:rPr lang="ja-JP" altLang="ja-JP" dirty="0"/>
+              <a:t>Biểu thức Lambda là một cách để biểu diễn các hàm ẩn danh (anonymous functions) trong Java</a:t>
+            </a:r>
+            <a:endParaRPr lang="en-US" altLang="ja-JP" dirty="0"/>
+          </a:p>
+          <a:p>
+            <a:pPr algn="just"/>
+            <a:r>
+              <a:rPr lang="en-US" altLang="ja-JP" dirty="0"/>
+              <a:t>C</a:t>
+            </a:r>
+            <a:r>
+              <a:rPr lang="ja-JP" altLang="ja-JP" dirty="0"/>
+              <a:t>ho phép </a:t>
+            </a:r>
+            <a:r>
+              <a:rPr lang="en-US" altLang="ja-JP" dirty="0"/>
+              <a:t>t</a:t>
+            </a:r>
+            <a:r>
+              <a:rPr lang="ja-JP" altLang="ja-JP" dirty="0"/>
+              <a:t>ruyền một hàm dưới dạng tham số hoặc lưu trữ một hàm như một biến mà không cần khai báo một lớp cụ thể</a:t>
+            </a:r>
+            <a:endParaRPr lang="en-US" altLang="ja-JP" dirty="0"/>
+          </a:p>
+          <a:p>
+            <a:r>
+              <a:rPr lang="ja-JP" altLang="ja-JP" dirty="0"/>
+              <a:t>Cú pháp cơ bản của biểu thức Lambda trong Java như sau:</a:t>
+            </a:r>
+          </a:p>
+          <a:p>
+            <a:pPr marL="0" indent="0">
+              <a:buNone/>
+            </a:pPr>
+            <a:r>
+              <a:rPr lang="en-US" altLang="ja-JP" dirty="0"/>
+              <a:t>	</a:t>
+            </a:r>
+            <a:r>
+              <a:rPr lang="ja-JP" altLang="ja-JP" dirty="0"/>
+              <a:t>(parameter) -&gt; expression</a:t>
+            </a:r>
+          </a:p>
+          <a:p>
+            <a:pPr lvl="1">
+              <a:buFont typeface="Wingdings" panose="05000000000000000000" pitchFamily="2" charset="2"/>
+              <a:buChar char="n"/>
+            </a:pPr>
+            <a:r>
+              <a:rPr lang="ja-JP" altLang="ja-JP" dirty="0"/>
+              <a:t>Parameter: Danh sách các tham số của hàm.</a:t>
+            </a:r>
+          </a:p>
+          <a:p>
+            <a:pPr lvl="1">
+              <a:buFont typeface="Wingdings" panose="05000000000000000000" pitchFamily="2" charset="2"/>
+              <a:buChar char="n"/>
+            </a:pPr>
+            <a:r>
+              <a:rPr lang="ja-JP" altLang="ja-JP" dirty="0"/>
+              <a:t>-&gt;: Toán tử Lambda, phân tách tham số và thân hàm.</a:t>
+            </a:r>
+          </a:p>
+          <a:p>
+            <a:pPr lvl="1">
+              <a:buFont typeface="Wingdings" panose="05000000000000000000" pitchFamily="2" charset="2"/>
+              <a:buChar char="n"/>
+            </a:pPr>
+            <a:r>
+              <a:rPr lang="ja-JP" altLang="ja-JP" dirty="0"/>
+              <a:t>Expression: Thân hàm, chứa logic xử lý.</a:t>
+            </a:r>
+          </a:p>
+          <a:p>
+            <a:r>
+              <a:rPr lang="ja-JP" altLang="ja-JP" dirty="0"/>
+              <a:t>Ví dụ đơn giản: (x, y) -&gt; x + y</a:t>
+            </a:r>
+          </a:p>
+          <a:p>
+            <a:pPr algn="just"/>
+            <a:endParaRPr kumimoji="1" lang="ja-JP" altLang="en-US" dirty="0"/>
+          </a:p>
+        </p:txBody>
+      </p:sp>
+      <p:sp>
+        <p:nvSpPr>
+          <p:cNvPr id="4" name="Slide Number Placeholder 3">
+            <a:extLst>
+              <a:ext uri="{FF2B5EF4-FFF2-40B4-BE49-F238E27FC236}">
+                <a16:creationId xmlns:a16="http://schemas.microsoft.com/office/drawing/2014/main" id="{37B4A265-7203-3A63-36EE-CAD2F00B48A6}"/>
+              </a:ext>
+            </a:extLst>
+          </p:cNvPr>
+          <p:cNvSpPr>
+            <a:spLocks noGrp="1"/>
+          </p:cNvSpPr>
+          <p:nvPr>
+            <p:ph type="sldNum" sz="quarter" idx="11"/>
+          </p:nvPr>
+        </p:nvSpPr>
+        <p:spPr/>
+        <p:txBody>
+          <a:bodyPr/>
+          <a:lstStyle/>
+          <a:p>
+            <a:pPr>
+              <a:defRPr/>
+            </a:pPr>
+            <a:r>
+              <a:rPr lang="en-US" altLang="ja-JP"/>
+              <a:t>Page:</a:t>
+            </a:r>
+            <a:r>
+              <a:rPr lang="ja-JP" altLang="en-US"/>
+              <a:t> </a:t>
+            </a:r>
+            <a:fld id="{DC07468E-517B-4E9D-8840-A4568A307980}" type="slidenum">
+              <a:rPr lang="en-US" altLang="ja-JP" smtClean="0"/>
+              <a:pPr>
+                <a:defRPr/>
+              </a:pPr>
+              <a:t>12</a:t>
+            </a:fld>
+            <a:endParaRPr lang="en-US" altLang="ja-JP"/>
+          </a:p>
+        </p:txBody>
+      </p:sp>
+    </p:spTree>
+    <p:extLst>
+      <p:ext uri="{BB962C8B-B14F-4D97-AF65-F5344CB8AC3E}">
+        <p14:creationId xmlns:p14="http://schemas.microsoft.com/office/powerpoint/2010/main" val="148728616"/>
+      </p:ext>
+    </p:extLst>
+  </p:cSld>
+  <p:clrMapOvr>
+    <a:masterClrMapping/>
+  </p:clrMapOvr>
+</p:sld>
+</file>
+
+<file path=ppt/slides/slide13.xml><?xml version="1.0" encoding="utf-8"?>
+<p:sld xmlns:a="http://schemas.openxmlformats.org/drawingml/2006/main" xmlns:r="http://schemas.openxmlformats.org/officeDocument/2006/relationships" xmlns:p="http://schemas.openxmlformats.org/presentationml/2006/main">
+  <p:cSld>
+    <p:spTree>
+      <p:nvGrpSpPr>
+        <p:cNvPr id="1" name=""/>
+        <p:cNvGrpSpPr/>
+        <p:nvPr/>
+      </p:nvGrpSpPr>
+      <p:grpSpPr>
+        <a:xfrm>
+          <a:off x="0" y="0"/>
+          <a:ext cx="0" cy="0"/>
+          <a:chOff x="0" y="0"/>
+          <a:chExt cx="0" cy="0"/>
+        </a:xfrm>
+      </p:grpSpPr>
+      <p:sp>
+        <p:nvSpPr>
+          <p:cNvPr id="2" name="Title 1">
+            <a:extLst>
+              <a:ext uri="{FF2B5EF4-FFF2-40B4-BE49-F238E27FC236}">
+                <a16:creationId xmlns:a16="http://schemas.microsoft.com/office/drawing/2014/main" id="{FF9C2C27-F3D7-2646-B2D2-2F915EC1E592}"/>
+              </a:ext>
+            </a:extLst>
+          </p:cNvPr>
+          <p:cNvSpPr>
+            <a:spLocks noGrp="1"/>
+          </p:cNvSpPr>
+          <p:nvPr>
+            <p:ph type="title"/>
+          </p:nvPr>
+        </p:nvSpPr>
+        <p:spPr/>
+        <p:txBody>
+          <a:bodyPr>
+            <a:normAutofit fontScale="90000"/>
+          </a:bodyPr>
+          <a:lstStyle/>
+          <a:p>
+            <a:r>
+              <a:rPr lang="ja-JP" altLang="ja-JP" b="1" dirty="0"/>
+              <a:t>Cú pháp chi tiết của Biểu thức Lambda</a:t>
+            </a:r>
+          </a:p>
+        </p:txBody>
+      </p:sp>
+      <p:sp>
+        <p:nvSpPr>
+          <p:cNvPr id="4" name="Slide Number Placeholder 3">
+            <a:extLst>
+              <a:ext uri="{FF2B5EF4-FFF2-40B4-BE49-F238E27FC236}">
+                <a16:creationId xmlns:a16="http://schemas.microsoft.com/office/drawing/2014/main" id="{AACBCF4A-0F6D-092A-1EE3-BB152F103D9D}"/>
+              </a:ext>
+            </a:extLst>
+          </p:cNvPr>
+          <p:cNvSpPr>
+            <a:spLocks noGrp="1"/>
+          </p:cNvSpPr>
+          <p:nvPr>
+            <p:ph type="sldNum" sz="quarter" idx="11"/>
+          </p:nvPr>
+        </p:nvSpPr>
+        <p:spPr/>
+        <p:txBody>
+          <a:bodyPr/>
+          <a:lstStyle/>
+          <a:p>
+            <a:pPr>
+              <a:defRPr/>
+            </a:pPr>
+            <a:r>
+              <a:rPr lang="en-US" altLang="ja-JP"/>
+              <a:t>Page:</a:t>
+            </a:r>
+            <a:r>
+              <a:rPr lang="ja-JP" altLang="en-US"/>
+              <a:t> </a:t>
+            </a:r>
+            <a:fld id="{DC07468E-517B-4E9D-8840-A4568A307980}" type="slidenum">
+              <a:rPr lang="en-US" altLang="ja-JP" smtClean="0"/>
+              <a:pPr>
+                <a:defRPr/>
+              </a:pPr>
+              <a:t>13</a:t>
+            </a:fld>
+            <a:endParaRPr lang="en-US" altLang="ja-JP"/>
+          </a:p>
+        </p:txBody>
+      </p:sp>
+      <p:sp>
+        <p:nvSpPr>
+          <p:cNvPr id="7" name="Content Placeholder 6">
+            <a:extLst>
+              <a:ext uri="{FF2B5EF4-FFF2-40B4-BE49-F238E27FC236}">
+                <a16:creationId xmlns:a16="http://schemas.microsoft.com/office/drawing/2014/main" id="{157DB7F8-1999-4949-F7AB-63B758806562}"/>
+              </a:ext>
+            </a:extLst>
+          </p:cNvPr>
+          <p:cNvSpPr>
+            <a:spLocks noGrp="1"/>
+          </p:cNvSpPr>
+          <p:nvPr>
+            <p:ph idx="1"/>
+          </p:nvPr>
+        </p:nvSpPr>
+        <p:spPr/>
+        <p:txBody>
+          <a:bodyPr>
+            <a:normAutofit fontScale="92500" lnSpcReduction="10000"/>
+          </a:bodyPr>
+          <a:lstStyle/>
+          <a:p>
+            <a:pPr marL="0" indent="0">
+              <a:buNone/>
+            </a:pPr>
+            <a:r>
+              <a:rPr lang="ja-JP" altLang="ja-JP" dirty="0"/>
+              <a:t>Biểu thức Lambda có thể được viết theo nhiều cách tùy thuộc vào tình huống:</a:t>
+            </a:r>
+          </a:p>
+          <a:p>
+            <a:r>
+              <a:rPr lang="ja-JP" altLang="ja-JP" dirty="0"/>
+              <a:t>Không tham số: () -&gt; System.out.println("Hello, Lambda!");</a:t>
+            </a:r>
+          </a:p>
+          <a:p>
+            <a:r>
+              <a:rPr lang="ja-JP" altLang="ja-JP" dirty="0"/>
+              <a:t>Một tham số (có thể bỏ qua dấu ngoặc): x -&gt; x * x</a:t>
+            </a:r>
+          </a:p>
+          <a:p>
+            <a:r>
+              <a:rPr lang="ja-JP" altLang="ja-JP" dirty="0"/>
+              <a:t>Nhiều tham số: (x, y) -&gt; x + y</a:t>
+            </a:r>
+          </a:p>
+          <a:p>
+            <a:r>
+              <a:rPr lang="ja-JP" altLang="ja-JP" dirty="0"/>
+              <a:t>Thân hàm phức tạp (dùng dấu ngoặc nhọn và từ khóa return):</a:t>
+            </a:r>
+          </a:p>
+          <a:p>
+            <a:pPr marL="800100" lvl="2" indent="0">
+              <a:buNone/>
+            </a:pPr>
+            <a:r>
+              <a:rPr lang="ja-JP" altLang="ja-JP" dirty="0"/>
+              <a:t>(x, y) -&gt; {</a:t>
+            </a:r>
+          </a:p>
+          <a:p>
+            <a:pPr marL="800100" lvl="2" indent="0">
+              <a:buNone/>
+            </a:pPr>
+            <a:r>
+              <a:rPr lang="ja-JP" altLang="ja-JP" dirty="0"/>
+              <a:t>    int sum = x + y;</a:t>
+            </a:r>
+          </a:p>
+          <a:p>
+            <a:pPr marL="800100" lvl="2" indent="0">
+              <a:buNone/>
+            </a:pPr>
+            <a:r>
+              <a:rPr lang="ja-JP" altLang="ja-JP" dirty="0"/>
+              <a:t>    return sum;</a:t>
+            </a:r>
+          </a:p>
+          <a:p>
+            <a:pPr marL="800100" lvl="2" indent="0">
+              <a:buNone/>
+            </a:pPr>
+            <a:r>
+              <a:rPr lang="ja-JP" altLang="ja-JP" dirty="0"/>
+              <a:t>}</a:t>
+            </a:r>
+          </a:p>
+          <a:p>
+            <a:endParaRPr lang="ja-JP" altLang="en-US" dirty="0"/>
+          </a:p>
+        </p:txBody>
+      </p:sp>
+    </p:spTree>
+    <p:extLst>
+      <p:ext uri="{BB962C8B-B14F-4D97-AF65-F5344CB8AC3E}">
+        <p14:creationId xmlns:p14="http://schemas.microsoft.com/office/powerpoint/2010/main" val="2893151736"/>
+      </p:ext>
+    </p:extLst>
+  </p:cSld>
+  <p:clrMapOvr>
+    <a:masterClrMapping/>
+  </p:clrMapOvr>
+</p:sld>
+</file>
+
+<file path=ppt/slides/slide14.xml><?xml version="1.0" encoding="utf-8"?>
+<p:sld xmlns:a="http://schemas.openxmlformats.org/drawingml/2006/main" xmlns:r="http://schemas.openxmlformats.org/officeDocument/2006/relationships" xmlns:p="http://schemas.openxmlformats.org/presentationml/2006/main">
+  <p:cSld>
+    <p:spTree>
+      <p:nvGrpSpPr>
+        <p:cNvPr id="1" name=""/>
+        <p:cNvGrpSpPr/>
+        <p:nvPr/>
+      </p:nvGrpSpPr>
+      <p:grpSpPr>
+        <a:xfrm>
+          <a:off x="0" y="0"/>
+          <a:ext cx="0" cy="0"/>
+          <a:chOff x="0" y="0"/>
+          <a:chExt cx="0" cy="0"/>
+        </a:xfrm>
+      </p:grpSpPr>
+      <p:sp>
+        <p:nvSpPr>
+          <p:cNvPr id="2" name="Title 1">
+            <a:extLst>
+              <a:ext uri="{FF2B5EF4-FFF2-40B4-BE49-F238E27FC236}">
+                <a16:creationId xmlns:a16="http://schemas.microsoft.com/office/drawing/2014/main" id="{B6915788-571C-D802-D22C-561A209FF55B}"/>
+              </a:ext>
+            </a:extLst>
+          </p:cNvPr>
+          <p:cNvSpPr>
+            <a:spLocks noGrp="1"/>
+          </p:cNvSpPr>
+          <p:nvPr>
+            <p:ph type="title"/>
+          </p:nvPr>
+        </p:nvSpPr>
+        <p:spPr/>
+        <p:txBody>
+          <a:bodyPr>
+            <a:normAutofit fontScale="90000"/>
+          </a:bodyPr>
+          <a:lstStyle/>
+          <a:p>
+            <a:r>
+              <a:rPr kumimoji="1" lang="en-US" altLang="ja-JP" dirty="0" err="1"/>
+              <a:t>Ví</a:t>
+            </a:r>
+            <a:r>
+              <a:rPr kumimoji="1" lang="en-US" altLang="ja-JP" dirty="0"/>
+              <a:t> </a:t>
+            </a:r>
+            <a:r>
+              <a:rPr kumimoji="1" lang="en-US" altLang="ja-JP" dirty="0" err="1"/>
+              <a:t>dụ</a:t>
+            </a:r>
+            <a:r>
+              <a:rPr kumimoji="1" lang="en-US" altLang="ja-JP" dirty="0"/>
+              <a:t> </a:t>
+            </a:r>
+            <a:endParaRPr kumimoji="1" lang="ja-JP" altLang="en-US" dirty="0"/>
+          </a:p>
+        </p:txBody>
+      </p:sp>
+      <p:pic>
+        <p:nvPicPr>
+          <p:cNvPr id="6" name="Content Placeholder 5">
+            <a:extLst>
+              <a:ext uri="{FF2B5EF4-FFF2-40B4-BE49-F238E27FC236}">
+                <a16:creationId xmlns:a16="http://schemas.microsoft.com/office/drawing/2014/main" id="{51DF28D2-C4C0-3D00-ED04-CF239FD66D9B}"/>
+              </a:ext>
+            </a:extLst>
+          </p:cNvPr>
+          <p:cNvPicPr>
+            <a:picLocks noGrp="1" noChangeAspect="1"/>
+          </p:cNvPicPr>
+          <p:nvPr>
+            <p:ph idx="1"/>
+          </p:nvPr>
+        </p:nvPicPr>
+        <p:blipFill>
+          <a:blip r:embed="rId2"/>
+          <a:stretch>
+            <a:fillRect/>
+          </a:stretch>
+        </p:blipFill>
+        <p:spPr bwMode="auto">
+          <a:xfrm>
+            <a:off x="128463" y="1884344"/>
+            <a:ext cx="9648825" cy="1710375"/>
+          </a:xfrm>
+          <a:prstGeom prst="rect">
+            <a:avLst/>
+          </a:prstGeom>
+          <a:noFill/>
+          <a:ln>
+            <a:noFill/>
+          </a:ln>
+          <a:effectLst/>
+          <a:extLst>
+            <a:ext uri="{909E8E84-426E-40DD-AFC4-6F175D3DCCD1}">
+              <a14:hiddenFill xmlns:a14="http://schemas.microsoft.com/office/drawing/2010/main">
+                <a:solidFill>
+                  <a:schemeClr val="accent1"/>
+                </a:solidFill>
+              </a14:hiddenFill>
+            </a:ext>
+            <a:ext uri="{91240B29-F687-4F45-9708-019B960494DF}">
+              <a14:hiddenLine xmlns:a14="http://schemas.microsoft.com/office/drawing/2010/main" w="9525">
+                <a:solidFill>
+                  <a:schemeClr val="tx1"/>
+                </a:solidFill>
+                <a:miter lim="800000"/>
+                <a:headEnd/>
+                <a:tailEnd/>
+              </a14:hiddenLine>
+            </a:ext>
+            <a:ext uri="{AF507438-7753-43E0-B8FC-AC1667EBCBE1}">
+              <a14:hiddenEffects xmlns:a14="http://schemas.microsoft.com/office/drawing/2010/main">
+                <a:effectLst>
+                  <a:outerShdw blurRad="63500" dist="38099" dir="2700000" algn="ctr" rotWithShape="0">
+                    <a:schemeClr val="bg2">
+                      <a:alpha val="74998"/>
+                    </a:schemeClr>
+                  </a:outerShdw>
+                </a:effectLst>
+              </a14:hiddenEffects>
+            </a:ext>
+            <a:ext uri="{FAA26D3D-D897-4be2-8F04-BA451C77F1D7}"/>
+          </a:extLst>
+        </p:spPr>
+      </p:pic>
+      <p:sp>
+        <p:nvSpPr>
+          <p:cNvPr id="4" name="Slide Number Placeholder 3">
+            <a:extLst>
+              <a:ext uri="{FF2B5EF4-FFF2-40B4-BE49-F238E27FC236}">
+                <a16:creationId xmlns:a16="http://schemas.microsoft.com/office/drawing/2014/main" id="{53938AE3-0075-5CAD-95EB-DFEC6E4AF0AB}"/>
+              </a:ext>
+            </a:extLst>
+          </p:cNvPr>
+          <p:cNvSpPr>
+            <a:spLocks noGrp="1"/>
+          </p:cNvSpPr>
+          <p:nvPr>
+            <p:ph type="sldNum" sz="quarter" idx="11"/>
+          </p:nvPr>
+        </p:nvSpPr>
+        <p:spPr/>
+        <p:txBody>
+          <a:bodyPr/>
+          <a:lstStyle/>
+          <a:p>
+            <a:pPr>
+              <a:defRPr/>
+            </a:pPr>
+            <a:r>
+              <a:rPr lang="en-US" altLang="ja-JP"/>
+              <a:t>Page:</a:t>
+            </a:r>
+            <a:r>
+              <a:rPr lang="ja-JP" altLang="en-US"/>
+              <a:t> </a:t>
+            </a:r>
+            <a:fld id="{DC07468E-517B-4E9D-8840-A4568A307980}" type="slidenum">
+              <a:rPr lang="en-US" altLang="ja-JP" smtClean="0"/>
+              <a:pPr>
+                <a:defRPr/>
+              </a:pPr>
+              <a:t>14</a:t>
+            </a:fld>
+            <a:endParaRPr lang="en-US" altLang="ja-JP"/>
+          </a:p>
+        </p:txBody>
+      </p:sp>
+      <p:graphicFrame>
+        <p:nvGraphicFramePr>
+          <p:cNvPr id="10" name="Table 9">
+            <a:extLst>
+              <a:ext uri="{FF2B5EF4-FFF2-40B4-BE49-F238E27FC236}">
+                <a16:creationId xmlns:a16="http://schemas.microsoft.com/office/drawing/2014/main" id="{2BAA9CAB-E699-3C88-559B-E2835B51CA63}"/>
+              </a:ext>
+            </a:extLst>
+          </p:cNvPr>
+          <p:cNvGraphicFramePr>
+            <a:graphicFrameLocks noGrp="1"/>
+          </p:cNvGraphicFramePr>
+          <p:nvPr>
+            <p:extLst>
+              <p:ext uri="{D42A27DB-BD31-4B8C-83A1-F6EECF244321}">
+                <p14:modId xmlns:p14="http://schemas.microsoft.com/office/powerpoint/2010/main" val="1684954594"/>
+              </p:ext>
+            </p:extLst>
+          </p:nvPr>
+        </p:nvGraphicFramePr>
+        <p:xfrm>
+          <a:off x="128464" y="1227666"/>
+          <a:ext cx="9648824" cy="640080"/>
+        </p:xfrm>
+        <a:graphic>
+          <a:graphicData uri="http://schemas.openxmlformats.org/drawingml/2006/table">
+            <a:tbl>
+              <a:tblPr firstRow="1" bandRow="1">
+                <a:tableStyleId>{22838BEF-8BB2-4498-84A7-C5851F593DF1}</a:tableStyleId>
+              </a:tblPr>
+              <a:tblGrid>
+                <a:gridCol w="4824412">
+                  <a:extLst>
+                    <a:ext uri="{9D8B030D-6E8A-4147-A177-3AD203B41FA5}">
+                      <a16:colId xmlns:a16="http://schemas.microsoft.com/office/drawing/2014/main" val="898902895"/>
+                    </a:ext>
+                  </a:extLst>
+                </a:gridCol>
+                <a:gridCol w="4824412">
+                  <a:extLst>
+                    <a:ext uri="{9D8B030D-6E8A-4147-A177-3AD203B41FA5}">
+                      <a16:colId xmlns:a16="http://schemas.microsoft.com/office/drawing/2014/main" val="1054030385"/>
+                    </a:ext>
+                  </a:extLst>
+                </a:gridCol>
+              </a:tblGrid>
+              <a:tr h="370840">
+                <a:tc>
+                  <a:txBody>
+                    <a:bodyPr/>
+                    <a:lstStyle/>
+                    <a:p>
+                      <a:pPr marL="0" marR="0" lvl="0" indent="0" algn="ctr" defTabSz="914400" rtl="0" eaLnBrk="1" fontAlgn="auto" latinLnBrk="0" hangingPunct="1">
+                        <a:lnSpc>
+                          <a:spcPct val="100000"/>
+                        </a:lnSpc>
+                        <a:spcBef>
+                          <a:spcPts val="0"/>
+                        </a:spcBef>
+                        <a:spcAft>
+                          <a:spcPts val="0"/>
+                        </a:spcAft>
+                        <a:buClrTx/>
+                        <a:buSzTx/>
+                        <a:buFontTx/>
+                        <a:buNone/>
+                        <a:tabLst/>
+                        <a:defRPr/>
+                      </a:pPr>
+                      <a:r>
+                        <a:rPr lang="en-US" altLang="ja-JP" b="0" kern="0" dirty="0"/>
+                        <a:t>Imperative		</a:t>
+                      </a:r>
+                      <a:endParaRPr lang="ja-JP" altLang="en-US" b="0" kern="0" dirty="0"/>
+                    </a:p>
+                    <a:p>
+                      <a:pPr algn="ctr"/>
+                      <a:endParaRPr kumimoji="1" lang="ja-JP" altLang="en-US" dirty="0"/>
+                    </a:p>
+                  </a:txBody>
+                  <a:tcPr/>
+                </a:tc>
+                <a:tc>
+                  <a:txBody>
+                    <a:bodyPr/>
+                    <a:lstStyle/>
+                    <a:p>
+                      <a:pPr algn="ctr"/>
+                      <a:r>
+                        <a:rPr kumimoji="1" lang="en-US" altLang="ja-JP" dirty="0"/>
+                        <a:t>Lambda Expression</a:t>
+                      </a:r>
+                      <a:endParaRPr kumimoji="1" lang="ja-JP" altLang="en-US" dirty="0"/>
+                    </a:p>
+                  </a:txBody>
+                  <a:tcPr/>
+                </a:tc>
+                <a:extLst>
+                  <a:ext uri="{0D108BD9-81ED-4DB2-BD59-A6C34878D82A}">
+                    <a16:rowId xmlns:a16="http://schemas.microsoft.com/office/drawing/2014/main" val="3886558097"/>
+                  </a:ext>
+                </a:extLst>
+              </a:tr>
+            </a:tbl>
+          </a:graphicData>
+        </a:graphic>
+      </p:graphicFrame>
+      <p:pic>
+        <p:nvPicPr>
+          <p:cNvPr id="12" name="Picture 11">
+            <a:extLst>
+              <a:ext uri="{FF2B5EF4-FFF2-40B4-BE49-F238E27FC236}">
+                <a16:creationId xmlns:a16="http://schemas.microsoft.com/office/drawing/2014/main" id="{B12E0AD9-37CD-4702-0491-676F4C65F438}"/>
+              </a:ext>
+            </a:extLst>
+          </p:cNvPr>
+          <p:cNvPicPr>
+            <a:picLocks noChangeAspect="1"/>
+          </p:cNvPicPr>
+          <p:nvPr/>
+        </p:nvPicPr>
+        <p:blipFill>
+          <a:blip r:embed="rId3"/>
+          <a:stretch>
+            <a:fillRect/>
+          </a:stretch>
+        </p:blipFill>
+        <p:spPr>
+          <a:xfrm>
+            <a:off x="128216" y="4274965"/>
+            <a:ext cx="9649072" cy="1680882"/>
+          </a:xfrm>
+          <a:prstGeom prst="rect">
+            <a:avLst/>
+          </a:prstGeom>
+        </p:spPr>
+      </p:pic>
+      <p:sp>
+        <p:nvSpPr>
+          <p:cNvPr id="13" name="Content Placeholder 2">
+            <a:extLst>
+              <a:ext uri="{FF2B5EF4-FFF2-40B4-BE49-F238E27FC236}">
+                <a16:creationId xmlns:a16="http://schemas.microsoft.com/office/drawing/2014/main" id="{A6B97261-B3E8-4174-4708-28A4116354A6}"/>
+              </a:ext>
+            </a:extLst>
+          </p:cNvPr>
+          <p:cNvSpPr txBox="1">
+            <a:spLocks/>
+          </p:cNvSpPr>
+          <p:nvPr/>
+        </p:nvSpPr>
+        <p:spPr bwMode="auto">
+          <a:xfrm>
+            <a:off x="128216" y="3652005"/>
+            <a:ext cx="9648824" cy="640080"/>
+          </a:xfrm>
+          <a:prstGeom prst="rect">
+            <a:avLst/>
+          </a:prstGeom>
+          <a:noFill/>
+          <a:ln>
+            <a:noFill/>
+          </a:ln>
+          <a:effectLst/>
+          <a:extLst>
+            <a:ext uri="{909E8E84-426E-40DD-AFC4-6F175D3DCCD1}">
+              <a14:hiddenFill xmlns:a14="http://schemas.microsoft.com/office/drawing/2010/main">
+                <a:solidFill>
+                  <a:schemeClr val="accent1"/>
+                </a:solidFill>
+              </a14:hiddenFill>
+            </a:ext>
+            <a:ext uri="{91240B29-F687-4F45-9708-019B960494DF}">
+              <a14:hiddenLine xmlns:a14="http://schemas.microsoft.com/office/drawing/2010/main" w="9525">
+                <a:solidFill>
+                  <a:schemeClr val="tx1"/>
+                </a:solidFill>
+                <a:miter lim="800000"/>
+                <a:headEnd/>
+                <a:tailEnd/>
+              </a14:hiddenLine>
+            </a:ext>
+            <a:ext uri="{AF507438-7753-43E0-B8FC-AC1667EBCBE1}">
+              <a14:hiddenEffects xmlns:a14="http://schemas.microsoft.com/office/drawing/2010/main">
+                <a:effectLst>
+                  <a:outerShdw blurRad="63500" dist="38099" dir="2700000" algn="ctr" rotWithShape="0">
+                    <a:schemeClr val="bg2">
+                      <a:alpha val="74998"/>
+                    </a:schemeClr>
+                  </a:outerShdw>
+                </a:effectLst>
+              </a14:hiddenEffects>
+            </a:ext>
+            <a:ext uri="{FAA26D3D-D897-4be2-8F04-BA451C77F1D7}"/>
+          </a:extLst>
+        </p:spPr>
+        <p:txBody>
+          <a:bodyPr vert="horz" wrap="square" lIns="91440" tIns="45720" rIns="91440" bIns="45720" numCol="1" anchor="t" anchorCtr="0" compatLnSpc="1">
+            <a:prstTxWarp prst="textNoShape">
+              <a:avLst/>
+            </a:prstTxWarp>
+            <a:normAutofit fontScale="85000" lnSpcReduction="10000"/>
+          </a:bodyPr>
+          <a:lstStyle>
+            <a:lvl1pPr marL="342900" indent="-342900" algn="l" rtl="0" eaLnBrk="1" fontAlgn="base" hangingPunct="1">
+              <a:spcBef>
+                <a:spcPct val="20000"/>
+              </a:spcBef>
+              <a:spcAft>
+                <a:spcPct val="0"/>
+              </a:spcAft>
+              <a:buChar char="•"/>
+              <a:defRPr kumimoji="1" sz="3200">
+                <a:solidFill>
+                  <a:schemeClr val="tx1"/>
+                </a:solidFill>
+                <a:latin typeface="+mj-lt"/>
+                <a:ea typeface="Meiryo UI" panose="020B0604030504040204" pitchFamily="50" charset="-128"/>
+                <a:cs typeface="Meiryo UI" panose="020B0604030504040204" pitchFamily="50" charset="-128"/>
+              </a:defRPr>
+            </a:lvl1pPr>
+            <a:lvl2pPr marL="742950" indent="-285750" algn="l" rtl="0" eaLnBrk="1" fontAlgn="base" hangingPunct="1">
+              <a:spcBef>
+                <a:spcPct val="20000"/>
+              </a:spcBef>
+              <a:spcAft>
+                <a:spcPct val="0"/>
+              </a:spcAft>
+              <a:buChar char="–"/>
+              <a:defRPr kumimoji="1" sz="2800">
+                <a:solidFill>
+                  <a:schemeClr val="tx1"/>
+                </a:solidFill>
+                <a:latin typeface="+mj-lt"/>
+                <a:ea typeface="Meiryo UI" panose="020B0604030504040204" pitchFamily="50" charset="-128"/>
+                <a:cs typeface="Meiryo UI" panose="020B0604030504040204" pitchFamily="50" charset="-128"/>
+              </a:defRPr>
+            </a:lvl2pPr>
+            <a:lvl3pPr marL="1143000" indent="-228600" algn="l" rtl="0" eaLnBrk="1" fontAlgn="base" hangingPunct="1">
+              <a:spcBef>
+                <a:spcPct val="20000"/>
+              </a:spcBef>
+              <a:spcAft>
+                <a:spcPct val="0"/>
+              </a:spcAft>
+              <a:buChar char="•"/>
+              <a:defRPr kumimoji="1" sz="2400">
+                <a:solidFill>
+                  <a:schemeClr val="tx1"/>
+                </a:solidFill>
+                <a:latin typeface="+mj-lt"/>
+                <a:ea typeface="Meiryo UI" panose="020B0604030504040204" pitchFamily="50" charset="-128"/>
+                <a:cs typeface="Meiryo UI" panose="020B0604030504040204" pitchFamily="50" charset="-128"/>
+              </a:defRPr>
+            </a:lvl3pPr>
+            <a:lvl4pPr marL="1600200" indent="-228600" algn="l" rtl="0" eaLnBrk="1" fontAlgn="base" hangingPunct="1">
+              <a:spcBef>
+                <a:spcPct val="20000"/>
+              </a:spcBef>
+              <a:spcAft>
+                <a:spcPct val="0"/>
+              </a:spcAft>
+              <a:buChar char="–"/>
+              <a:defRPr kumimoji="1" sz="2000">
+                <a:solidFill>
+                  <a:schemeClr val="tx1"/>
+                </a:solidFill>
+                <a:latin typeface="+mj-lt"/>
+                <a:ea typeface="Meiryo UI" panose="020B0604030504040204" pitchFamily="50" charset="-128"/>
+                <a:cs typeface="Meiryo UI" panose="020B0604030504040204" pitchFamily="50" charset="-128"/>
+              </a:defRPr>
+            </a:lvl4pPr>
+            <a:lvl5pPr marL="2057400" indent="-228600" algn="l" rtl="0" eaLnBrk="1" fontAlgn="base" hangingPunct="1">
+              <a:spcBef>
+                <a:spcPct val="20000"/>
+              </a:spcBef>
+              <a:spcAft>
+                <a:spcPct val="0"/>
+              </a:spcAft>
+              <a:buChar char="»"/>
+              <a:defRPr kumimoji="1" sz="2000">
+                <a:solidFill>
+                  <a:schemeClr val="tx1"/>
+                </a:solidFill>
+                <a:latin typeface="+mj-lt"/>
+                <a:ea typeface="Meiryo UI" panose="020B0604030504040204" pitchFamily="50" charset="-128"/>
+                <a:cs typeface="Meiryo UI" panose="020B0604030504040204" pitchFamily="50" charset="-128"/>
+              </a:defRPr>
+            </a:lvl5pPr>
+            <a:lvl6pPr marL="2514600" indent="-228600" algn="l" rtl="0" eaLnBrk="1" fontAlgn="base" hangingPunct="1">
+              <a:spcBef>
+                <a:spcPct val="20000"/>
+              </a:spcBef>
+              <a:spcAft>
+                <a:spcPct val="0"/>
+              </a:spcAft>
+              <a:buChar char="»"/>
+              <a:defRPr kumimoji="1" sz="2000">
+                <a:solidFill>
+                  <a:schemeClr val="tx1"/>
+                </a:solidFill>
+                <a:latin typeface="+mn-lt"/>
+                <a:ea typeface="+mn-ea"/>
+              </a:defRPr>
+            </a:lvl6pPr>
+            <a:lvl7pPr marL="2971800" indent="-228600" algn="l" rtl="0" eaLnBrk="1" fontAlgn="base" hangingPunct="1">
+              <a:spcBef>
+                <a:spcPct val="20000"/>
+              </a:spcBef>
+              <a:spcAft>
+                <a:spcPct val="0"/>
+              </a:spcAft>
+              <a:buChar char="»"/>
+              <a:defRPr kumimoji="1" sz="2000">
+                <a:solidFill>
+                  <a:schemeClr val="tx1"/>
+                </a:solidFill>
+                <a:latin typeface="+mn-lt"/>
+                <a:ea typeface="+mn-ea"/>
+              </a:defRPr>
+            </a:lvl7pPr>
+            <a:lvl8pPr marL="3429000" indent="-228600" algn="l" rtl="0" eaLnBrk="1" fontAlgn="base" hangingPunct="1">
+              <a:spcBef>
+                <a:spcPct val="20000"/>
+              </a:spcBef>
+              <a:spcAft>
+                <a:spcPct val="0"/>
+              </a:spcAft>
+              <a:buChar char="»"/>
+              <a:defRPr kumimoji="1" sz="2000">
+                <a:solidFill>
+                  <a:schemeClr val="tx1"/>
+                </a:solidFill>
+                <a:latin typeface="+mn-lt"/>
+                <a:ea typeface="+mn-ea"/>
+              </a:defRPr>
+            </a:lvl8pPr>
+            <a:lvl9pPr marL="3886200" indent="-228600" algn="l" rtl="0" eaLnBrk="1" fontAlgn="base" hangingPunct="1">
+              <a:spcBef>
+                <a:spcPct val="20000"/>
+              </a:spcBef>
+              <a:spcAft>
+                <a:spcPct val="0"/>
+              </a:spcAft>
+              <a:buChar char="»"/>
+              <a:defRPr kumimoji="1" sz="2000">
+                <a:solidFill>
+                  <a:schemeClr val="tx1"/>
+                </a:solidFill>
+                <a:latin typeface="+mn-lt"/>
+                <a:ea typeface="+mn-ea"/>
+              </a:defRPr>
+            </a:lvl9pPr>
+          </a:lstStyle>
+          <a:p>
+            <a:pPr algn="just"/>
+            <a:r>
+              <a:rPr lang="ja-JP" altLang="ja-JP" sz="2000" dirty="0"/>
+              <a:t>Khi </a:t>
+            </a:r>
+            <a:r>
+              <a:rPr lang="en-US" altLang="ja-JP" sz="2000" dirty="0" err="1"/>
+              <a:t>chỉ</a:t>
+            </a:r>
+            <a:r>
+              <a:rPr lang="en-US" altLang="ja-JP" sz="2000" dirty="0"/>
+              <a:t> </a:t>
+            </a:r>
+            <a:r>
+              <a:rPr lang="ja-JP" altLang="ja-JP" sz="2000" dirty="0"/>
+              <a:t>có một dòng biểu thức duy nhất bên trong hàm lambda, chúng ta có thể sử dụng cú pháp lambda biểu thức thay vì cú pháp câu lệnh lambda để đơn giản hơn.</a:t>
+            </a:r>
+            <a:endParaRPr lang="ja-JP" altLang="en-US" sz="2000" b="0" kern="0" dirty="0"/>
+          </a:p>
+        </p:txBody>
+      </p:sp>
+    </p:spTree>
+    <p:extLst>
+      <p:ext uri="{BB962C8B-B14F-4D97-AF65-F5344CB8AC3E}">
+        <p14:creationId xmlns:p14="http://schemas.microsoft.com/office/powerpoint/2010/main" val="3935553914"/>
+      </p:ext>
+    </p:extLst>
+  </p:cSld>
+  <p:clrMapOvr>
+    <a:masterClrMapping/>
+  </p:clrMapOvr>
+</p:sld>
+</file>
+
+<file path=ppt/slides/slide15.xml><?xml version="1.0" encoding="utf-8"?>
+<p:sld xmlns:a="http://schemas.openxmlformats.org/drawingml/2006/main" xmlns:r="http://schemas.openxmlformats.org/officeDocument/2006/relationships" xmlns:p="http://schemas.openxmlformats.org/presentationml/2006/main">
+  <p:cSld>
+    <p:spTree>
+      <p:nvGrpSpPr>
         <p:cNvPr id="1" name="">
           <a:extLst>
             <a:ext uri="{FF2B5EF4-FFF2-40B4-BE49-F238E27FC236}">
@@ -5641,7 +7637,7 @@
               <a:pPr>
                 <a:defRPr/>
               </a:pPr>
-              <a:t>10</a:t>
+              <a:t>15</a:t>
             </a:fld>
             <a:endParaRPr lang="en-US" altLang="ja-JP"/>
           </a:p>
@@ -6060,7 +8056,7 @@
 </p:sld>
 </file>
 
-<file path=ppt/slides/slide11.xml><?xml version="1.0" encoding="utf-8"?>
+<file path=ppt/slides/slide16.xml><?xml version="1.0" encoding="utf-8"?>
 <p:sld xmlns:a="http://schemas.openxmlformats.org/drawingml/2006/main" xmlns:r="http://schemas.openxmlformats.org/officeDocument/2006/relationships" xmlns:p="http://schemas.openxmlformats.org/presentationml/2006/main">
   <p:cSld>
     <p:spTree>
@@ -6163,7 +8159,7 @@
               <a:pPr>
                 <a:defRPr/>
               </a:pPr>
-              <a:t>11</a:t>
+              <a:t>16</a:t>
             </a:fld>
             <a:endParaRPr lang="en-US" altLang="ja-JP"/>
           </a:p>
@@ -6582,206 +8578,7 @@
 </p:sld>
 </file>
 
-<file path=ppt/slides/slide12.xml><?xml version="1.0" encoding="utf-8"?>
-<p:sld xmlns:a="http://schemas.openxmlformats.org/drawingml/2006/main" xmlns:r="http://schemas.openxmlformats.org/officeDocument/2006/relationships" xmlns:p="http://schemas.openxmlformats.org/presentationml/2006/main">
-  <p:cSld>
-    <p:spTree>
-      <p:nvGrpSpPr>
-        <p:cNvPr id="1" name=""/>
-        <p:cNvGrpSpPr/>
-        <p:nvPr/>
-      </p:nvGrpSpPr>
-      <p:grpSpPr>
-        <a:xfrm>
-          <a:off x="0" y="0"/>
-          <a:ext cx="0" cy="0"/>
-          <a:chOff x="0" y="0"/>
-          <a:chExt cx="0" cy="0"/>
-        </a:xfrm>
-      </p:grpSpPr>
-      <p:sp>
-        <p:nvSpPr>
-          <p:cNvPr id="2" name="Title 1">
-            <a:extLst>
-              <a:ext uri="{FF2B5EF4-FFF2-40B4-BE49-F238E27FC236}">
-                <a16:creationId xmlns:a16="http://schemas.microsoft.com/office/drawing/2014/main" id="{FF9C2C27-F3D7-2646-B2D2-2F915EC1E592}"/>
-              </a:ext>
-            </a:extLst>
-          </p:cNvPr>
-          <p:cNvSpPr>
-            <a:spLocks noGrp="1"/>
-          </p:cNvSpPr>
-          <p:nvPr>
-            <p:ph type="title"/>
-          </p:nvPr>
-        </p:nvSpPr>
-        <p:spPr/>
-        <p:txBody>
-          <a:bodyPr>
-            <a:normAutofit fontScale="90000"/>
-          </a:bodyPr>
-          <a:lstStyle/>
-          <a:p>
-            <a:r>
-              <a:rPr lang="ja-JP" altLang="ja-JP" b="1" dirty="0"/>
-              <a:t>Cú pháp chi tiết của Biểu thức Lambda</a:t>
-            </a:r>
-          </a:p>
-        </p:txBody>
-      </p:sp>
-      <p:sp>
-        <p:nvSpPr>
-          <p:cNvPr id="4" name="Slide Number Placeholder 3">
-            <a:extLst>
-              <a:ext uri="{FF2B5EF4-FFF2-40B4-BE49-F238E27FC236}">
-                <a16:creationId xmlns:a16="http://schemas.microsoft.com/office/drawing/2014/main" id="{AACBCF4A-0F6D-092A-1EE3-BB152F103D9D}"/>
-              </a:ext>
-            </a:extLst>
-          </p:cNvPr>
-          <p:cNvSpPr>
-            <a:spLocks noGrp="1"/>
-          </p:cNvSpPr>
-          <p:nvPr>
-            <p:ph type="sldNum" sz="quarter" idx="11"/>
-          </p:nvPr>
-        </p:nvSpPr>
-        <p:spPr/>
-        <p:txBody>
-          <a:bodyPr/>
-          <a:lstStyle/>
-          <a:p>
-            <a:pPr>
-              <a:defRPr/>
-            </a:pPr>
-            <a:r>
-              <a:rPr lang="en-US" altLang="ja-JP"/>
-              <a:t>Page:</a:t>
-            </a:r>
-            <a:r>
-              <a:rPr lang="ja-JP" altLang="en-US"/>
-              <a:t> </a:t>
-            </a:r>
-            <a:fld id="{DC07468E-517B-4E9D-8840-A4568A307980}" type="slidenum">
-              <a:rPr lang="en-US" altLang="ja-JP" smtClean="0"/>
-              <a:pPr>
-                <a:defRPr/>
-              </a:pPr>
-              <a:t>12</a:t>
-            </a:fld>
-            <a:endParaRPr lang="en-US" altLang="ja-JP"/>
-          </a:p>
-        </p:txBody>
-      </p:sp>
-      <p:sp>
-        <p:nvSpPr>
-          <p:cNvPr id="7" name="Content Placeholder 6">
-            <a:extLst>
-              <a:ext uri="{FF2B5EF4-FFF2-40B4-BE49-F238E27FC236}">
-                <a16:creationId xmlns:a16="http://schemas.microsoft.com/office/drawing/2014/main" id="{157DB7F8-1999-4949-F7AB-63B758806562}"/>
-              </a:ext>
-            </a:extLst>
-          </p:cNvPr>
-          <p:cNvSpPr>
-            <a:spLocks noGrp="1"/>
-          </p:cNvSpPr>
-          <p:nvPr>
-            <p:ph idx="1"/>
-          </p:nvPr>
-        </p:nvSpPr>
-        <p:spPr/>
-        <p:txBody>
-          <a:bodyPr>
-            <a:normAutofit fontScale="92500" lnSpcReduction="10000"/>
-          </a:bodyPr>
-          <a:lstStyle/>
-          <a:p>
-            <a:pPr marL="0" indent="0">
-              <a:buNone/>
-            </a:pPr>
-            <a:r>
-              <a:rPr lang="ja-JP" altLang="ja-JP" dirty="0"/>
-              <a:t>Biểu thức Lambda có thể được viết theo nhiều cách tùy thuộc vào tình huống:</a:t>
-            </a:r>
-          </a:p>
-          <a:p>
-            <a:r>
-              <a:rPr lang="ja-JP" altLang="ja-JP" dirty="0"/>
-              <a:t>Không tham số: () -&gt; System.out.println("Hello, Lambda!");</a:t>
-            </a:r>
-          </a:p>
-          <a:p>
-            <a:r>
-              <a:rPr lang="ja-JP" altLang="ja-JP" dirty="0"/>
-              <a:t>Một tham số (có thể bỏ qua dấu ngoặc): x -&gt; x * x</a:t>
-            </a:r>
-          </a:p>
-          <a:p>
-            <a:r>
-              <a:rPr lang="ja-JP" altLang="ja-JP" dirty="0"/>
-              <a:t>Nhiều tham số: (x, y) -&gt; x + y</a:t>
-            </a:r>
-          </a:p>
-          <a:p>
-            <a:r>
-              <a:rPr lang="ja-JP" altLang="ja-JP" dirty="0"/>
-              <a:t>Thân hàm phức tạp (dùng dấu ngoặc nhọn và từ khóa return):</a:t>
-            </a:r>
-          </a:p>
-          <a:p>
-            <a:pPr marL="800100" lvl="2" indent="0">
-              <a:buNone/>
-            </a:pPr>
-            <a:r>
-              <a:rPr lang="ja-JP" altLang="ja-JP" dirty="0"/>
-              <a:t>(x, y) -&gt; {</a:t>
-            </a:r>
-          </a:p>
-          <a:p>
-            <a:pPr marL="800100" lvl="2" indent="0">
-              <a:buNone/>
-            </a:pPr>
-            <a:r>
-              <a:rPr lang="ja-JP" altLang="ja-JP" dirty="0"/>
-              <a:t>    int sum = x + y;</a:t>
-            </a:r>
-          </a:p>
-          <a:p>
-            <a:pPr marL="800100" lvl="2" indent="0">
-              <a:buNone/>
-            </a:pPr>
-            <a:r>
-              <a:rPr lang="ja-JP" altLang="ja-JP" dirty="0"/>
-              <a:t>    return sum;</a:t>
-            </a:r>
-          </a:p>
-          <a:p>
-            <a:pPr marL="800100" lvl="2" indent="0">
-              <a:buNone/>
-            </a:pPr>
-            <a:r>
-              <a:rPr lang="ja-JP" altLang="ja-JP" dirty="0"/>
-              <a:t>}</a:t>
-            </a:r>
-          </a:p>
-          <a:p>
-            <a:endParaRPr lang="ja-JP" altLang="en-US" dirty="0"/>
-          </a:p>
-        </p:txBody>
-      </p:sp>
-    </p:spTree>
-    <p:extLst>
-      <p:ext uri="{BB962C8B-B14F-4D97-AF65-F5344CB8AC3E}">
-        <p14:creationId xmlns:p14="http://schemas.microsoft.com/office/powerpoint/2010/main" val="2893151736"/>
-      </p:ext>
-    </p:extLst>
-  </p:cSld>
-  <p:clrMapOvr>
-    <a:masterClrMapping/>
-  </p:clrMapOvr>
-</p:sld>
-</file>
-
-<file path=ppt/slides/slide13.xml><?xml version="1.0" encoding="utf-8"?>
+<file path=ppt/slides/slide17.xml><?xml version="1.0" encoding="utf-8"?>
 <p:sld xmlns:a="http://schemas.openxmlformats.org/drawingml/2006/main" xmlns:r="http://schemas.openxmlformats.org/officeDocument/2006/relationships" xmlns:p="http://schemas.openxmlformats.org/presentationml/2006/main">
   <p:cSld>
     <p:spTree>
@@ -6950,7 +8747,7 @@
               <a:pPr>
                 <a:defRPr/>
               </a:pPr>
-              <a:t>13</a:t>
+              <a:t>17</a:t>
             </a:fld>
             <a:endParaRPr lang="en-US" altLang="ja-JP"/>
           </a:p>
@@ -6969,7 +8766,7 @@
 </p:sld>
 </file>
 
-<file path=ppt/slides/slide14.xml><?xml version="1.0" encoding="utf-8"?>
+<file path=ppt/slides/slide18.xml><?xml version="1.0" encoding="utf-8"?>
 <p:sld xmlns:a="http://schemas.openxmlformats.org/drawingml/2006/main" xmlns:r="http://schemas.openxmlformats.org/officeDocument/2006/relationships" xmlns:p="http://schemas.openxmlformats.org/presentationml/2006/main">
   <p:cSld>
     <p:spTree>
@@ -7138,7 +8935,7 @@
               <a:pPr>
                 <a:defRPr/>
               </a:pPr>
-              <a:t>14</a:t>
+              <a:t>18</a:t>
             </a:fld>
             <a:endParaRPr lang="en-US" altLang="ja-JP"/>
           </a:p>
@@ -7157,7 +8954,7 @@
 </p:sld>
 </file>
 
-<file path=ppt/slides/slide15.xml><?xml version="1.0" encoding="utf-8"?>
+<file path=ppt/slides/slide19.xml><?xml version="1.0" encoding="utf-8"?>
 <p:sld xmlns:a="http://schemas.openxmlformats.org/drawingml/2006/main" xmlns:r="http://schemas.openxmlformats.org/officeDocument/2006/relationships" xmlns:p="http://schemas.openxmlformats.org/presentationml/2006/main">
   <p:cSld>
     <p:spTree>
@@ -7411,7 +9208,7 @@
               <a:pPr>
                 <a:defRPr/>
               </a:pPr>
-              <a:t>15</a:t>
+              <a:t>19</a:t>
             </a:fld>
             <a:endParaRPr lang="en-US" altLang="ja-JP"/>
           </a:p>
@@ -7567,7 +9364,395 @@
 </p:sld>
 </file>
 
-<file path=ppt/slides/slide16.xml><?xml version="1.0" encoding="utf-8"?>
+<file path=ppt/slides/slide2.xml><?xml version="1.0" encoding="utf-8"?>
+<p:sld xmlns:a="http://schemas.openxmlformats.org/drawingml/2006/main" xmlns:r="http://schemas.openxmlformats.org/officeDocument/2006/relationships" xmlns:p="http://schemas.openxmlformats.org/presentationml/2006/main">
+  <p:cSld>
+    <p:spTree>
+      <p:nvGrpSpPr>
+        <p:cNvPr id="1" name=""/>
+        <p:cNvGrpSpPr/>
+        <p:nvPr/>
+      </p:nvGrpSpPr>
+      <p:grpSpPr>
+        <a:xfrm>
+          <a:off x="0" y="0"/>
+          <a:ext cx="0" cy="0"/>
+          <a:chOff x="0" y="0"/>
+          <a:chExt cx="0" cy="0"/>
+        </a:xfrm>
+      </p:grpSpPr>
+      <p:sp>
+        <p:nvSpPr>
+          <p:cNvPr id="2" name="Text 0"/>
+          <p:cNvSpPr/>
+          <p:nvPr/>
+        </p:nvSpPr>
+        <p:spPr>
+          <a:xfrm>
+            <a:off x="33336" y="535036"/>
+            <a:ext cx="8915400" cy="371475"/>
+          </a:xfrm>
+          <a:prstGeom prst="rect">
+            <a:avLst/>
+          </a:prstGeom>
+          <a:noFill/>
+          <a:ln/>
+        </p:spPr>
+        <p:txBody>
+          <a:bodyPr wrap="square" rtlCol="0" anchor="ctr"/>
+          <a:lstStyle/>
+          <a:p>
+            <a:r>
+              <a:rPr lang="en-US" sz="4000" dirty="0" err="1">
+                <a:solidFill>
+                  <a:srgbClr val="1F4E79"/>
+                </a:solidFill>
+                <a:latin typeface="+mj-lt"/>
+              </a:rPr>
+              <a:t>Nêu</a:t>
+            </a:r>
+            <a:r>
+              <a:rPr lang="en-US" sz="4000" dirty="0">
+                <a:solidFill>
+                  <a:srgbClr val="1F4E79"/>
+                </a:solidFill>
+                <a:latin typeface="+mj-lt"/>
+              </a:rPr>
+              <a:t> </a:t>
+            </a:r>
+            <a:r>
+              <a:rPr lang="en-US" sz="4000" dirty="0" err="1">
+                <a:solidFill>
+                  <a:srgbClr val="1F4E79"/>
+                </a:solidFill>
+                <a:latin typeface="+mj-lt"/>
+              </a:rPr>
+              <a:t>vấn</a:t>
+            </a:r>
+            <a:r>
+              <a:rPr lang="en-US" sz="4000" dirty="0">
+                <a:solidFill>
+                  <a:srgbClr val="1F4E79"/>
+                </a:solidFill>
+                <a:latin typeface="+mj-lt"/>
+              </a:rPr>
+              <a:t> </a:t>
+            </a:r>
+            <a:r>
+              <a:rPr lang="en-US" sz="4000" dirty="0" err="1">
+                <a:solidFill>
+                  <a:srgbClr val="1F4E79"/>
+                </a:solidFill>
+                <a:latin typeface="+mj-lt"/>
+              </a:rPr>
+              <a:t>đề</a:t>
+            </a:r>
+            <a:endParaRPr lang="en-US" sz="4000" dirty="0">
+              <a:latin typeface="+mj-lt"/>
+            </a:endParaRPr>
+          </a:p>
+        </p:txBody>
+      </p:sp>
+      <p:sp>
+        <p:nvSpPr>
+          <p:cNvPr id="3" name="Text 1"/>
+          <p:cNvSpPr/>
+          <p:nvPr/>
+        </p:nvSpPr>
+        <p:spPr>
+          <a:xfrm>
+            <a:off x="371474" y="1385888"/>
+            <a:ext cx="8239125" cy="4481512"/>
+          </a:xfrm>
+          <a:prstGeom prst="rect">
+            <a:avLst/>
+          </a:prstGeom>
+          <a:noFill/>
+          <a:ln/>
+        </p:spPr>
+        <p:txBody>
+          <a:bodyPr wrap="square" rtlCol="0" anchor="ctr"/>
+          <a:lstStyle/>
+          <a:p>
+            <a:pPr algn="just"/>
+            <a:endParaRPr lang="en-US" sz="2800" dirty="0">
+              <a:latin typeface="+mj-lt"/>
+            </a:endParaRPr>
+          </a:p>
+        </p:txBody>
+      </p:sp>
+      <p:sp>
+        <p:nvSpPr>
+          <p:cNvPr id="4" name="Text 2"/>
+          <p:cNvSpPr/>
+          <p:nvPr/>
+        </p:nvSpPr>
+        <p:spPr>
+          <a:xfrm>
+            <a:off x="594360" y="2128838"/>
+            <a:ext cx="3714750" cy="1485900"/>
+          </a:xfrm>
+          <a:prstGeom prst="rect">
+            <a:avLst/>
+          </a:prstGeom>
+          <a:noFill/>
+          <a:ln/>
+        </p:spPr>
+        <p:txBody>
+          <a:bodyPr wrap="square" rtlCol="0" anchor="ctr"/>
+          <a:lstStyle/>
+          <a:p>
+            <a:endParaRPr lang="en-US" sz="1300" dirty="0"/>
+          </a:p>
+        </p:txBody>
+      </p:sp>
+      <p:sp>
+        <p:nvSpPr>
+          <p:cNvPr id="6" name="Content Placeholder 5">
+            <a:extLst>
+              <a:ext uri="{FF2B5EF4-FFF2-40B4-BE49-F238E27FC236}">
+                <a16:creationId xmlns:a16="http://schemas.microsoft.com/office/drawing/2014/main" id="{4925B110-462A-4703-6ABD-77769467DF38}"/>
+              </a:ext>
+            </a:extLst>
+          </p:cNvPr>
+          <p:cNvSpPr>
+            <a:spLocks noGrp="1"/>
+          </p:cNvSpPr>
+          <p:nvPr>
+            <p:ph idx="1"/>
+          </p:nvPr>
+        </p:nvSpPr>
+        <p:spPr>
+          <a:xfrm>
+            <a:off x="128464" y="1143000"/>
+            <a:ext cx="9649072" cy="5328592"/>
+          </a:xfrm>
+        </p:spPr>
+        <p:txBody>
+          <a:bodyPr/>
+          <a:lstStyle/>
+          <a:p>
+            <a:pPr algn="just">
+              <a:buFont typeface="Arial" panose="020B0604020202020204" pitchFamily="34" charset="0"/>
+              <a:buChar char="•"/>
+            </a:pPr>
+            <a:r>
+              <a:rPr lang="en-US" altLang="ja-JP" dirty="0" err="1"/>
+              <a:t>Ví</a:t>
+            </a:r>
+            <a:r>
+              <a:rPr lang="en-US" altLang="ja-JP" dirty="0"/>
+              <a:t> </a:t>
+            </a:r>
+            <a:r>
+              <a:rPr lang="en-US" altLang="ja-JP" dirty="0" err="1"/>
+              <a:t>dụ</a:t>
+            </a:r>
+            <a:r>
+              <a:rPr lang="en-US" altLang="ja-JP" dirty="0"/>
+              <a:t>: Danh </a:t>
+            </a:r>
+            <a:r>
+              <a:rPr lang="en-US" altLang="ja-JP" dirty="0" err="1"/>
+              <a:t>sách</a:t>
+            </a:r>
+            <a:r>
+              <a:rPr lang="en-US" altLang="ja-JP" dirty="0"/>
+              <a:t> </a:t>
+            </a:r>
+            <a:r>
+              <a:rPr lang="en-US" altLang="ja-JP" dirty="0" err="1"/>
+              <a:t>nhân</a:t>
+            </a:r>
+            <a:r>
+              <a:rPr lang="en-US" altLang="ja-JP" dirty="0"/>
+              <a:t> </a:t>
+            </a:r>
+            <a:r>
+              <a:rPr lang="en-US" altLang="ja-JP" dirty="0" err="1"/>
+              <a:t>viên</a:t>
+            </a:r>
+            <a:r>
+              <a:rPr lang="en-US" altLang="ja-JP" dirty="0"/>
+              <a:t> </a:t>
+            </a:r>
+            <a:r>
+              <a:rPr lang="en-US" altLang="ja-JP" dirty="0">
+                <a:sym typeface="Wingdings" panose="05000000000000000000" pitchFamily="2" charset="2"/>
+              </a:rPr>
+              <a:t></a:t>
+            </a:r>
+            <a:r>
+              <a:rPr lang="en-US" altLang="ja-JP" dirty="0"/>
+              <a:t> </a:t>
+            </a:r>
+            <a:r>
+              <a:rPr lang="en-US" altLang="ja-JP" dirty="0" err="1"/>
+              <a:t>Lọc</a:t>
+            </a:r>
+            <a:r>
+              <a:rPr lang="en-US" altLang="ja-JP" dirty="0"/>
+              <a:t> </a:t>
+            </a:r>
+            <a:r>
+              <a:rPr lang="en-US" altLang="ja-JP" dirty="0" err="1"/>
+              <a:t>nhân</a:t>
+            </a:r>
+            <a:r>
+              <a:rPr lang="en-US" altLang="ja-JP" dirty="0"/>
+              <a:t> </a:t>
+            </a:r>
+            <a:r>
+              <a:rPr lang="en-US" altLang="ja-JP" dirty="0" err="1"/>
+              <a:t>viên</a:t>
+            </a:r>
+            <a:r>
+              <a:rPr lang="en-US" altLang="ja-JP" dirty="0"/>
+              <a:t> </a:t>
+            </a:r>
+            <a:r>
+              <a:rPr lang="en-US" altLang="ja-JP" dirty="0" err="1"/>
+              <a:t>trên</a:t>
+            </a:r>
+            <a:r>
+              <a:rPr lang="en-US" altLang="ja-JP" dirty="0"/>
+              <a:t> 18 </a:t>
+            </a:r>
+            <a:r>
+              <a:rPr lang="en-US" altLang="ja-JP" dirty="0" err="1"/>
+              <a:t>tuổi</a:t>
+            </a:r>
+            <a:r>
+              <a:rPr lang="en-US" altLang="ja-JP" dirty="0"/>
+              <a:t> </a:t>
+            </a:r>
+            <a:r>
+              <a:rPr lang="en-US" altLang="ja-JP" dirty="0">
+                <a:sym typeface="Wingdings" panose="05000000000000000000" pitchFamily="2" charset="2"/>
+              </a:rPr>
+              <a:t></a:t>
+            </a:r>
+            <a:r>
+              <a:rPr lang="en-US" altLang="ja-JP" dirty="0"/>
+              <a:t> In </a:t>
+            </a:r>
+            <a:r>
+              <a:rPr lang="en-US" altLang="ja-JP" dirty="0" err="1"/>
+              <a:t>tên</a:t>
+            </a:r>
+            <a:endParaRPr lang="en-US" altLang="ja-JP" dirty="0"/>
+          </a:p>
+          <a:p>
+            <a:pPr algn="just">
+              <a:buFont typeface="Arial" panose="020B0604020202020204" pitchFamily="34" charset="0"/>
+              <a:buChar char="•"/>
+            </a:pPr>
+            <a:endParaRPr lang="en-US" altLang="ja-JP" dirty="0"/>
+          </a:p>
+          <a:p>
+            <a:pPr algn="just">
+              <a:buFont typeface="Arial" panose="020B0604020202020204" pitchFamily="34" charset="0"/>
+              <a:buChar char="•"/>
+            </a:pPr>
+            <a:r>
+              <a:rPr lang="en-US" altLang="ja-JP" dirty="0"/>
+              <a:t>OOP: </a:t>
+            </a:r>
+            <a:r>
+              <a:rPr lang="en-US" altLang="ja-JP" dirty="0" err="1"/>
+              <a:t>Đối</a:t>
+            </a:r>
+            <a:r>
+              <a:rPr lang="en-US" altLang="ja-JP" dirty="0"/>
+              <a:t> </a:t>
+            </a:r>
+            <a:r>
+              <a:rPr lang="en-US" altLang="ja-JP" dirty="0" err="1"/>
+              <a:t>tượng</a:t>
+            </a:r>
+            <a:r>
+              <a:rPr lang="en-US" altLang="ja-JP" dirty="0"/>
+              <a:t> </a:t>
+            </a:r>
+            <a:r>
+              <a:rPr lang="en-US" altLang="ja-JP" dirty="0" err="1"/>
+              <a:t>và</a:t>
+            </a:r>
+            <a:r>
+              <a:rPr lang="en-US" altLang="ja-JP" dirty="0"/>
+              <a:t> </a:t>
+            </a:r>
+            <a:r>
+              <a:rPr lang="en-US" altLang="ja-JP" dirty="0" err="1"/>
+              <a:t>hành</a:t>
+            </a:r>
+            <a:r>
+              <a:rPr lang="en-US" altLang="ja-JP" dirty="0"/>
+              <a:t> vi</a:t>
+            </a:r>
+          </a:p>
+          <a:p>
+            <a:pPr algn="just">
+              <a:buFont typeface="Arial" panose="020B0604020202020204" pitchFamily="34" charset="0"/>
+              <a:buChar char="•"/>
+            </a:pPr>
+            <a:r>
+              <a:rPr lang="en-US" altLang="ja-JP" dirty="0"/>
+              <a:t>FP: </a:t>
+            </a:r>
+            <a:r>
+              <a:rPr lang="en-US" altLang="ja-JP" dirty="0" err="1"/>
+              <a:t>Dữ</a:t>
+            </a:r>
+            <a:r>
+              <a:rPr lang="en-US" altLang="ja-JP" dirty="0"/>
+              <a:t> </a:t>
+            </a:r>
+            <a:r>
+              <a:rPr lang="en-US" altLang="ja-JP" dirty="0" err="1"/>
+              <a:t>liệu</a:t>
+            </a:r>
+            <a:r>
+              <a:rPr lang="en-US" altLang="ja-JP" dirty="0"/>
+              <a:t> </a:t>
+            </a:r>
+            <a:r>
+              <a:rPr lang="en-US" altLang="ja-JP" dirty="0" err="1"/>
+              <a:t>và</a:t>
+            </a:r>
+            <a:r>
+              <a:rPr lang="en-US" altLang="ja-JP" dirty="0"/>
+              <a:t> </a:t>
+            </a:r>
+            <a:r>
+              <a:rPr lang="en-US" altLang="ja-JP" dirty="0" err="1"/>
+              <a:t>hàm</a:t>
+            </a:r>
+            <a:endParaRPr lang="en-US" altLang="ja-JP" dirty="0"/>
+          </a:p>
+          <a:p>
+            <a:pPr algn="just"/>
+            <a:endParaRPr lang="en-US" altLang="ja-JP" dirty="0"/>
+          </a:p>
+          <a:p>
+            <a:endParaRPr lang="ja-JP" altLang="en-US" dirty="0"/>
+          </a:p>
+        </p:txBody>
+      </p:sp>
+    </p:spTree>
+    <p:extLst>
+      <p:ext uri="{BB962C8B-B14F-4D97-AF65-F5344CB8AC3E}">
+        <p14:creationId xmlns:p14="http://schemas.microsoft.com/office/powerpoint/2010/main" val="113548610"/>
+      </p:ext>
+    </p:extLst>
+  </p:cSld>
+  <p:clrMapOvr>
+    <a:masterClrMapping/>
+  </p:clrMapOvr>
+</p:sld>
+</file>
+
+<file path=ppt/slides/slide20.xml><?xml version="1.0" encoding="utf-8"?>
 <p:sld xmlns:a="http://schemas.openxmlformats.org/drawingml/2006/main" xmlns:r="http://schemas.openxmlformats.org/officeDocument/2006/relationships" xmlns:p="http://schemas.openxmlformats.org/presentationml/2006/main">
   <p:cSld>
     <p:spTree>
@@ -7790,7 +9975,7 @@
               <a:pPr>
                 <a:defRPr/>
               </a:pPr>
-              <a:t>16</a:t>
+              <a:t>20</a:t>
             </a:fld>
             <a:endParaRPr lang="en-US" altLang="ja-JP"/>
           </a:p>
@@ -8162,7 +10347,7 @@
 </p:sld>
 </file>
 
-<file path=ppt/slides/slide17.xml><?xml version="1.0" encoding="utf-8"?>
+<file path=ppt/slides/slide21.xml><?xml version="1.0" encoding="utf-8"?>
 <p:sld xmlns:a="http://schemas.openxmlformats.org/drawingml/2006/main" xmlns:r="http://schemas.openxmlformats.org/officeDocument/2006/relationships" xmlns:p="http://schemas.openxmlformats.org/presentationml/2006/main">
   <p:cSld>
     <p:spTree>
@@ -8304,11 +10489,7 @@
             <a:pPr algn="just" fontAlgn="t"/>
             <a:r>
               <a:rPr lang="ja-JP" altLang="ja-JP" dirty="0"/>
-              <a:t>Thuật toán </a:t>
-            </a:r>
-            <a:r>
-              <a:rPr lang="ja-JP" altLang="ja-JP"/>
-              <a:t>phức tạp</a:t>
+              <a:t>Thuật toán phức tạp</a:t>
             </a:r>
             <a:endParaRPr lang="en-US" altLang="ja-JP" dirty="0"/>
           </a:p>
@@ -8370,7 +10551,7 @@
               <a:pPr>
                 <a:defRPr/>
               </a:pPr>
-              <a:t>17</a:t>
+              <a:t>21</a:t>
             </a:fld>
             <a:endParaRPr lang="en-US" altLang="ja-JP"/>
           </a:p>
@@ -8389,7 +10570,7 @@
 </p:sld>
 </file>
 
-<file path=ppt/slides/slide18.xml><?xml version="1.0" encoding="utf-8"?>
+<file path=ppt/slides/slide22.xml><?xml version="1.0" encoding="utf-8"?>
 <p:sld xmlns:a="http://schemas.openxmlformats.org/drawingml/2006/main" xmlns:r="http://schemas.openxmlformats.org/officeDocument/2006/relationships" xmlns:p="http://schemas.openxmlformats.org/presentationml/2006/main">
   <p:cSld>
     <p:spTree>
@@ -8458,7 +10639,243 @@
           <a:bodyPr/>
           <a:lstStyle/>
           <a:p>
-            <a:endParaRPr kumimoji="1" lang="ja-JP" altLang="en-US"/>
+            <a:r>
+              <a:rPr lang="en-US" altLang="ja-JP" dirty="0">
+                <a:solidFill>
+                  <a:srgbClr val="000000"/>
+                </a:solidFill>
+              </a:rPr>
+              <a:t>Function&lt;T,R&gt; : </a:t>
+            </a:r>
+            <a:r>
+              <a:rPr lang="en-US" altLang="ja-JP" dirty="0" err="1">
+                <a:solidFill>
+                  <a:srgbClr val="000000"/>
+                </a:solidFill>
+              </a:rPr>
+              <a:t>Biến</a:t>
+            </a:r>
+            <a:r>
+              <a:rPr lang="en-US" altLang="ja-JP" dirty="0">
+                <a:solidFill>
+                  <a:srgbClr val="000000"/>
+                </a:solidFill>
+              </a:rPr>
+              <a:t> </a:t>
+            </a:r>
+            <a:r>
+              <a:rPr lang="en-US" altLang="ja-JP" dirty="0" err="1">
+                <a:solidFill>
+                  <a:srgbClr val="000000"/>
+                </a:solidFill>
+              </a:rPr>
+              <a:t>đổi</a:t>
+            </a:r>
+            <a:r>
+              <a:rPr lang="en-US" altLang="ja-JP" dirty="0">
+                <a:solidFill>
+                  <a:srgbClr val="000000"/>
+                </a:solidFill>
+              </a:rPr>
+              <a:t> </a:t>
+            </a:r>
+            <a:r>
+              <a:rPr lang="en-US" altLang="ja-JP" dirty="0" err="1">
+                <a:solidFill>
+                  <a:srgbClr val="000000"/>
+                </a:solidFill>
+              </a:rPr>
+              <a:t>dữ</a:t>
+            </a:r>
+            <a:r>
+              <a:rPr lang="en-US" altLang="ja-JP" dirty="0">
+                <a:solidFill>
+                  <a:srgbClr val="000000"/>
+                </a:solidFill>
+              </a:rPr>
+              <a:t> </a:t>
+            </a:r>
+            <a:r>
+              <a:rPr lang="en-US" altLang="ja-JP" dirty="0" err="1">
+                <a:solidFill>
+                  <a:srgbClr val="000000"/>
+                </a:solidFill>
+              </a:rPr>
+              <a:t>liệu</a:t>
+            </a:r>
+            <a:endParaRPr lang="en-US" altLang="ja-JP" dirty="0"/>
+          </a:p>
+          <a:p>
+            <a:r>
+              <a:rPr lang="en-US" altLang="ja-JP" dirty="0">
+                <a:solidFill>
+                  <a:srgbClr val="000000"/>
+                </a:solidFill>
+              </a:rPr>
+              <a:t>Predicate&lt;T&gt; : </a:t>
+            </a:r>
+            <a:r>
+              <a:rPr lang="en-US" altLang="ja-JP" dirty="0" err="1">
+                <a:solidFill>
+                  <a:srgbClr val="000000"/>
+                </a:solidFill>
+              </a:rPr>
+              <a:t>Kiểm</a:t>
+            </a:r>
+            <a:r>
+              <a:rPr lang="en-US" altLang="ja-JP" dirty="0">
+                <a:solidFill>
+                  <a:srgbClr val="000000"/>
+                </a:solidFill>
+              </a:rPr>
+              <a:t> </a:t>
+            </a:r>
+            <a:r>
+              <a:rPr lang="en-US" altLang="ja-JP" dirty="0" err="1">
+                <a:solidFill>
+                  <a:srgbClr val="000000"/>
+                </a:solidFill>
+              </a:rPr>
+              <a:t>tra</a:t>
+            </a:r>
+            <a:r>
+              <a:rPr lang="en-US" altLang="ja-JP" dirty="0">
+                <a:solidFill>
+                  <a:srgbClr val="000000"/>
+                </a:solidFill>
+              </a:rPr>
+              <a:t> </a:t>
+            </a:r>
+            <a:r>
+              <a:rPr lang="en-US" altLang="ja-JP" dirty="0" err="1">
+                <a:solidFill>
+                  <a:srgbClr val="000000"/>
+                </a:solidFill>
+              </a:rPr>
+              <a:t>điều</a:t>
+            </a:r>
+            <a:r>
+              <a:rPr lang="en-US" altLang="ja-JP" dirty="0">
+                <a:solidFill>
+                  <a:srgbClr val="000000"/>
+                </a:solidFill>
+              </a:rPr>
+              <a:t> </a:t>
+            </a:r>
+            <a:r>
+              <a:rPr lang="en-US" altLang="ja-JP" dirty="0" err="1">
+                <a:solidFill>
+                  <a:srgbClr val="000000"/>
+                </a:solidFill>
+              </a:rPr>
+              <a:t>kiện</a:t>
+            </a:r>
+            <a:endParaRPr lang="en-US" altLang="ja-JP" dirty="0"/>
+          </a:p>
+          <a:p>
+            <a:r>
+              <a:rPr lang="en-US" altLang="ja-JP" dirty="0">
+                <a:solidFill>
+                  <a:srgbClr val="000000"/>
+                </a:solidFill>
+              </a:rPr>
+              <a:t>Consumer&lt;T&gt; : </a:t>
+            </a:r>
+            <a:r>
+              <a:rPr lang="en-US" altLang="ja-JP" dirty="0" err="1">
+                <a:solidFill>
+                  <a:srgbClr val="000000"/>
+                </a:solidFill>
+              </a:rPr>
+              <a:t>Thực</a:t>
+            </a:r>
+            <a:r>
+              <a:rPr lang="en-US" altLang="ja-JP" dirty="0">
+                <a:solidFill>
+                  <a:srgbClr val="000000"/>
+                </a:solidFill>
+              </a:rPr>
+              <a:t> </a:t>
+            </a:r>
+            <a:r>
+              <a:rPr lang="en-US" altLang="ja-JP" dirty="0" err="1">
+                <a:solidFill>
+                  <a:srgbClr val="000000"/>
+                </a:solidFill>
+              </a:rPr>
+              <a:t>hiện</a:t>
+            </a:r>
+            <a:r>
+              <a:rPr lang="en-US" altLang="ja-JP" dirty="0">
+                <a:solidFill>
+                  <a:srgbClr val="000000"/>
+                </a:solidFill>
+              </a:rPr>
+              <a:t> </a:t>
+            </a:r>
+            <a:r>
+              <a:rPr lang="en-US" altLang="ja-JP" dirty="0" err="1">
+                <a:solidFill>
+                  <a:srgbClr val="000000"/>
+                </a:solidFill>
+              </a:rPr>
+              <a:t>hành</a:t>
+            </a:r>
+            <a:r>
+              <a:rPr lang="en-US" altLang="ja-JP" dirty="0">
+                <a:solidFill>
+                  <a:srgbClr val="000000"/>
+                </a:solidFill>
+              </a:rPr>
+              <a:t> </a:t>
+            </a:r>
+            <a:r>
+              <a:rPr lang="en-US" altLang="ja-JP" dirty="0" err="1">
+                <a:solidFill>
+                  <a:srgbClr val="000000"/>
+                </a:solidFill>
+              </a:rPr>
+              <a:t>động</a:t>
+            </a:r>
+            <a:endParaRPr lang="en-US" altLang="ja-JP" dirty="0"/>
+          </a:p>
+          <a:p>
+            <a:r>
+              <a:rPr lang="en-US" altLang="ja-JP" dirty="0">
+                <a:solidFill>
+                  <a:srgbClr val="000000"/>
+                </a:solidFill>
+              </a:rPr>
+              <a:t>Supplier&lt;T&gt; : Sinh </a:t>
+            </a:r>
+            <a:r>
+              <a:rPr lang="en-US" altLang="ja-JP" dirty="0" err="1">
+                <a:solidFill>
+                  <a:srgbClr val="000000"/>
+                </a:solidFill>
+              </a:rPr>
+              <a:t>dữ</a:t>
+            </a:r>
+            <a:r>
+              <a:rPr lang="en-US" altLang="ja-JP" dirty="0">
+                <a:solidFill>
+                  <a:srgbClr val="000000"/>
+                </a:solidFill>
+              </a:rPr>
+              <a:t> </a:t>
+            </a:r>
+            <a:r>
+              <a:rPr lang="en-US" altLang="ja-JP" dirty="0" err="1">
+                <a:solidFill>
+                  <a:srgbClr val="000000"/>
+                </a:solidFill>
+              </a:rPr>
+              <a:t>liệu</a:t>
+            </a:r>
+            <a:endParaRPr lang="en-US" altLang="ja-JP" dirty="0"/>
+          </a:p>
+          <a:p>
+            <a:endParaRPr kumimoji="1" lang="ja-JP" altLang="en-US" dirty="0"/>
           </a:p>
         </p:txBody>
       </p:sp>
@@ -8499,7 +10916,7 @@
               <a:pPr>
                 <a:defRPr/>
               </a:pPr>
-              <a:t>18</a:t>
+              <a:t>22</a:t>
             </a:fld>
             <a:endParaRPr lang="en-US" altLang="ja-JP"/>
           </a:p>
@@ -8518,7 +10935,940 @@
 </p:sld>
 </file>
 
-<file path=ppt/slides/slide2.xml><?xml version="1.0" encoding="utf-8"?>
+<file path=ppt/slides/slide3.xml><?xml version="1.0" encoding="utf-8"?>
+<p:sld xmlns:a="http://schemas.openxmlformats.org/drawingml/2006/main" xmlns:r="http://schemas.openxmlformats.org/officeDocument/2006/relationships" xmlns:p="http://schemas.openxmlformats.org/presentationml/2006/main">
+  <p:cSld>
+    <p:spTree>
+      <p:nvGrpSpPr>
+        <p:cNvPr id="1" name=""/>
+        <p:cNvGrpSpPr/>
+        <p:nvPr/>
+      </p:nvGrpSpPr>
+      <p:grpSpPr>
+        <a:xfrm>
+          <a:off x="0" y="0"/>
+          <a:ext cx="0" cy="0"/>
+          <a:chOff x="0" y="0"/>
+          <a:chExt cx="0" cy="0"/>
+        </a:xfrm>
+      </p:grpSpPr>
+      <p:sp>
+        <p:nvSpPr>
+          <p:cNvPr id="2" name="Text 0"/>
+          <p:cNvSpPr/>
+          <p:nvPr/>
+        </p:nvSpPr>
+        <p:spPr>
+          <a:xfrm>
+            <a:off x="128464" y="529829"/>
+            <a:ext cx="8915400" cy="371475"/>
+          </a:xfrm>
+          <a:prstGeom prst="rect">
+            <a:avLst/>
+          </a:prstGeom>
+          <a:noFill/>
+          <a:ln/>
+        </p:spPr>
+        <p:txBody>
+          <a:bodyPr wrap="square" rtlCol="0" anchor="ctr"/>
+          <a:lstStyle/>
+          <a:p>
+            <a:r>
+              <a:rPr lang="en-US" sz="4000" dirty="0" err="1">
+                <a:solidFill>
+                  <a:srgbClr val="1F4E79"/>
+                </a:solidFill>
+                <a:latin typeface="+mj-lt"/>
+              </a:rPr>
+              <a:t>Tư</a:t>
+            </a:r>
+            <a:r>
+              <a:rPr lang="en-US" sz="4000" dirty="0">
+                <a:solidFill>
+                  <a:srgbClr val="1F4E79"/>
+                </a:solidFill>
+                <a:latin typeface="+mj-lt"/>
+              </a:rPr>
+              <a:t> duy OOP</a:t>
+            </a:r>
+            <a:endParaRPr lang="en-US" sz="4000" dirty="0">
+              <a:latin typeface="+mj-lt"/>
+            </a:endParaRPr>
+          </a:p>
+        </p:txBody>
+      </p:sp>
+      <p:sp>
+        <p:nvSpPr>
+          <p:cNvPr id="3" name="Text 1"/>
+          <p:cNvSpPr/>
+          <p:nvPr/>
+        </p:nvSpPr>
+        <p:spPr>
+          <a:xfrm>
+            <a:off x="371475" y="1943100"/>
+            <a:ext cx="9229725" cy="2971800"/>
+          </a:xfrm>
+          <a:prstGeom prst="rect">
+            <a:avLst/>
+          </a:prstGeom>
+          <a:noFill/>
+          <a:ln/>
+        </p:spPr>
+        <p:txBody>
+          <a:bodyPr wrap="square" rtlCol="0" anchor="ctr"/>
+          <a:lstStyle/>
+          <a:p>
+            <a:r>
+              <a:rPr lang="en-US" sz="2800" dirty="0">
+                <a:solidFill>
+                  <a:srgbClr val="000000"/>
+                </a:solidFill>
+                <a:latin typeface="+mj-lt"/>
+              </a:rPr>
+              <a:t>• Class, Object</a:t>
+            </a:r>
+          </a:p>
+          <a:p>
+            <a:endParaRPr lang="en-US" sz="2800" dirty="0">
+              <a:latin typeface="+mj-lt"/>
+            </a:endParaRPr>
+          </a:p>
+          <a:p>
+            <a:r>
+              <a:rPr lang="en-US" sz="2800" dirty="0">
+                <a:solidFill>
+                  <a:srgbClr val="000000"/>
+                </a:solidFill>
+                <a:latin typeface="+mj-lt"/>
+              </a:rPr>
+              <a:t>• Encapsulation</a:t>
+            </a:r>
+          </a:p>
+          <a:p>
+            <a:endParaRPr lang="en-US" sz="2800" dirty="0">
+              <a:latin typeface="+mj-lt"/>
+            </a:endParaRPr>
+          </a:p>
+          <a:p>
+            <a:r>
+              <a:rPr lang="en-US" sz="2800" dirty="0">
+                <a:solidFill>
+                  <a:srgbClr val="000000"/>
+                </a:solidFill>
+                <a:latin typeface="+mj-lt"/>
+              </a:rPr>
+              <a:t>• Inheritance</a:t>
+            </a:r>
+          </a:p>
+          <a:p>
+            <a:endParaRPr lang="en-US" sz="2800" dirty="0">
+              <a:latin typeface="+mj-lt"/>
+            </a:endParaRPr>
+          </a:p>
+          <a:p>
+            <a:r>
+              <a:rPr lang="en-US" sz="2800" dirty="0">
+                <a:solidFill>
+                  <a:srgbClr val="000000"/>
+                </a:solidFill>
+                <a:latin typeface="+mj-lt"/>
+              </a:rPr>
+              <a:t>• Polymorphism</a:t>
+            </a:r>
+            <a:endParaRPr lang="en-US" sz="2800" dirty="0">
+              <a:latin typeface="+mj-lt"/>
+            </a:endParaRPr>
+          </a:p>
+          <a:p>
+            <a:endParaRPr lang="en-US" sz="2800" dirty="0">
+              <a:latin typeface="+mj-lt"/>
+            </a:endParaRPr>
+          </a:p>
+          <a:p>
+            <a:r>
+              <a:rPr lang="en-US" sz="2800" dirty="0">
+                <a:solidFill>
+                  <a:srgbClr val="000000"/>
+                </a:solidFill>
+                <a:latin typeface="+mj-lt"/>
+              </a:rPr>
+              <a:t>Thế giới được mô hình hóa bằng đối tượng.</a:t>
+            </a:r>
+            <a:endParaRPr lang="en-US" sz="2800" dirty="0">
+              <a:latin typeface="+mj-lt"/>
+            </a:endParaRPr>
+          </a:p>
+        </p:txBody>
+      </p:sp>
+    </p:spTree>
+    <p:extLst>
+      <p:ext uri="{BB962C8B-B14F-4D97-AF65-F5344CB8AC3E}">
+        <p14:creationId xmlns:p14="http://schemas.microsoft.com/office/powerpoint/2010/main" val="2154449448"/>
+      </p:ext>
+    </p:extLst>
+  </p:cSld>
+  <p:clrMapOvr>
+    <a:masterClrMapping/>
+  </p:clrMapOvr>
+</p:sld>
+</file>
+
+<file path=ppt/slides/slide4.xml><?xml version="1.0" encoding="utf-8"?>
+<p:sld xmlns:a="http://schemas.openxmlformats.org/drawingml/2006/main" xmlns:r="http://schemas.openxmlformats.org/officeDocument/2006/relationships" xmlns:p="http://schemas.openxmlformats.org/presentationml/2006/main">
+  <p:cSld>
+    <p:spTree>
+      <p:nvGrpSpPr>
+        <p:cNvPr id="1" name=""/>
+        <p:cNvGrpSpPr/>
+        <p:nvPr/>
+      </p:nvGrpSpPr>
+      <p:grpSpPr>
+        <a:xfrm>
+          <a:off x="0" y="0"/>
+          <a:ext cx="0" cy="0"/>
+          <a:chOff x="0" y="0"/>
+          <a:chExt cx="0" cy="0"/>
+        </a:xfrm>
+      </p:grpSpPr>
+      <p:sp>
+        <p:nvSpPr>
+          <p:cNvPr id="2" name="Text 0"/>
+          <p:cNvSpPr/>
+          <p:nvPr/>
+        </p:nvSpPr>
+        <p:spPr>
+          <a:xfrm>
+            <a:off x="128464" y="553252"/>
+            <a:ext cx="8915400" cy="371475"/>
+          </a:xfrm>
+          <a:prstGeom prst="rect">
+            <a:avLst/>
+          </a:prstGeom>
+          <a:noFill/>
+          <a:ln/>
+        </p:spPr>
+        <p:txBody>
+          <a:bodyPr wrap="square" rtlCol="0" anchor="ctr"/>
+          <a:lstStyle/>
+          <a:p>
+            <a:r>
+              <a:rPr lang="en-US" sz="3200" dirty="0" err="1">
+                <a:solidFill>
+                  <a:srgbClr val="1F4E79"/>
+                </a:solidFill>
+                <a:latin typeface="+mj-lt"/>
+              </a:rPr>
+              <a:t>Tư</a:t>
+            </a:r>
+            <a:r>
+              <a:rPr lang="en-US" sz="3200" dirty="0">
+                <a:solidFill>
+                  <a:srgbClr val="1F4E79"/>
+                </a:solidFill>
+                <a:latin typeface="+mj-lt"/>
+              </a:rPr>
+              <a:t> duy Functional Programming</a:t>
+            </a:r>
+            <a:endParaRPr lang="en-US" sz="3200" dirty="0">
+              <a:latin typeface="+mj-lt"/>
+            </a:endParaRPr>
+          </a:p>
+        </p:txBody>
+      </p:sp>
+      <p:sp>
+        <p:nvSpPr>
+          <p:cNvPr id="3" name="Text 1"/>
+          <p:cNvSpPr/>
+          <p:nvPr/>
+        </p:nvSpPr>
+        <p:spPr>
+          <a:xfrm>
+            <a:off x="371474" y="1385887"/>
+            <a:ext cx="9001125" cy="4606289"/>
+          </a:xfrm>
+          <a:prstGeom prst="rect">
+            <a:avLst/>
+          </a:prstGeom>
+          <a:noFill/>
+          <a:ln/>
+        </p:spPr>
+        <p:txBody>
+          <a:bodyPr wrap="square" rtlCol="0" anchor="ctr"/>
+          <a:lstStyle/>
+          <a:p>
+            <a:r>
+              <a:rPr lang="en-US" sz="2800" dirty="0">
+                <a:solidFill>
+                  <a:srgbClr val="000000"/>
+                </a:solidFill>
+                <a:latin typeface="+mj-lt"/>
+              </a:rPr>
+              <a:t>Input → Function → Output</a:t>
+            </a:r>
+            <a:endParaRPr lang="en-US" sz="2800" dirty="0">
+              <a:latin typeface="+mj-lt"/>
+            </a:endParaRPr>
+          </a:p>
+          <a:p>
+            <a:endParaRPr lang="en-US" sz="2800" dirty="0">
+              <a:latin typeface="+mj-lt"/>
+            </a:endParaRPr>
+          </a:p>
+          <a:p>
+            <a:r>
+              <a:rPr lang="en-US" sz="2800" dirty="0">
+                <a:solidFill>
+                  <a:srgbClr val="000000"/>
+                </a:solidFill>
+                <a:latin typeface="+mj-lt"/>
+              </a:rPr>
+              <a:t>Đặc trưng:</a:t>
+            </a:r>
+            <a:endParaRPr lang="en-US" sz="2800" dirty="0">
+              <a:latin typeface="+mj-lt"/>
+            </a:endParaRPr>
+          </a:p>
+          <a:p>
+            <a:r>
+              <a:rPr lang="en-US" sz="2800" dirty="0">
+                <a:solidFill>
+                  <a:srgbClr val="000000"/>
+                </a:solidFill>
+                <a:latin typeface="+mj-lt"/>
+              </a:rPr>
+              <a:t>• Pure Function (</a:t>
+            </a:r>
+            <a:r>
+              <a:rPr lang="en-US" sz="2800" dirty="0" err="1">
+                <a:solidFill>
+                  <a:srgbClr val="000000"/>
+                </a:solidFill>
+                <a:latin typeface="+mj-lt"/>
+              </a:rPr>
+              <a:t>Cùng</a:t>
+            </a:r>
+            <a:r>
+              <a:rPr lang="en-US" sz="2800" dirty="0">
+                <a:solidFill>
+                  <a:srgbClr val="000000"/>
+                </a:solidFill>
+                <a:latin typeface="+mj-lt"/>
+              </a:rPr>
+              <a:t> Input </a:t>
+            </a:r>
+            <a:r>
+              <a:rPr lang="en-US" sz="2800" dirty="0">
+                <a:solidFill>
+                  <a:srgbClr val="000000"/>
+                </a:solidFill>
+                <a:latin typeface="+mj-lt"/>
+                <a:sym typeface="Wingdings" panose="05000000000000000000" pitchFamily="2" charset="2"/>
+              </a:rPr>
+              <a:t> </a:t>
+            </a:r>
+            <a:r>
+              <a:rPr lang="en-US" sz="2800" dirty="0" err="1">
+                <a:solidFill>
+                  <a:srgbClr val="000000"/>
+                </a:solidFill>
+                <a:latin typeface="+mj-lt"/>
+                <a:sym typeface="Wingdings" panose="05000000000000000000" pitchFamily="2" charset="2"/>
+              </a:rPr>
+              <a:t>Cùng</a:t>
+            </a:r>
+            <a:r>
+              <a:rPr lang="en-US" sz="2800" dirty="0">
+                <a:solidFill>
+                  <a:srgbClr val="000000"/>
+                </a:solidFill>
+                <a:latin typeface="+mj-lt"/>
+                <a:sym typeface="Wingdings" panose="05000000000000000000" pitchFamily="2" charset="2"/>
+              </a:rPr>
+              <a:t> Output)</a:t>
+            </a:r>
+          </a:p>
+          <a:p>
+            <a:endParaRPr lang="en-US" sz="2800" dirty="0">
+              <a:latin typeface="+mj-lt"/>
+            </a:endParaRPr>
+          </a:p>
+          <a:p>
+            <a:r>
+              <a:rPr lang="en-US" sz="2800" dirty="0">
+                <a:solidFill>
+                  <a:srgbClr val="000000"/>
+                </a:solidFill>
+                <a:latin typeface="+mj-lt"/>
+              </a:rPr>
+              <a:t>• Immutable Data (</a:t>
+            </a:r>
+            <a:r>
+              <a:rPr lang="en-US" sz="2800" dirty="0" err="1">
+                <a:solidFill>
+                  <a:srgbClr val="000000"/>
+                </a:solidFill>
+                <a:latin typeface="+mj-lt"/>
+              </a:rPr>
+              <a:t>Dữ</a:t>
+            </a:r>
+            <a:r>
+              <a:rPr lang="en-US" sz="2800" dirty="0">
+                <a:solidFill>
+                  <a:srgbClr val="000000"/>
+                </a:solidFill>
+                <a:latin typeface="+mj-lt"/>
+              </a:rPr>
+              <a:t> </a:t>
+            </a:r>
+            <a:r>
+              <a:rPr lang="en-US" sz="2800" dirty="0" err="1">
+                <a:solidFill>
+                  <a:srgbClr val="000000"/>
+                </a:solidFill>
+                <a:latin typeface="+mj-lt"/>
+              </a:rPr>
+              <a:t>liệu</a:t>
+            </a:r>
+            <a:r>
+              <a:rPr lang="en-US" sz="2800" dirty="0">
+                <a:solidFill>
+                  <a:srgbClr val="000000"/>
+                </a:solidFill>
+                <a:latin typeface="+mj-lt"/>
+              </a:rPr>
+              <a:t> </a:t>
+            </a:r>
+            <a:r>
+              <a:rPr lang="en-US" sz="2800" dirty="0" err="1">
+                <a:solidFill>
+                  <a:srgbClr val="000000"/>
+                </a:solidFill>
+                <a:latin typeface="+mj-lt"/>
+              </a:rPr>
+              <a:t>bất</a:t>
+            </a:r>
+            <a:r>
+              <a:rPr lang="en-US" sz="2800" dirty="0">
+                <a:solidFill>
+                  <a:srgbClr val="000000"/>
+                </a:solidFill>
+                <a:latin typeface="+mj-lt"/>
+              </a:rPr>
+              <a:t> </a:t>
+            </a:r>
+            <a:r>
+              <a:rPr lang="en-US" sz="2800" dirty="0" err="1">
+                <a:solidFill>
+                  <a:srgbClr val="000000"/>
+                </a:solidFill>
+                <a:latin typeface="+mj-lt"/>
+              </a:rPr>
+              <a:t>biến</a:t>
+            </a:r>
+            <a:r>
+              <a:rPr lang="en-US" sz="2800" dirty="0">
+                <a:solidFill>
+                  <a:srgbClr val="000000"/>
+                </a:solidFill>
+                <a:latin typeface="+mj-lt"/>
+              </a:rPr>
+              <a:t>)</a:t>
+            </a:r>
+          </a:p>
+          <a:p>
+            <a:endParaRPr lang="en-US" sz="2800" dirty="0">
+              <a:latin typeface="+mj-lt"/>
+            </a:endParaRPr>
+          </a:p>
+          <a:p>
+            <a:r>
+              <a:rPr lang="en-US" sz="2800" dirty="0">
+                <a:solidFill>
+                  <a:srgbClr val="000000"/>
+                </a:solidFill>
+                <a:latin typeface="+mj-lt"/>
+              </a:rPr>
+              <a:t>• Higher-order Function (</a:t>
+            </a:r>
+            <a:r>
+              <a:rPr lang="en-US" sz="2800" dirty="0" err="1">
+                <a:solidFill>
+                  <a:srgbClr val="000000"/>
+                </a:solidFill>
+                <a:latin typeface="+mj-lt"/>
+              </a:rPr>
+              <a:t>Nhận</a:t>
+            </a:r>
+            <a:r>
+              <a:rPr lang="en-US" sz="2800" dirty="0">
+                <a:solidFill>
+                  <a:srgbClr val="000000"/>
+                </a:solidFill>
+                <a:latin typeface="+mj-lt"/>
+              </a:rPr>
+              <a:t> </a:t>
+            </a:r>
+            <a:r>
+              <a:rPr lang="en-US" sz="2800" dirty="0" err="1">
+                <a:solidFill>
+                  <a:srgbClr val="000000"/>
+                </a:solidFill>
+                <a:latin typeface="+mj-lt"/>
+              </a:rPr>
+              <a:t>hàm</a:t>
+            </a:r>
+            <a:r>
+              <a:rPr lang="en-US" sz="2800" dirty="0">
+                <a:solidFill>
+                  <a:srgbClr val="000000"/>
+                </a:solidFill>
+                <a:latin typeface="+mj-lt"/>
+              </a:rPr>
+              <a:t> </a:t>
+            </a:r>
+            <a:r>
+              <a:rPr lang="en-US" sz="2800" dirty="0" err="1">
+                <a:solidFill>
+                  <a:srgbClr val="000000"/>
+                </a:solidFill>
+                <a:latin typeface="+mj-lt"/>
+              </a:rPr>
+              <a:t>khác</a:t>
+            </a:r>
+            <a:r>
+              <a:rPr lang="en-US" sz="2800" dirty="0">
+                <a:solidFill>
+                  <a:srgbClr val="000000"/>
+                </a:solidFill>
+                <a:latin typeface="+mj-lt"/>
+              </a:rPr>
+              <a:t> </a:t>
+            </a:r>
+            <a:r>
+              <a:rPr lang="en-US" sz="2800" dirty="0" err="1">
+                <a:solidFill>
+                  <a:srgbClr val="000000"/>
+                </a:solidFill>
+                <a:latin typeface="+mj-lt"/>
+              </a:rPr>
+              <a:t>làm</a:t>
+            </a:r>
+            <a:r>
+              <a:rPr lang="en-US" sz="2800" dirty="0">
+                <a:solidFill>
+                  <a:srgbClr val="000000"/>
+                </a:solidFill>
+                <a:latin typeface="+mj-lt"/>
+              </a:rPr>
+              <a:t> </a:t>
+            </a:r>
+            <a:r>
+              <a:rPr lang="en-US" sz="2800" dirty="0" err="1">
+                <a:solidFill>
+                  <a:srgbClr val="000000"/>
+                </a:solidFill>
+                <a:latin typeface="+mj-lt"/>
+              </a:rPr>
+              <a:t>đối</a:t>
+            </a:r>
+            <a:r>
+              <a:rPr lang="en-US" sz="2800" dirty="0">
+                <a:solidFill>
+                  <a:srgbClr val="000000"/>
+                </a:solidFill>
+                <a:latin typeface="+mj-lt"/>
+              </a:rPr>
+              <a:t> </a:t>
+            </a:r>
+            <a:r>
+              <a:rPr lang="en-US" sz="2800" dirty="0" err="1">
+                <a:solidFill>
+                  <a:srgbClr val="000000"/>
+                </a:solidFill>
+                <a:latin typeface="+mj-lt"/>
+              </a:rPr>
+              <a:t>số</a:t>
+            </a:r>
+            <a:r>
+              <a:rPr lang="en-US" sz="2800" dirty="0">
+                <a:solidFill>
+                  <a:srgbClr val="000000"/>
+                </a:solidFill>
+                <a:latin typeface="+mj-lt"/>
+              </a:rPr>
+              <a:t>)</a:t>
+            </a:r>
+          </a:p>
+          <a:p>
+            <a:endParaRPr lang="en-US" sz="2800" dirty="0">
+              <a:latin typeface="+mj-lt"/>
+            </a:endParaRPr>
+          </a:p>
+          <a:p>
+            <a:r>
+              <a:rPr lang="en-US" sz="2800" dirty="0">
+                <a:solidFill>
+                  <a:srgbClr val="000000"/>
+                </a:solidFill>
+                <a:latin typeface="+mj-lt"/>
+              </a:rPr>
+              <a:t>• Lambda Expression (</a:t>
+            </a:r>
+            <a:r>
+              <a:rPr lang="en-US" sz="2800" dirty="0" err="1">
+                <a:solidFill>
+                  <a:srgbClr val="000000"/>
+                </a:solidFill>
+                <a:latin typeface="+mj-lt"/>
+              </a:rPr>
+              <a:t>Cách</a:t>
+            </a:r>
+            <a:r>
+              <a:rPr lang="en-US" sz="2800" dirty="0">
+                <a:solidFill>
+                  <a:srgbClr val="000000"/>
+                </a:solidFill>
+                <a:latin typeface="+mj-lt"/>
+              </a:rPr>
+              <a:t> </a:t>
+            </a:r>
+            <a:r>
+              <a:rPr lang="en-US" sz="2800" dirty="0" err="1">
+                <a:solidFill>
+                  <a:srgbClr val="000000"/>
+                </a:solidFill>
+                <a:latin typeface="+mj-lt"/>
+              </a:rPr>
+              <a:t>viết</a:t>
+            </a:r>
+            <a:r>
+              <a:rPr lang="en-US" sz="2800" dirty="0">
+                <a:solidFill>
+                  <a:srgbClr val="000000"/>
+                </a:solidFill>
+                <a:latin typeface="+mj-lt"/>
+              </a:rPr>
+              <a:t> </a:t>
+            </a:r>
+            <a:r>
+              <a:rPr lang="en-US" sz="2800" dirty="0" err="1">
+                <a:solidFill>
+                  <a:srgbClr val="000000"/>
+                </a:solidFill>
+                <a:latin typeface="+mj-lt"/>
+              </a:rPr>
+              <a:t>ngắn</a:t>
+            </a:r>
+            <a:r>
+              <a:rPr lang="en-US" sz="2800" dirty="0">
+                <a:solidFill>
+                  <a:srgbClr val="000000"/>
+                </a:solidFill>
+                <a:latin typeface="+mj-lt"/>
+              </a:rPr>
+              <a:t> </a:t>
+            </a:r>
+            <a:r>
+              <a:rPr lang="en-US" sz="2800" dirty="0" err="1">
+                <a:solidFill>
+                  <a:srgbClr val="000000"/>
+                </a:solidFill>
+                <a:latin typeface="+mj-lt"/>
+              </a:rPr>
+              <a:t>gọn</a:t>
+            </a:r>
+            <a:r>
+              <a:rPr lang="en-US" sz="2800" dirty="0">
+                <a:solidFill>
+                  <a:srgbClr val="000000"/>
+                </a:solidFill>
+                <a:latin typeface="+mj-lt"/>
+              </a:rPr>
+              <a:t> </a:t>
+            </a:r>
+            <a:r>
+              <a:rPr lang="en-US" sz="2800" dirty="0" err="1">
+                <a:solidFill>
+                  <a:srgbClr val="000000"/>
+                </a:solidFill>
+                <a:latin typeface="+mj-lt"/>
+              </a:rPr>
+              <a:t>một</a:t>
+            </a:r>
+            <a:r>
+              <a:rPr lang="en-US" sz="2800" dirty="0">
+                <a:solidFill>
+                  <a:srgbClr val="000000"/>
+                </a:solidFill>
+                <a:latin typeface="+mj-lt"/>
+              </a:rPr>
+              <a:t> </a:t>
+            </a:r>
+            <a:r>
+              <a:rPr lang="en-US" sz="2800" dirty="0" err="1">
+                <a:solidFill>
+                  <a:srgbClr val="000000"/>
+                </a:solidFill>
+                <a:latin typeface="+mj-lt"/>
+              </a:rPr>
+              <a:t>hàm</a:t>
+            </a:r>
+            <a:r>
+              <a:rPr lang="en-US" sz="2800" dirty="0">
+                <a:solidFill>
+                  <a:srgbClr val="000000"/>
+                </a:solidFill>
+                <a:latin typeface="+mj-lt"/>
+              </a:rPr>
+              <a:t>)</a:t>
+            </a:r>
+            <a:endParaRPr lang="en-US" sz="2800" dirty="0">
+              <a:latin typeface="+mj-lt"/>
+            </a:endParaRPr>
+          </a:p>
+        </p:txBody>
+      </p:sp>
+    </p:spTree>
+    <p:extLst>
+      <p:ext uri="{BB962C8B-B14F-4D97-AF65-F5344CB8AC3E}">
+        <p14:creationId xmlns:p14="http://schemas.microsoft.com/office/powerpoint/2010/main" val="2703959338"/>
+      </p:ext>
+    </p:extLst>
+  </p:cSld>
+  <p:clrMapOvr>
+    <a:masterClrMapping/>
+  </p:clrMapOvr>
+</p:sld>
+</file>
+
+<file path=ppt/slides/slide5.xml><?xml version="1.0" encoding="utf-8"?>
+<p:sld xmlns:a="http://schemas.openxmlformats.org/drawingml/2006/main" xmlns:r="http://schemas.openxmlformats.org/officeDocument/2006/relationships" xmlns:p="http://schemas.openxmlformats.org/presentationml/2006/main">
+  <p:cSld>
+    <p:spTree>
+      <p:nvGrpSpPr>
+        <p:cNvPr id="1" name=""/>
+        <p:cNvGrpSpPr/>
+        <p:nvPr/>
+      </p:nvGrpSpPr>
+      <p:grpSpPr>
+        <a:xfrm>
+          <a:off x="0" y="0"/>
+          <a:ext cx="0" cy="0"/>
+          <a:chOff x="0" y="0"/>
+          <a:chExt cx="0" cy="0"/>
+        </a:xfrm>
+      </p:grpSpPr>
+      <p:sp>
+        <p:nvSpPr>
+          <p:cNvPr id="2" name="Text 0"/>
+          <p:cNvSpPr/>
+          <p:nvPr/>
+        </p:nvSpPr>
+        <p:spPr>
+          <a:xfrm>
+            <a:off x="163923" y="404664"/>
+            <a:ext cx="8915400" cy="627698"/>
+          </a:xfrm>
+          <a:prstGeom prst="rect">
+            <a:avLst/>
+          </a:prstGeom>
+          <a:noFill/>
+          <a:ln/>
+        </p:spPr>
+        <p:txBody>
+          <a:bodyPr wrap="square" rtlCol="0" anchor="ctr"/>
+          <a:lstStyle/>
+          <a:p>
+            <a:r>
+              <a:rPr lang="en-US" sz="3200" dirty="0">
+                <a:solidFill>
+                  <a:srgbClr val="1F4E79"/>
+                </a:solidFill>
+                <a:latin typeface="+mj-lt"/>
+              </a:rPr>
+              <a:t>OOP </a:t>
+            </a:r>
+            <a:r>
+              <a:rPr lang="en-US" sz="3200" dirty="0" err="1">
+                <a:solidFill>
+                  <a:srgbClr val="1F4E79"/>
+                </a:solidFill>
+                <a:latin typeface="+mj-lt"/>
+              </a:rPr>
+              <a:t>và</a:t>
+            </a:r>
+            <a:r>
+              <a:rPr lang="en-US" sz="3200" dirty="0">
+                <a:solidFill>
+                  <a:srgbClr val="1F4E79"/>
+                </a:solidFill>
+                <a:latin typeface="+mj-lt"/>
+              </a:rPr>
+              <a:t> FP</a:t>
+            </a:r>
+            <a:endParaRPr lang="en-US" sz="3200" dirty="0">
+              <a:latin typeface="+mj-lt"/>
+            </a:endParaRPr>
+          </a:p>
+        </p:txBody>
+      </p:sp>
+      <p:sp>
+        <p:nvSpPr>
+          <p:cNvPr id="3" name="Text 1"/>
+          <p:cNvSpPr/>
+          <p:nvPr/>
+        </p:nvSpPr>
+        <p:spPr>
+          <a:xfrm>
+            <a:off x="382037" y="1398006"/>
+            <a:ext cx="8848725" cy="2057400"/>
+          </a:xfrm>
+          <a:prstGeom prst="rect">
+            <a:avLst/>
+          </a:prstGeom>
+          <a:noFill/>
+          <a:ln/>
+        </p:spPr>
+        <p:txBody>
+          <a:bodyPr wrap="square" rtlCol="0" anchor="ctr"/>
+          <a:lstStyle/>
+          <a:p>
+            <a:pPr marL="457200" indent="-457200" algn="just">
+              <a:buFont typeface="Arial" panose="020B0604020202020204" pitchFamily="34" charset="0"/>
+              <a:buChar char="•"/>
+            </a:pPr>
+            <a:r>
+              <a:rPr lang="en-US" sz="2800" dirty="0">
+                <a:latin typeface="+mj-lt"/>
+              </a:rPr>
+              <a:t>OOP quản lý trạng thái và mô hình </a:t>
+            </a:r>
+            <a:r>
+              <a:rPr lang="en-US" sz="2800" dirty="0" err="1">
+                <a:latin typeface="+mj-lt"/>
+              </a:rPr>
+              <a:t>nghiệp</a:t>
+            </a:r>
+            <a:r>
+              <a:rPr lang="en-US" sz="2800" dirty="0">
+                <a:latin typeface="+mj-lt"/>
+              </a:rPr>
+              <a:t> </a:t>
+            </a:r>
+            <a:r>
+              <a:rPr lang="en-US" sz="2800" dirty="0" err="1">
+                <a:latin typeface="+mj-lt"/>
+              </a:rPr>
+              <a:t>vụ</a:t>
+            </a:r>
+            <a:endParaRPr lang="en-US" sz="2800" dirty="0">
+              <a:latin typeface="+mj-lt"/>
+            </a:endParaRPr>
+          </a:p>
+          <a:p>
+            <a:pPr marL="457200" indent="-457200" algn="just">
+              <a:buFont typeface="Arial" panose="020B0604020202020204" pitchFamily="34" charset="0"/>
+              <a:buChar char="•"/>
+            </a:pPr>
+            <a:endParaRPr lang="en-US" sz="2800" dirty="0">
+              <a:latin typeface="+mj-lt"/>
+            </a:endParaRPr>
+          </a:p>
+          <a:p>
+            <a:pPr marL="457200" indent="-457200" algn="just">
+              <a:buFont typeface="Arial" panose="020B0604020202020204" pitchFamily="34" charset="0"/>
+              <a:buChar char="•"/>
+            </a:pPr>
+            <a:r>
+              <a:rPr lang="en-US" sz="2800" dirty="0">
+                <a:latin typeface="+mj-lt"/>
+              </a:rPr>
+              <a:t>FP tối ưu cách xử lý </a:t>
+            </a:r>
+            <a:r>
+              <a:rPr lang="en-US" sz="2800" dirty="0" err="1">
+                <a:latin typeface="+mj-lt"/>
+              </a:rPr>
+              <a:t>dữ</a:t>
+            </a:r>
+            <a:r>
+              <a:rPr lang="en-US" sz="2800" dirty="0">
+                <a:latin typeface="+mj-lt"/>
+              </a:rPr>
+              <a:t> </a:t>
+            </a:r>
+            <a:r>
+              <a:rPr lang="en-US" sz="2800" dirty="0" err="1">
+                <a:latin typeface="+mj-lt"/>
+              </a:rPr>
+              <a:t>liệu</a:t>
+            </a:r>
+            <a:endParaRPr lang="en-US" sz="2800" dirty="0">
+              <a:latin typeface="+mj-lt"/>
+            </a:endParaRPr>
+          </a:p>
+          <a:p>
+            <a:pPr marL="457200" indent="-457200" algn="just">
+              <a:buFont typeface="Arial" panose="020B0604020202020204" pitchFamily="34" charset="0"/>
+              <a:buChar char="•"/>
+            </a:pPr>
+            <a:endParaRPr lang="en-US" sz="2800" dirty="0">
+              <a:latin typeface="+mj-lt"/>
+            </a:endParaRPr>
+          </a:p>
+          <a:p>
+            <a:pPr marL="457200" indent="-457200" algn="just">
+              <a:buFont typeface="Arial" panose="020B0604020202020204" pitchFamily="34" charset="0"/>
+              <a:buChar char="•"/>
+            </a:pPr>
+            <a:r>
+              <a:rPr lang="en-US" sz="2800" dirty="0">
+                <a:latin typeface="+mj-lt"/>
+              </a:rPr>
+              <a:t>Java hiện đại = OOP + FP</a:t>
+            </a:r>
+          </a:p>
+        </p:txBody>
+      </p:sp>
+      <p:sp>
+        <p:nvSpPr>
+          <p:cNvPr id="6" name="Content Placeholder 5">
+            <a:extLst>
+              <a:ext uri="{FF2B5EF4-FFF2-40B4-BE49-F238E27FC236}">
+                <a16:creationId xmlns:a16="http://schemas.microsoft.com/office/drawing/2014/main" id="{606E4519-B350-25BB-401E-B2D423AEA47C}"/>
+              </a:ext>
+            </a:extLst>
+          </p:cNvPr>
+          <p:cNvSpPr>
+            <a:spLocks noGrp="1"/>
+          </p:cNvSpPr>
+          <p:nvPr>
+            <p:ph idx="1"/>
+          </p:nvPr>
+        </p:nvSpPr>
+        <p:spPr/>
+        <p:txBody>
+          <a:bodyPr/>
+          <a:lstStyle/>
+          <a:p>
+            <a:endParaRPr lang="ja-JP" altLang="en-US" dirty="0"/>
+          </a:p>
+        </p:txBody>
+      </p:sp>
+    </p:spTree>
+    <p:extLst>
+      <p:ext uri="{BB962C8B-B14F-4D97-AF65-F5344CB8AC3E}">
+        <p14:creationId xmlns:p14="http://schemas.microsoft.com/office/powerpoint/2010/main" val="223843895"/>
+      </p:ext>
+    </p:extLst>
+  </p:cSld>
+  <p:clrMapOvr>
+    <a:masterClrMapping/>
+  </p:clrMapOvr>
+</p:sld>
+</file>
+
+<file path=ppt/slides/slide6.xml><?xml version="1.0" encoding="utf-8"?>
 <p:sld xmlns:a="http://schemas.openxmlformats.org/drawingml/2006/main" xmlns:r="http://schemas.openxmlformats.org/officeDocument/2006/relationships" xmlns:p="http://schemas.openxmlformats.org/presentationml/2006/main">
   <p:cSld>
     <p:spTree>
@@ -8700,7 +12050,7 @@
               <a:pPr>
                 <a:defRPr/>
               </a:pPr>
-              <a:t>2</a:t>
+              <a:t>6</a:t>
             </a:fld>
             <a:endParaRPr lang="en-US" altLang="ja-JP"/>
           </a:p>
@@ -8719,7 +12069,7 @@
 </p:sld>
 </file>
 
-<file path=ppt/slides/slide3.xml><?xml version="1.0" encoding="utf-8"?>
+<file path=ppt/slides/slide7.xml><?xml version="1.0" encoding="utf-8"?>
 <p:sld xmlns:a="http://schemas.openxmlformats.org/drawingml/2006/main" xmlns:r="http://schemas.openxmlformats.org/officeDocument/2006/relationships" xmlns:p="http://schemas.openxmlformats.org/presentationml/2006/main">
   <p:cSld>
     <p:spTree>
@@ -8900,7 +12250,7 @@
               <a:pPr>
                 <a:defRPr/>
               </a:pPr>
-              <a:t>3</a:t>
+              <a:t>7</a:t>
             </a:fld>
             <a:endParaRPr lang="en-US" altLang="ja-JP"/>
           </a:p>
@@ -8919,7 +12269,7 @@
 </p:sld>
 </file>
 
-<file path=ppt/slides/slide4.xml><?xml version="1.0" encoding="utf-8"?>
+<file path=ppt/slides/slide8.xml><?xml version="1.0" encoding="utf-8"?>
 <p:sld xmlns:a="http://schemas.openxmlformats.org/drawingml/2006/main" xmlns:r="http://schemas.openxmlformats.org/officeDocument/2006/relationships" xmlns:p="http://schemas.openxmlformats.org/presentationml/2006/main">
   <p:cSld>
     <p:spTree>
@@ -9503,7 +12853,7 @@
               <a:pPr>
                 <a:defRPr/>
               </a:pPr>
-              <a:t>4</a:t>
+              <a:t>8</a:t>
             </a:fld>
             <a:endParaRPr lang="en-US" altLang="ja-JP"/>
           </a:p>
@@ -9522,7 +12872,7 @@
 </p:sld>
 </file>
 
-<file path=ppt/slides/slide5.xml><?xml version="1.0" encoding="utf-8"?>
+<file path=ppt/slides/slide9.xml><?xml version="1.0" encoding="utf-8"?>
 <p:sld xmlns:a="http://schemas.openxmlformats.org/drawingml/2006/main" xmlns:r="http://schemas.openxmlformats.org/officeDocument/2006/relationships" xmlns:p="http://schemas.openxmlformats.org/presentationml/2006/main">
   <p:cSld>
     <p:spTree>
@@ -10004,7 +13354,7 @@
               <a:pPr>
                 <a:defRPr/>
               </a:pPr>
-              <a:t>5</a:t>
+              <a:t>9</a:t>
             </a:fld>
             <a:endParaRPr lang="en-US" altLang="ja-JP"/>
           </a:p>
@@ -10014,1427 +13364,6 @@
     <p:extLst>
       <p:ext uri="{BB962C8B-B14F-4D97-AF65-F5344CB8AC3E}">
         <p14:creationId xmlns:p14="http://schemas.microsoft.com/office/powerpoint/2010/main" val="4262306147"/>
-      </p:ext>
-    </p:extLst>
-  </p:cSld>
-  <p:clrMapOvr>
-    <a:masterClrMapping/>
-  </p:clrMapOvr>
-</p:sld>
-</file>
-
-<file path=ppt/slides/slide6.xml><?xml version="1.0" encoding="utf-8"?>
-<p:sld xmlns:a="http://schemas.openxmlformats.org/drawingml/2006/main" xmlns:r="http://schemas.openxmlformats.org/officeDocument/2006/relationships" xmlns:p="http://schemas.openxmlformats.org/presentationml/2006/main">
-  <p:cSld>
-    <p:spTree>
-      <p:nvGrpSpPr>
-        <p:cNvPr id="1" name=""/>
-        <p:cNvGrpSpPr/>
-        <p:nvPr/>
-      </p:nvGrpSpPr>
-      <p:grpSpPr>
-        <a:xfrm>
-          <a:off x="0" y="0"/>
-          <a:ext cx="0" cy="0"/>
-          <a:chOff x="0" y="0"/>
-          <a:chExt cx="0" cy="0"/>
-        </a:xfrm>
-      </p:grpSpPr>
-      <p:sp>
-        <p:nvSpPr>
-          <p:cNvPr id="2" name="Title 1">
-            <a:extLst>
-              <a:ext uri="{FF2B5EF4-FFF2-40B4-BE49-F238E27FC236}">
-                <a16:creationId xmlns:a16="http://schemas.microsoft.com/office/drawing/2014/main" id="{80E151F3-AF55-B341-D706-F3866DA32372}"/>
-              </a:ext>
-            </a:extLst>
-          </p:cNvPr>
-          <p:cNvSpPr>
-            <a:spLocks noGrp="1"/>
-          </p:cNvSpPr>
-          <p:nvPr>
-            <p:ph type="title"/>
-          </p:nvPr>
-        </p:nvSpPr>
-        <p:spPr/>
-        <p:txBody>
-          <a:bodyPr>
-            <a:noAutofit/>
-          </a:bodyPr>
-          <a:lstStyle/>
-          <a:p>
-            <a:r>
-              <a:rPr kumimoji="1" lang="en-US" altLang="ja-JP" sz="4000" dirty="0"/>
-              <a:t>So </a:t>
-            </a:r>
-            <a:r>
-              <a:rPr kumimoji="1" lang="en-US" altLang="ja-JP" sz="4000" dirty="0" err="1"/>
-              <a:t>sánh</a:t>
-            </a:r>
-            <a:r>
-              <a:rPr kumimoji="1" lang="en-US" altLang="ja-JP" sz="4000" dirty="0"/>
-              <a:t> </a:t>
-            </a:r>
-            <a:r>
-              <a:rPr kumimoji="1" lang="en-US" altLang="ja-JP" sz="4000" dirty="0" err="1"/>
-              <a:t>phong</a:t>
-            </a:r>
-            <a:r>
-              <a:rPr kumimoji="1" lang="en-US" altLang="ja-JP" sz="4000" dirty="0"/>
-              <a:t> </a:t>
-            </a:r>
-            <a:r>
-              <a:rPr kumimoji="1" lang="en-US" altLang="ja-JP" sz="4000" dirty="0" err="1"/>
-              <a:t>cách</a:t>
-            </a:r>
-            <a:r>
-              <a:rPr kumimoji="1" lang="en-US" altLang="ja-JP" sz="4000" dirty="0"/>
-              <a:t> </a:t>
-            </a:r>
-            <a:r>
-              <a:rPr kumimoji="1" lang="en-US" altLang="ja-JP" sz="4000" dirty="0" err="1"/>
-              <a:t>lập</a:t>
-            </a:r>
-            <a:r>
-              <a:rPr kumimoji="1" lang="en-US" altLang="ja-JP" sz="4000" dirty="0"/>
-              <a:t> </a:t>
-            </a:r>
-            <a:r>
-              <a:rPr kumimoji="1" lang="en-US" altLang="ja-JP" sz="4000" dirty="0" err="1"/>
-              <a:t>trình</a:t>
-            </a:r>
-            <a:endParaRPr kumimoji="1" lang="ja-JP" altLang="en-US" sz="4000" dirty="0"/>
-          </a:p>
-        </p:txBody>
-      </p:sp>
-      <p:graphicFrame>
-        <p:nvGraphicFramePr>
-          <p:cNvPr id="5" name="Content Placeholder 4">
-            <a:extLst>
-              <a:ext uri="{FF2B5EF4-FFF2-40B4-BE49-F238E27FC236}">
-                <a16:creationId xmlns:a16="http://schemas.microsoft.com/office/drawing/2014/main" id="{73F46A97-CCDC-DAD5-29D5-81885FFEC3D1}"/>
-              </a:ext>
-            </a:extLst>
-          </p:cNvPr>
-          <p:cNvGraphicFramePr>
-            <a:graphicFrameLocks noGrp="1"/>
-          </p:cNvGraphicFramePr>
-          <p:nvPr>
-            <p:ph idx="1"/>
-            <p:extLst>
-              <p:ext uri="{D42A27DB-BD31-4B8C-83A1-F6EECF244321}">
-                <p14:modId xmlns:p14="http://schemas.microsoft.com/office/powerpoint/2010/main" val="13757083"/>
-              </p:ext>
-            </p:extLst>
-          </p:nvPr>
-        </p:nvGraphicFramePr>
-        <p:xfrm>
-          <a:off x="128588" y="1447800"/>
-          <a:ext cx="9648824" cy="4649650"/>
-        </p:xfrm>
-        <a:graphic>
-          <a:graphicData uri="http://schemas.openxmlformats.org/drawingml/2006/table">
-            <a:tbl>
-              <a:tblPr>
-                <a:tableStyleId>{5C22544A-7EE6-4342-B048-85BDC9FD1C3A}</a:tableStyleId>
-              </a:tblPr>
-              <a:tblGrid>
-                <a:gridCol w="4824412">
-                  <a:extLst>
-                    <a:ext uri="{9D8B030D-6E8A-4147-A177-3AD203B41FA5}">
-                      <a16:colId xmlns:a16="http://schemas.microsoft.com/office/drawing/2014/main" val="1500319441"/>
-                    </a:ext>
-                  </a:extLst>
-                </a:gridCol>
-                <a:gridCol w="4824412">
-                  <a:extLst>
-                    <a:ext uri="{9D8B030D-6E8A-4147-A177-3AD203B41FA5}">
-                      <a16:colId xmlns:a16="http://schemas.microsoft.com/office/drawing/2014/main" val="4046171375"/>
-                    </a:ext>
-                  </a:extLst>
-                </a:gridCol>
-              </a:tblGrid>
-              <a:tr h="665959">
-                <a:tc>
-                  <a:txBody>
-                    <a:bodyPr/>
-                    <a:lstStyle/>
-                    <a:p>
-                      <a:pPr>
-                        <a:buNone/>
-                      </a:pPr>
-                      <a:r>
-                        <a:rPr lang="ja-JP" sz="2800">
-                          <a:effectLst/>
-                        </a:rPr>
-                        <a:t>Imperative</a:t>
-                      </a:r>
-                    </a:p>
-                  </a:txBody>
-                  <a:tcPr marL="90458" marR="90458" marT="45229" marB="45229" anchor="ctr"/>
-                </a:tc>
-                <a:tc>
-                  <a:txBody>
-                    <a:bodyPr/>
-                    <a:lstStyle/>
-                    <a:p>
-                      <a:pPr>
-                        <a:buNone/>
-                      </a:pPr>
-                      <a:r>
-                        <a:rPr lang="ja-JP" sz="2800" dirty="0">
-                          <a:effectLst/>
-                        </a:rPr>
-                        <a:t>Declarative</a:t>
-                      </a:r>
-                    </a:p>
-                  </a:txBody>
-                  <a:tcPr marL="90458" marR="90458" marT="45229" marB="45229" anchor="ctr"/>
-                </a:tc>
-                <a:extLst>
-                  <a:ext uri="{0D108BD9-81ED-4DB2-BD59-A6C34878D82A}">
-                    <a16:rowId xmlns:a16="http://schemas.microsoft.com/office/drawing/2014/main" val="3236088624"/>
-                  </a:ext>
-                </a:extLst>
-              </a:tr>
-              <a:tr h="665959">
-                <a:tc>
-                  <a:txBody>
-                    <a:bodyPr/>
-                    <a:lstStyle/>
-                    <a:p>
-                      <a:pPr>
-                        <a:buNone/>
-                      </a:pPr>
-                      <a:r>
-                        <a:rPr lang="ja-JP" sz="2800">
-                          <a:effectLst/>
-                        </a:rPr>
-                        <a:t>Mô tả cách làm</a:t>
-                      </a:r>
-                    </a:p>
-                  </a:txBody>
-                  <a:tcPr marL="90458" marR="90458" marT="45229" marB="45229" anchor="ctr"/>
-                </a:tc>
-                <a:tc>
-                  <a:txBody>
-                    <a:bodyPr/>
-                    <a:lstStyle/>
-                    <a:p>
-                      <a:pPr>
-                        <a:buNone/>
-                      </a:pPr>
-                      <a:r>
-                        <a:rPr lang="ja-JP" sz="2800">
-                          <a:effectLst/>
-                        </a:rPr>
-                        <a:t>Mô tả kết quả</a:t>
-                      </a:r>
-                    </a:p>
-                  </a:txBody>
-                  <a:tcPr marL="90458" marR="90458" marT="45229" marB="45229" anchor="ctr"/>
-                </a:tc>
-                <a:extLst>
-                  <a:ext uri="{0D108BD9-81ED-4DB2-BD59-A6C34878D82A}">
-                    <a16:rowId xmlns:a16="http://schemas.microsoft.com/office/drawing/2014/main" val="87048020"/>
-                  </a:ext>
-                </a:extLst>
-              </a:tr>
-              <a:tr h="665959">
-                <a:tc>
-                  <a:txBody>
-                    <a:bodyPr/>
-                    <a:lstStyle/>
-                    <a:p>
-                      <a:pPr>
-                        <a:buNone/>
-                      </a:pPr>
-                      <a:r>
-                        <a:rPr lang="ja-JP" sz="2800" dirty="0">
-                          <a:effectLst/>
-                        </a:rPr>
-                        <a:t>Tập trung vào "How"</a:t>
-                      </a:r>
-                    </a:p>
-                  </a:txBody>
-                  <a:tcPr marL="90458" marR="90458" marT="45229" marB="45229" anchor="ctr"/>
-                </a:tc>
-                <a:tc>
-                  <a:txBody>
-                    <a:bodyPr/>
-                    <a:lstStyle/>
-                    <a:p>
-                      <a:pPr>
-                        <a:buNone/>
-                      </a:pPr>
-                      <a:r>
-                        <a:rPr lang="ja-JP" sz="2800">
-                          <a:effectLst/>
-                        </a:rPr>
-                        <a:t>Tập trung vào "What"</a:t>
-                      </a:r>
-                    </a:p>
-                  </a:txBody>
-                  <a:tcPr marL="90458" marR="90458" marT="45229" marB="45229" anchor="ctr"/>
-                </a:tc>
-                <a:extLst>
-                  <a:ext uri="{0D108BD9-81ED-4DB2-BD59-A6C34878D82A}">
-                    <a16:rowId xmlns:a16="http://schemas.microsoft.com/office/drawing/2014/main" val="2165300534"/>
-                  </a:ext>
-                </a:extLst>
-              </a:tr>
-              <a:tr h="1215437">
-                <a:tc>
-                  <a:txBody>
-                    <a:bodyPr/>
-                    <a:lstStyle/>
-                    <a:p>
-                      <a:pPr>
-                        <a:buNone/>
-                      </a:pPr>
-                      <a:r>
-                        <a:rPr lang="ja-JP" sz="2800">
-                          <a:effectLst/>
-                        </a:rPr>
-                        <a:t>Dùng vòng lặp, biến trạng thái</a:t>
-                      </a:r>
-                    </a:p>
-                  </a:txBody>
-                  <a:tcPr marL="90458" marR="90458" marT="45229" marB="45229" anchor="ctr"/>
-                </a:tc>
-                <a:tc>
-                  <a:txBody>
-                    <a:bodyPr/>
-                    <a:lstStyle/>
-                    <a:p>
-                      <a:pPr>
-                        <a:buNone/>
-                      </a:pPr>
-                      <a:r>
-                        <a:rPr lang="ja-JP" sz="2800" dirty="0">
-                          <a:effectLst/>
-                        </a:rPr>
-                        <a:t>Dùng biểu thức, pipeline</a:t>
-                      </a:r>
-                    </a:p>
-                  </a:txBody>
-                  <a:tcPr marL="90458" marR="90458" marT="45229" marB="45229" anchor="ctr"/>
-                </a:tc>
-                <a:extLst>
-                  <a:ext uri="{0D108BD9-81ED-4DB2-BD59-A6C34878D82A}">
-                    <a16:rowId xmlns:a16="http://schemas.microsoft.com/office/drawing/2014/main" val="2378857263"/>
-                  </a:ext>
-                </a:extLst>
-              </a:tr>
-              <a:tr h="665959">
-                <a:tc>
-                  <a:txBody>
-                    <a:bodyPr/>
-                    <a:lstStyle/>
-                    <a:p>
-                      <a:pPr>
-                        <a:buNone/>
-                      </a:pPr>
-                      <a:r>
-                        <a:rPr lang="ja-JP" sz="2800">
-                          <a:effectLst/>
-                        </a:rPr>
-                        <a:t>Kiểm soát chi tiết</a:t>
-                      </a:r>
-                    </a:p>
-                  </a:txBody>
-                  <a:tcPr marL="90458" marR="90458" marT="45229" marB="45229" anchor="ctr"/>
-                </a:tc>
-                <a:tc>
-                  <a:txBody>
-                    <a:bodyPr/>
-                    <a:lstStyle/>
-                    <a:p>
-                      <a:pPr>
-                        <a:buNone/>
-                      </a:pPr>
-                      <a:r>
-                        <a:rPr lang="ja-JP" sz="2800">
-                          <a:effectLst/>
-                        </a:rPr>
-                        <a:t>Trừu tượng cao</a:t>
-                      </a:r>
-                    </a:p>
-                  </a:txBody>
-                  <a:tcPr marL="90458" marR="90458" marT="45229" marB="45229" anchor="ctr"/>
-                </a:tc>
-                <a:extLst>
-                  <a:ext uri="{0D108BD9-81ED-4DB2-BD59-A6C34878D82A}">
-                    <a16:rowId xmlns:a16="http://schemas.microsoft.com/office/drawing/2014/main" val="2971337053"/>
-                  </a:ext>
-                </a:extLst>
-              </a:tr>
-              <a:tr h="770377">
-                <a:tc>
-                  <a:txBody>
-                    <a:bodyPr/>
-                    <a:lstStyle/>
-                    <a:p>
-                      <a:pPr>
-                        <a:buNone/>
-                      </a:pPr>
-                      <a:r>
-                        <a:rPr lang="ja-JP" sz="2800">
-                          <a:effectLst/>
-                        </a:rPr>
-                        <a:t>Code thường dài hơn</a:t>
-                      </a:r>
-                    </a:p>
-                  </a:txBody>
-                  <a:tcPr marL="90458" marR="90458" marT="45229" marB="45229" anchor="ctr"/>
-                </a:tc>
-                <a:tc>
-                  <a:txBody>
-                    <a:bodyPr/>
-                    <a:lstStyle/>
-                    <a:p>
-                      <a:pPr fontAlgn="t">
-                        <a:lnSpc>
-                          <a:spcPct val="119048"/>
-                        </a:lnSpc>
-                        <a:buNone/>
-                      </a:pPr>
-                      <a:r>
-                        <a:rPr lang="ja-JP" sz="2800" dirty="0">
-                          <a:effectLst/>
-                        </a:rPr>
-                        <a:t>Code thường ngắn gọn hơn</a:t>
-                      </a:r>
-                      <a:endParaRPr lang="ja-JP" sz="1200" b="0" i="0" dirty="0">
-                        <a:effectLst/>
-                        <a:latin typeface="Segoe UI" panose="020B0502040204020203" pitchFamily="34" charset="0"/>
-                      </a:endParaRPr>
-                    </a:p>
-                  </a:txBody>
-                  <a:tcPr marL="90458" marR="90458" marT="45229" marB="45229" anchor="ctr"/>
-                </a:tc>
-                <a:extLst>
-                  <a:ext uri="{0D108BD9-81ED-4DB2-BD59-A6C34878D82A}">
-                    <a16:rowId xmlns:a16="http://schemas.microsoft.com/office/drawing/2014/main" val="3972626888"/>
-                  </a:ext>
-                </a:extLst>
-              </a:tr>
-            </a:tbl>
-          </a:graphicData>
-        </a:graphic>
-      </p:graphicFrame>
-      <p:sp>
-        <p:nvSpPr>
-          <p:cNvPr id="4" name="Slide Number Placeholder 3">
-            <a:extLst>
-              <a:ext uri="{FF2B5EF4-FFF2-40B4-BE49-F238E27FC236}">
-                <a16:creationId xmlns:a16="http://schemas.microsoft.com/office/drawing/2014/main" id="{890183B7-5A29-B9FA-9867-553F77D67520}"/>
-              </a:ext>
-            </a:extLst>
-          </p:cNvPr>
-          <p:cNvSpPr>
-            <a:spLocks noGrp="1"/>
-          </p:cNvSpPr>
-          <p:nvPr>
-            <p:ph type="sldNum" sz="quarter" idx="11"/>
-          </p:nvPr>
-        </p:nvSpPr>
-        <p:spPr/>
-        <p:txBody>
-          <a:bodyPr/>
-          <a:lstStyle/>
-          <a:p>
-            <a:pPr>
-              <a:defRPr/>
-            </a:pPr>
-            <a:r>
-              <a:rPr lang="en-US" altLang="ja-JP"/>
-              <a:t>Page:</a:t>
-            </a:r>
-            <a:r>
-              <a:rPr lang="ja-JP" altLang="en-US"/>
-              <a:t> </a:t>
-            </a:r>
-            <a:fld id="{DC07468E-517B-4E9D-8840-A4568A307980}" type="slidenum">
-              <a:rPr lang="en-US" altLang="ja-JP" smtClean="0"/>
-              <a:pPr>
-                <a:defRPr/>
-              </a:pPr>
-              <a:t>6</a:t>
-            </a:fld>
-            <a:endParaRPr lang="en-US" altLang="ja-JP"/>
-          </a:p>
-        </p:txBody>
-      </p:sp>
-    </p:spTree>
-    <p:extLst>
-      <p:ext uri="{BB962C8B-B14F-4D97-AF65-F5344CB8AC3E}">
-        <p14:creationId xmlns:p14="http://schemas.microsoft.com/office/powerpoint/2010/main" val="3445657805"/>
-      </p:ext>
-    </p:extLst>
-  </p:cSld>
-  <p:clrMapOvr>
-    <a:masterClrMapping/>
-  </p:clrMapOvr>
-</p:sld>
-</file>
-
-<file path=ppt/slides/slide7.xml><?xml version="1.0" encoding="utf-8"?>
-<p:sld xmlns:a="http://schemas.openxmlformats.org/drawingml/2006/main" xmlns:r="http://schemas.openxmlformats.org/officeDocument/2006/relationships" xmlns:p="http://schemas.openxmlformats.org/presentationml/2006/main">
-  <p:cSld>
-    <p:spTree>
-      <p:nvGrpSpPr>
-        <p:cNvPr id="1" name=""/>
-        <p:cNvGrpSpPr/>
-        <p:nvPr/>
-      </p:nvGrpSpPr>
-      <p:grpSpPr>
-        <a:xfrm>
-          <a:off x="0" y="0"/>
-          <a:ext cx="0" cy="0"/>
-          <a:chOff x="0" y="0"/>
-          <a:chExt cx="0" cy="0"/>
-        </a:xfrm>
-      </p:grpSpPr>
-      <p:sp>
-        <p:nvSpPr>
-          <p:cNvPr id="2" name="Title 1">
-            <a:extLst>
-              <a:ext uri="{FF2B5EF4-FFF2-40B4-BE49-F238E27FC236}">
-                <a16:creationId xmlns:a16="http://schemas.microsoft.com/office/drawing/2014/main" id="{14AA90DC-076A-E9E6-69E1-7EA02A5E4161}"/>
-              </a:ext>
-            </a:extLst>
-          </p:cNvPr>
-          <p:cNvSpPr>
-            <a:spLocks noGrp="1"/>
-          </p:cNvSpPr>
-          <p:nvPr>
-            <p:ph type="title"/>
-          </p:nvPr>
-        </p:nvSpPr>
-        <p:spPr/>
-        <p:txBody>
-          <a:bodyPr>
-            <a:normAutofit fontScale="90000"/>
-          </a:bodyPr>
-          <a:lstStyle/>
-          <a:p>
-            <a:r>
-              <a:rPr lang="ja-JP" altLang="ja-JP" b="1" dirty="0"/>
-              <a:t>Trong thực tế Java</a:t>
-            </a:r>
-            <a:endParaRPr kumimoji="1" lang="ja-JP" altLang="en-US" dirty="0"/>
-          </a:p>
-        </p:txBody>
-      </p:sp>
-      <p:sp>
-        <p:nvSpPr>
-          <p:cNvPr id="3" name="Content Placeholder 2">
-            <a:extLst>
-              <a:ext uri="{FF2B5EF4-FFF2-40B4-BE49-F238E27FC236}">
-                <a16:creationId xmlns:a16="http://schemas.microsoft.com/office/drawing/2014/main" id="{8ECD80A5-39B0-0CAE-4EA8-7C30EE8C5FDC}"/>
-              </a:ext>
-            </a:extLst>
-          </p:cNvPr>
-          <p:cNvSpPr>
-            <a:spLocks noGrp="1"/>
-          </p:cNvSpPr>
-          <p:nvPr>
-            <p:ph idx="1"/>
-          </p:nvPr>
-        </p:nvSpPr>
-        <p:spPr/>
-        <p:txBody>
-          <a:bodyPr>
-            <a:normAutofit/>
-          </a:bodyPr>
-          <a:lstStyle/>
-          <a:p>
-            <a:pPr algn="just" fontAlgn="t">
-              <a:lnSpc>
-                <a:spcPct val="100000"/>
-              </a:lnSpc>
-              <a:buNone/>
-            </a:pPr>
-            <a:r>
-              <a:rPr lang="ja-JP" altLang="ja-JP" dirty="0"/>
-              <a:t>Lập trình Java thường là </a:t>
-            </a:r>
-            <a:r>
-              <a:rPr lang="ja-JP" altLang="ja-JP" b="1" dirty="0"/>
-              <a:t>kết hợp cả hai</a:t>
-            </a:r>
-            <a:r>
-              <a:rPr lang="ja-JP" altLang="ja-JP" dirty="0"/>
-              <a:t>:</a:t>
-            </a:r>
-          </a:p>
-          <a:p>
-            <a:pPr lvl="0" algn="just" fontAlgn="t">
-              <a:buFont typeface="Arial" panose="020B0604020202020204" pitchFamily="34" charset="0"/>
-              <a:buChar char="•"/>
-            </a:pPr>
-            <a:r>
-              <a:rPr lang="ja-JP" altLang="ja-JP" dirty="0"/>
-              <a:t>Xử lý nghiệp vụ đơn giản</a:t>
-            </a:r>
-            <a:r>
-              <a:rPr lang="en-US" altLang="ja-JP" dirty="0"/>
-              <a:t> </a:t>
-            </a:r>
-            <a:r>
-              <a:rPr lang="ja-JP" altLang="ja-JP" dirty="0"/>
-              <a:t>→ </a:t>
-            </a:r>
-            <a:r>
-              <a:rPr lang="ja-JP" altLang="ja-JP" b="1" dirty="0"/>
-              <a:t>Declarative</a:t>
-            </a:r>
-            <a:endParaRPr lang="ja-JP" altLang="ja-JP" dirty="0"/>
-          </a:p>
-          <a:p>
-            <a:pPr lvl="0" algn="just" fontAlgn="t">
-              <a:buFont typeface="Arial" panose="020B0604020202020204" pitchFamily="34" charset="0"/>
-              <a:buChar char="•"/>
-            </a:pPr>
-            <a:r>
-              <a:rPr lang="ja-JP" altLang="ja-JP" dirty="0"/>
-              <a:t>Thuật toán phức tạp, cấu trúc dữ liệu, tối ưu hiệu năng → </a:t>
-            </a:r>
-            <a:r>
-              <a:rPr lang="ja-JP" altLang="ja-JP" b="1" dirty="0"/>
-              <a:t>Imperative</a:t>
-            </a:r>
-            <a:endParaRPr lang="ja-JP" altLang="ja-JP" dirty="0"/>
-          </a:p>
-          <a:p>
-            <a:pPr algn="just"/>
-            <a:endParaRPr kumimoji="1" lang="ja-JP" altLang="en-US" dirty="0"/>
-          </a:p>
-        </p:txBody>
-      </p:sp>
-      <p:sp>
-        <p:nvSpPr>
-          <p:cNvPr id="4" name="Slide Number Placeholder 3">
-            <a:extLst>
-              <a:ext uri="{FF2B5EF4-FFF2-40B4-BE49-F238E27FC236}">
-                <a16:creationId xmlns:a16="http://schemas.microsoft.com/office/drawing/2014/main" id="{7E7ACA87-BAB9-9107-6C03-B64427197081}"/>
-              </a:ext>
-            </a:extLst>
-          </p:cNvPr>
-          <p:cNvSpPr>
-            <a:spLocks noGrp="1"/>
-          </p:cNvSpPr>
-          <p:nvPr>
-            <p:ph type="sldNum" sz="quarter" idx="11"/>
-          </p:nvPr>
-        </p:nvSpPr>
-        <p:spPr/>
-        <p:txBody>
-          <a:bodyPr/>
-          <a:lstStyle/>
-          <a:p>
-            <a:pPr>
-              <a:defRPr/>
-            </a:pPr>
-            <a:r>
-              <a:rPr lang="en-US" altLang="ja-JP"/>
-              <a:t>Page:</a:t>
-            </a:r>
-            <a:r>
-              <a:rPr lang="ja-JP" altLang="en-US"/>
-              <a:t> </a:t>
-            </a:r>
-            <a:fld id="{DC07468E-517B-4E9D-8840-A4568A307980}" type="slidenum">
-              <a:rPr lang="en-US" altLang="ja-JP" smtClean="0"/>
-              <a:pPr>
-                <a:defRPr/>
-              </a:pPr>
-              <a:t>7</a:t>
-            </a:fld>
-            <a:endParaRPr lang="en-US" altLang="ja-JP"/>
-          </a:p>
-        </p:txBody>
-      </p:sp>
-    </p:spTree>
-    <p:extLst>
-      <p:ext uri="{BB962C8B-B14F-4D97-AF65-F5344CB8AC3E}">
-        <p14:creationId xmlns:p14="http://schemas.microsoft.com/office/powerpoint/2010/main" val="3048535641"/>
-      </p:ext>
-    </p:extLst>
-  </p:cSld>
-  <p:clrMapOvr>
-    <a:masterClrMapping/>
-  </p:clrMapOvr>
-</p:sld>
-</file>
-
-<file path=ppt/slides/slide8.xml><?xml version="1.0" encoding="utf-8"?>
-<p:sld xmlns:a="http://schemas.openxmlformats.org/drawingml/2006/main" xmlns:r="http://schemas.openxmlformats.org/officeDocument/2006/relationships" xmlns:p="http://schemas.openxmlformats.org/presentationml/2006/main">
-  <p:cSld>
-    <p:spTree>
-      <p:nvGrpSpPr>
-        <p:cNvPr id="1" name=""/>
-        <p:cNvGrpSpPr/>
-        <p:nvPr/>
-      </p:nvGrpSpPr>
-      <p:grpSpPr>
-        <a:xfrm>
-          <a:off x="0" y="0"/>
-          <a:ext cx="0" cy="0"/>
-          <a:chOff x="0" y="0"/>
-          <a:chExt cx="0" cy="0"/>
-        </a:xfrm>
-      </p:grpSpPr>
-      <p:sp>
-        <p:nvSpPr>
-          <p:cNvPr id="2" name="Title 1">
-            <a:extLst>
-              <a:ext uri="{FF2B5EF4-FFF2-40B4-BE49-F238E27FC236}">
-                <a16:creationId xmlns:a16="http://schemas.microsoft.com/office/drawing/2014/main" id="{6D131171-3C82-C10D-1DBF-6AC8797546A3}"/>
-              </a:ext>
-            </a:extLst>
-          </p:cNvPr>
-          <p:cNvSpPr>
-            <a:spLocks noGrp="1"/>
-          </p:cNvSpPr>
-          <p:nvPr>
-            <p:ph type="title"/>
-          </p:nvPr>
-        </p:nvSpPr>
-        <p:spPr/>
-        <p:txBody>
-          <a:bodyPr>
-            <a:normAutofit fontScale="90000"/>
-          </a:bodyPr>
-          <a:lstStyle/>
-          <a:p>
-            <a:r>
-              <a:rPr lang="ja-JP" altLang="ja-JP" b="1" dirty="0"/>
-              <a:t>Biểu Thức Lambda</a:t>
-            </a:r>
-            <a:endParaRPr kumimoji="1" lang="ja-JP" altLang="en-US" dirty="0"/>
-          </a:p>
-        </p:txBody>
-      </p:sp>
-      <p:sp>
-        <p:nvSpPr>
-          <p:cNvPr id="3" name="Content Placeholder 2">
-            <a:extLst>
-              <a:ext uri="{FF2B5EF4-FFF2-40B4-BE49-F238E27FC236}">
-                <a16:creationId xmlns:a16="http://schemas.microsoft.com/office/drawing/2014/main" id="{C5901082-898B-062E-EF7E-20E35A93A344}"/>
-              </a:ext>
-            </a:extLst>
-          </p:cNvPr>
-          <p:cNvSpPr>
-            <a:spLocks noGrp="1"/>
-          </p:cNvSpPr>
-          <p:nvPr>
-            <p:ph idx="1"/>
-          </p:nvPr>
-        </p:nvSpPr>
-        <p:spPr/>
-        <p:txBody>
-          <a:bodyPr>
-            <a:normAutofit fontScale="92500" lnSpcReduction="20000"/>
-          </a:bodyPr>
-          <a:lstStyle/>
-          <a:p>
-            <a:pPr algn="just"/>
-            <a:r>
-              <a:rPr lang="ja-JP" altLang="ja-JP" dirty="0"/>
-              <a:t>Biểu thức Lambda là một cách để biểu diễn các hàm ẩn danh (anonymous functions) trong Java</a:t>
-            </a:r>
-            <a:endParaRPr lang="en-US" altLang="ja-JP" dirty="0"/>
-          </a:p>
-          <a:p>
-            <a:pPr algn="just"/>
-            <a:r>
-              <a:rPr lang="en-US" altLang="ja-JP" dirty="0"/>
-              <a:t>C</a:t>
-            </a:r>
-            <a:r>
-              <a:rPr lang="ja-JP" altLang="ja-JP" dirty="0"/>
-              <a:t>ho phép </a:t>
-            </a:r>
-            <a:r>
-              <a:rPr lang="en-US" altLang="ja-JP" dirty="0"/>
-              <a:t>t</a:t>
-            </a:r>
-            <a:r>
-              <a:rPr lang="ja-JP" altLang="ja-JP" dirty="0"/>
-              <a:t>ruyền một hàm dưới dạng tham số hoặc lưu trữ một hàm như một biến mà không cần khai báo một lớp cụ thể</a:t>
-            </a:r>
-            <a:endParaRPr lang="en-US" altLang="ja-JP" dirty="0"/>
-          </a:p>
-          <a:p>
-            <a:r>
-              <a:rPr lang="ja-JP" altLang="ja-JP" dirty="0"/>
-              <a:t>Cú pháp cơ bản của biểu thức Lambda trong Java như sau:</a:t>
-            </a:r>
-          </a:p>
-          <a:p>
-            <a:pPr marL="0" indent="0">
-              <a:buNone/>
-            </a:pPr>
-            <a:r>
-              <a:rPr lang="en-US" altLang="ja-JP" dirty="0"/>
-              <a:t>	</a:t>
-            </a:r>
-            <a:r>
-              <a:rPr lang="ja-JP" altLang="ja-JP" dirty="0"/>
-              <a:t>(parameter) -&gt; expression</a:t>
-            </a:r>
-          </a:p>
-          <a:p>
-            <a:pPr lvl="1">
-              <a:buFont typeface="Wingdings" panose="05000000000000000000" pitchFamily="2" charset="2"/>
-              <a:buChar char="n"/>
-            </a:pPr>
-            <a:r>
-              <a:rPr lang="ja-JP" altLang="ja-JP" dirty="0"/>
-              <a:t>Parameter: Danh sách các tham số của hàm.</a:t>
-            </a:r>
-          </a:p>
-          <a:p>
-            <a:pPr lvl="1">
-              <a:buFont typeface="Wingdings" panose="05000000000000000000" pitchFamily="2" charset="2"/>
-              <a:buChar char="n"/>
-            </a:pPr>
-            <a:r>
-              <a:rPr lang="ja-JP" altLang="ja-JP" dirty="0"/>
-              <a:t>-&gt;: Toán tử Lambda, phân tách tham số và thân hàm.</a:t>
-            </a:r>
-          </a:p>
-          <a:p>
-            <a:pPr lvl="1">
-              <a:buFont typeface="Wingdings" panose="05000000000000000000" pitchFamily="2" charset="2"/>
-              <a:buChar char="n"/>
-            </a:pPr>
-            <a:r>
-              <a:rPr lang="ja-JP" altLang="ja-JP" dirty="0"/>
-              <a:t>Expression: Thân hàm, chứa logic xử lý.</a:t>
-            </a:r>
-          </a:p>
-          <a:p>
-            <a:r>
-              <a:rPr lang="ja-JP" altLang="ja-JP" dirty="0"/>
-              <a:t>Ví dụ đơn giản: (x, y) -&gt; x + y</a:t>
-            </a:r>
-          </a:p>
-          <a:p>
-            <a:pPr algn="just"/>
-            <a:endParaRPr kumimoji="1" lang="ja-JP" altLang="en-US" dirty="0"/>
-          </a:p>
-        </p:txBody>
-      </p:sp>
-      <p:sp>
-        <p:nvSpPr>
-          <p:cNvPr id="4" name="Slide Number Placeholder 3">
-            <a:extLst>
-              <a:ext uri="{FF2B5EF4-FFF2-40B4-BE49-F238E27FC236}">
-                <a16:creationId xmlns:a16="http://schemas.microsoft.com/office/drawing/2014/main" id="{37B4A265-7203-3A63-36EE-CAD2F00B48A6}"/>
-              </a:ext>
-            </a:extLst>
-          </p:cNvPr>
-          <p:cNvSpPr>
-            <a:spLocks noGrp="1"/>
-          </p:cNvSpPr>
-          <p:nvPr>
-            <p:ph type="sldNum" sz="quarter" idx="11"/>
-          </p:nvPr>
-        </p:nvSpPr>
-        <p:spPr/>
-        <p:txBody>
-          <a:bodyPr/>
-          <a:lstStyle/>
-          <a:p>
-            <a:pPr>
-              <a:defRPr/>
-            </a:pPr>
-            <a:r>
-              <a:rPr lang="en-US" altLang="ja-JP"/>
-              <a:t>Page:</a:t>
-            </a:r>
-            <a:r>
-              <a:rPr lang="ja-JP" altLang="en-US"/>
-              <a:t> </a:t>
-            </a:r>
-            <a:fld id="{DC07468E-517B-4E9D-8840-A4568A307980}" type="slidenum">
-              <a:rPr lang="en-US" altLang="ja-JP" smtClean="0"/>
-              <a:pPr>
-                <a:defRPr/>
-              </a:pPr>
-              <a:t>8</a:t>
-            </a:fld>
-            <a:endParaRPr lang="en-US" altLang="ja-JP"/>
-          </a:p>
-        </p:txBody>
-      </p:sp>
-    </p:spTree>
-    <p:extLst>
-      <p:ext uri="{BB962C8B-B14F-4D97-AF65-F5344CB8AC3E}">
-        <p14:creationId xmlns:p14="http://schemas.microsoft.com/office/powerpoint/2010/main" val="148728616"/>
-      </p:ext>
-    </p:extLst>
-  </p:cSld>
-  <p:clrMapOvr>
-    <a:masterClrMapping/>
-  </p:clrMapOvr>
-</p:sld>
-</file>
-
-<file path=ppt/slides/slide9.xml><?xml version="1.0" encoding="utf-8"?>
-<p:sld xmlns:a="http://schemas.openxmlformats.org/drawingml/2006/main" xmlns:r="http://schemas.openxmlformats.org/officeDocument/2006/relationships" xmlns:p="http://schemas.openxmlformats.org/presentationml/2006/main">
-  <p:cSld>
-    <p:spTree>
-      <p:nvGrpSpPr>
-        <p:cNvPr id="1" name=""/>
-        <p:cNvGrpSpPr/>
-        <p:nvPr/>
-      </p:nvGrpSpPr>
-      <p:grpSpPr>
-        <a:xfrm>
-          <a:off x="0" y="0"/>
-          <a:ext cx="0" cy="0"/>
-          <a:chOff x="0" y="0"/>
-          <a:chExt cx="0" cy="0"/>
-        </a:xfrm>
-      </p:grpSpPr>
-      <p:sp>
-        <p:nvSpPr>
-          <p:cNvPr id="2" name="Title 1">
-            <a:extLst>
-              <a:ext uri="{FF2B5EF4-FFF2-40B4-BE49-F238E27FC236}">
-                <a16:creationId xmlns:a16="http://schemas.microsoft.com/office/drawing/2014/main" id="{B6915788-571C-D802-D22C-561A209FF55B}"/>
-              </a:ext>
-            </a:extLst>
-          </p:cNvPr>
-          <p:cNvSpPr>
-            <a:spLocks noGrp="1"/>
-          </p:cNvSpPr>
-          <p:nvPr>
-            <p:ph type="title"/>
-          </p:nvPr>
-        </p:nvSpPr>
-        <p:spPr/>
-        <p:txBody>
-          <a:bodyPr>
-            <a:normAutofit fontScale="90000"/>
-          </a:bodyPr>
-          <a:lstStyle/>
-          <a:p>
-            <a:r>
-              <a:rPr kumimoji="1" lang="en-US" altLang="ja-JP" dirty="0" err="1"/>
-              <a:t>Ví</a:t>
-            </a:r>
-            <a:r>
-              <a:rPr kumimoji="1" lang="en-US" altLang="ja-JP" dirty="0"/>
-              <a:t> </a:t>
-            </a:r>
-            <a:r>
-              <a:rPr kumimoji="1" lang="en-US" altLang="ja-JP" dirty="0" err="1"/>
-              <a:t>dụ</a:t>
-            </a:r>
-            <a:r>
-              <a:rPr kumimoji="1" lang="en-US" altLang="ja-JP" dirty="0"/>
-              <a:t> </a:t>
-            </a:r>
-            <a:endParaRPr kumimoji="1" lang="ja-JP" altLang="en-US" dirty="0"/>
-          </a:p>
-        </p:txBody>
-      </p:sp>
-      <p:pic>
-        <p:nvPicPr>
-          <p:cNvPr id="6" name="Content Placeholder 5">
-            <a:extLst>
-              <a:ext uri="{FF2B5EF4-FFF2-40B4-BE49-F238E27FC236}">
-                <a16:creationId xmlns:a16="http://schemas.microsoft.com/office/drawing/2014/main" id="{51DF28D2-C4C0-3D00-ED04-CF239FD66D9B}"/>
-              </a:ext>
-            </a:extLst>
-          </p:cNvPr>
-          <p:cNvPicPr>
-            <a:picLocks noGrp="1" noChangeAspect="1"/>
-          </p:cNvPicPr>
-          <p:nvPr>
-            <p:ph idx="1"/>
-          </p:nvPr>
-        </p:nvPicPr>
-        <p:blipFill>
-          <a:blip r:embed="rId2"/>
-          <a:stretch>
-            <a:fillRect/>
-          </a:stretch>
-        </p:blipFill>
-        <p:spPr bwMode="auto">
-          <a:xfrm>
-            <a:off x="128463" y="1884344"/>
-            <a:ext cx="9648825" cy="1710375"/>
-          </a:xfrm>
-          <a:prstGeom prst="rect">
-            <a:avLst/>
-          </a:prstGeom>
-          <a:noFill/>
-          <a:ln>
-            <a:noFill/>
-          </a:ln>
-          <a:effectLst/>
-          <a:extLst>
-            <a:ext uri="{909E8E84-426E-40DD-AFC4-6F175D3DCCD1}">
-              <a14:hiddenFill xmlns:a14="http://schemas.microsoft.com/office/drawing/2010/main">
-                <a:solidFill>
-                  <a:schemeClr val="accent1"/>
-                </a:solidFill>
-              </a14:hiddenFill>
-            </a:ext>
-            <a:ext uri="{91240B29-F687-4F45-9708-019B960494DF}">
-              <a14:hiddenLine xmlns:a14="http://schemas.microsoft.com/office/drawing/2010/main" w="9525">
-                <a:solidFill>
-                  <a:schemeClr val="tx1"/>
-                </a:solidFill>
-                <a:miter lim="800000"/>
-                <a:headEnd/>
-                <a:tailEnd/>
-              </a14:hiddenLine>
-            </a:ext>
-            <a:ext uri="{AF507438-7753-43E0-B8FC-AC1667EBCBE1}">
-              <a14:hiddenEffects xmlns:a14="http://schemas.microsoft.com/office/drawing/2010/main">
-                <a:effectLst>
-                  <a:outerShdw blurRad="63500" dist="38099" dir="2700000" algn="ctr" rotWithShape="0">
-                    <a:schemeClr val="bg2">
-                      <a:alpha val="74998"/>
-                    </a:schemeClr>
-                  </a:outerShdw>
-                </a:effectLst>
-              </a14:hiddenEffects>
-            </a:ext>
-            <a:ext uri="{FAA26D3D-D897-4be2-8F04-BA451C77F1D7}"/>
-          </a:extLst>
-        </p:spPr>
-      </p:pic>
-      <p:sp>
-        <p:nvSpPr>
-          <p:cNvPr id="4" name="Slide Number Placeholder 3">
-            <a:extLst>
-              <a:ext uri="{FF2B5EF4-FFF2-40B4-BE49-F238E27FC236}">
-                <a16:creationId xmlns:a16="http://schemas.microsoft.com/office/drawing/2014/main" id="{53938AE3-0075-5CAD-95EB-DFEC6E4AF0AB}"/>
-              </a:ext>
-            </a:extLst>
-          </p:cNvPr>
-          <p:cNvSpPr>
-            <a:spLocks noGrp="1"/>
-          </p:cNvSpPr>
-          <p:nvPr>
-            <p:ph type="sldNum" sz="quarter" idx="11"/>
-          </p:nvPr>
-        </p:nvSpPr>
-        <p:spPr/>
-        <p:txBody>
-          <a:bodyPr/>
-          <a:lstStyle/>
-          <a:p>
-            <a:pPr>
-              <a:defRPr/>
-            </a:pPr>
-            <a:r>
-              <a:rPr lang="en-US" altLang="ja-JP"/>
-              <a:t>Page:</a:t>
-            </a:r>
-            <a:r>
-              <a:rPr lang="ja-JP" altLang="en-US"/>
-              <a:t> </a:t>
-            </a:r>
-            <a:fld id="{DC07468E-517B-4E9D-8840-A4568A307980}" type="slidenum">
-              <a:rPr lang="en-US" altLang="ja-JP" smtClean="0"/>
-              <a:pPr>
-                <a:defRPr/>
-              </a:pPr>
-              <a:t>9</a:t>
-            </a:fld>
-            <a:endParaRPr lang="en-US" altLang="ja-JP"/>
-          </a:p>
-        </p:txBody>
-      </p:sp>
-      <p:graphicFrame>
-        <p:nvGraphicFramePr>
-          <p:cNvPr id="10" name="Table 9">
-            <a:extLst>
-              <a:ext uri="{FF2B5EF4-FFF2-40B4-BE49-F238E27FC236}">
-                <a16:creationId xmlns:a16="http://schemas.microsoft.com/office/drawing/2014/main" id="{2BAA9CAB-E699-3C88-559B-E2835B51CA63}"/>
-              </a:ext>
-            </a:extLst>
-          </p:cNvPr>
-          <p:cNvGraphicFramePr>
-            <a:graphicFrameLocks noGrp="1"/>
-          </p:cNvGraphicFramePr>
-          <p:nvPr>
-            <p:extLst>
-              <p:ext uri="{D42A27DB-BD31-4B8C-83A1-F6EECF244321}">
-                <p14:modId xmlns:p14="http://schemas.microsoft.com/office/powerpoint/2010/main" val="1684954594"/>
-              </p:ext>
-            </p:extLst>
-          </p:nvPr>
-        </p:nvGraphicFramePr>
-        <p:xfrm>
-          <a:off x="128464" y="1227666"/>
-          <a:ext cx="9648824" cy="640080"/>
-        </p:xfrm>
-        <a:graphic>
-          <a:graphicData uri="http://schemas.openxmlformats.org/drawingml/2006/table">
-            <a:tbl>
-              <a:tblPr firstRow="1" bandRow="1">
-                <a:tableStyleId>{22838BEF-8BB2-4498-84A7-C5851F593DF1}</a:tableStyleId>
-              </a:tblPr>
-              <a:tblGrid>
-                <a:gridCol w="4824412">
-                  <a:extLst>
-                    <a:ext uri="{9D8B030D-6E8A-4147-A177-3AD203B41FA5}">
-                      <a16:colId xmlns:a16="http://schemas.microsoft.com/office/drawing/2014/main" val="898902895"/>
-                    </a:ext>
-                  </a:extLst>
-                </a:gridCol>
-                <a:gridCol w="4824412">
-                  <a:extLst>
-                    <a:ext uri="{9D8B030D-6E8A-4147-A177-3AD203B41FA5}">
-                      <a16:colId xmlns:a16="http://schemas.microsoft.com/office/drawing/2014/main" val="1054030385"/>
-                    </a:ext>
-                  </a:extLst>
-                </a:gridCol>
-              </a:tblGrid>
-              <a:tr h="370840">
-                <a:tc>
-                  <a:txBody>
-                    <a:bodyPr/>
-                    <a:lstStyle/>
-                    <a:p>
-                      <a:pPr marL="0" marR="0" lvl="0" indent="0" algn="ctr" defTabSz="914400" rtl="0" eaLnBrk="1" fontAlgn="auto" latinLnBrk="0" hangingPunct="1">
-                        <a:lnSpc>
-                          <a:spcPct val="100000"/>
-                        </a:lnSpc>
-                        <a:spcBef>
-                          <a:spcPts val="0"/>
-                        </a:spcBef>
-                        <a:spcAft>
-                          <a:spcPts val="0"/>
-                        </a:spcAft>
-                        <a:buClrTx/>
-                        <a:buSzTx/>
-                        <a:buFontTx/>
-                        <a:buNone/>
-                        <a:tabLst/>
-                        <a:defRPr/>
-                      </a:pPr>
-                      <a:r>
-                        <a:rPr lang="en-US" altLang="ja-JP" b="0" kern="0" dirty="0"/>
-                        <a:t>Imperative		</a:t>
-                      </a:r>
-                      <a:endParaRPr lang="ja-JP" altLang="en-US" b="0" kern="0" dirty="0"/>
-                    </a:p>
-                    <a:p>
-                      <a:pPr algn="ctr"/>
-                      <a:endParaRPr kumimoji="1" lang="ja-JP" altLang="en-US" dirty="0"/>
-                    </a:p>
-                  </a:txBody>
-                  <a:tcPr/>
-                </a:tc>
-                <a:tc>
-                  <a:txBody>
-                    <a:bodyPr/>
-                    <a:lstStyle/>
-                    <a:p>
-                      <a:pPr algn="ctr"/>
-                      <a:r>
-                        <a:rPr kumimoji="1" lang="en-US" altLang="ja-JP" dirty="0"/>
-                        <a:t>Lambda Expression</a:t>
-                      </a:r>
-                      <a:endParaRPr kumimoji="1" lang="ja-JP" altLang="en-US" dirty="0"/>
-                    </a:p>
-                  </a:txBody>
-                  <a:tcPr/>
-                </a:tc>
-                <a:extLst>
-                  <a:ext uri="{0D108BD9-81ED-4DB2-BD59-A6C34878D82A}">
-                    <a16:rowId xmlns:a16="http://schemas.microsoft.com/office/drawing/2014/main" val="3886558097"/>
-                  </a:ext>
-                </a:extLst>
-              </a:tr>
-            </a:tbl>
-          </a:graphicData>
-        </a:graphic>
-      </p:graphicFrame>
-      <p:pic>
-        <p:nvPicPr>
-          <p:cNvPr id="12" name="Picture 11">
-            <a:extLst>
-              <a:ext uri="{FF2B5EF4-FFF2-40B4-BE49-F238E27FC236}">
-                <a16:creationId xmlns:a16="http://schemas.microsoft.com/office/drawing/2014/main" id="{B12E0AD9-37CD-4702-0491-676F4C65F438}"/>
-              </a:ext>
-            </a:extLst>
-          </p:cNvPr>
-          <p:cNvPicPr>
-            <a:picLocks noChangeAspect="1"/>
-          </p:cNvPicPr>
-          <p:nvPr/>
-        </p:nvPicPr>
-        <p:blipFill>
-          <a:blip r:embed="rId3"/>
-          <a:stretch>
-            <a:fillRect/>
-          </a:stretch>
-        </p:blipFill>
-        <p:spPr>
-          <a:xfrm>
-            <a:off x="128216" y="4274965"/>
-            <a:ext cx="9649072" cy="1680882"/>
-          </a:xfrm>
-          <a:prstGeom prst="rect">
-            <a:avLst/>
-          </a:prstGeom>
-        </p:spPr>
-      </p:pic>
-      <p:sp>
-        <p:nvSpPr>
-          <p:cNvPr id="13" name="Content Placeholder 2">
-            <a:extLst>
-              <a:ext uri="{FF2B5EF4-FFF2-40B4-BE49-F238E27FC236}">
-                <a16:creationId xmlns:a16="http://schemas.microsoft.com/office/drawing/2014/main" id="{A6B97261-B3E8-4174-4708-28A4116354A6}"/>
-              </a:ext>
-            </a:extLst>
-          </p:cNvPr>
-          <p:cNvSpPr txBox="1">
-            <a:spLocks/>
-          </p:cNvSpPr>
-          <p:nvPr/>
-        </p:nvSpPr>
-        <p:spPr bwMode="auto">
-          <a:xfrm>
-            <a:off x="128216" y="3652005"/>
-            <a:ext cx="9648824" cy="640080"/>
-          </a:xfrm>
-          <a:prstGeom prst="rect">
-            <a:avLst/>
-          </a:prstGeom>
-          <a:noFill/>
-          <a:ln>
-            <a:noFill/>
-          </a:ln>
-          <a:effectLst/>
-          <a:extLst>
-            <a:ext uri="{909E8E84-426E-40DD-AFC4-6F175D3DCCD1}">
-              <a14:hiddenFill xmlns:a14="http://schemas.microsoft.com/office/drawing/2010/main">
-                <a:solidFill>
-                  <a:schemeClr val="accent1"/>
-                </a:solidFill>
-              </a14:hiddenFill>
-            </a:ext>
-            <a:ext uri="{91240B29-F687-4F45-9708-019B960494DF}">
-              <a14:hiddenLine xmlns:a14="http://schemas.microsoft.com/office/drawing/2010/main" w="9525">
-                <a:solidFill>
-                  <a:schemeClr val="tx1"/>
-                </a:solidFill>
-                <a:miter lim="800000"/>
-                <a:headEnd/>
-                <a:tailEnd/>
-              </a14:hiddenLine>
-            </a:ext>
-            <a:ext uri="{AF507438-7753-43E0-B8FC-AC1667EBCBE1}">
-              <a14:hiddenEffects xmlns:a14="http://schemas.microsoft.com/office/drawing/2010/main">
-                <a:effectLst>
-                  <a:outerShdw blurRad="63500" dist="38099" dir="2700000" algn="ctr" rotWithShape="0">
-                    <a:schemeClr val="bg2">
-                      <a:alpha val="74998"/>
-                    </a:schemeClr>
-                  </a:outerShdw>
-                </a:effectLst>
-              </a14:hiddenEffects>
-            </a:ext>
-            <a:ext uri="{FAA26D3D-D897-4be2-8F04-BA451C77F1D7}"/>
-          </a:extLst>
-        </p:spPr>
-        <p:txBody>
-          <a:bodyPr vert="horz" wrap="square" lIns="91440" tIns="45720" rIns="91440" bIns="45720" numCol="1" anchor="t" anchorCtr="0" compatLnSpc="1">
-            <a:prstTxWarp prst="textNoShape">
-              <a:avLst/>
-            </a:prstTxWarp>
-            <a:normAutofit fontScale="85000" lnSpcReduction="10000"/>
-          </a:bodyPr>
-          <a:lstStyle>
-            <a:lvl1pPr marL="342900" indent="-342900" algn="l" rtl="0" eaLnBrk="1" fontAlgn="base" hangingPunct="1">
-              <a:spcBef>
-                <a:spcPct val="20000"/>
-              </a:spcBef>
-              <a:spcAft>
-                <a:spcPct val="0"/>
-              </a:spcAft>
-              <a:buChar char="•"/>
-              <a:defRPr kumimoji="1" sz="3200">
-                <a:solidFill>
-                  <a:schemeClr val="tx1"/>
-                </a:solidFill>
-                <a:latin typeface="+mj-lt"/>
-                <a:ea typeface="Meiryo UI" panose="020B0604030504040204" pitchFamily="50" charset="-128"/>
-                <a:cs typeface="Meiryo UI" panose="020B0604030504040204" pitchFamily="50" charset="-128"/>
-              </a:defRPr>
-            </a:lvl1pPr>
-            <a:lvl2pPr marL="742950" indent="-285750" algn="l" rtl="0" eaLnBrk="1" fontAlgn="base" hangingPunct="1">
-              <a:spcBef>
-                <a:spcPct val="20000"/>
-              </a:spcBef>
-              <a:spcAft>
-                <a:spcPct val="0"/>
-              </a:spcAft>
-              <a:buChar char="–"/>
-              <a:defRPr kumimoji="1" sz="2800">
-                <a:solidFill>
-                  <a:schemeClr val="tx1"/>
-                </a:solidFill>
-                <a:latin typeface="+mj-lt"/>
-                <a:ea typeface="Meiryo UI" panose="020B0604030504040204" pitchFamily="50" charset="-128"/>
-                <a:cs typeface="Meiryo UI" panose="020B0604030504040204" pitchFamily="50" charset="-128"/>
-              </a:defRPr>
-            </a:lvl2pPr>
-            <a:lvl3pPr marL="1143000" indent="-228600" algn="l" rtl="0" eaLnBrk="1" fontAlgn="base" hangingPunct="1">
-              <a:spcBef>
-                <a:spcPct val="20000"/>
-              </a:spcBef>
-              <a:spcAft>
-                <a:spcPct val="0"/>
-              </a:spcAft>
-              <a:buChar char="•"/>
-              <a:defRPr kumimoji="1" sz="2400">
-                <a:solidFill>
-                  <a:schemeClr val="tx1"/>
-                </a:solidFill>
-                <a:latin typeface="+mj-lt"/>
-                <a:ea typeface="Meiryo UI" panose="020B0604030504040204" pitchFamily="50" charset="-128"/>
-                <a:cs typeface="Meiryo UI" panose="020B0604030504040204" pitchFamily="50" charset="-128"/>
-              </a:defRPr>
-            </a:lvl3pPr>
-            <a:lvl4pPr marL="1600200" indent="-228600" algn="l" rtl="0" eaLnBrk="1" fontAlgn="base" hangingPunct="1">
-              <a:spcBef>
-                <a:spcPct val="20000"/>
-              </a:spcBef>
-              <a:spcAft>
-                <a:spcPct val="0"/>
-              </a:spcAft>
-              <a:buChar char="–"/>
-              <a:defRPr kumimoji="1" sz="2000">
-                <a:solidFill>
-                  <a:schemeClr val="tx1"/>
-                </a:solidFill>
-                <a:latin typeface="+mj-lt"/>
-                <a:ea typeface="Meiryo UI" panose="020B0604030504040204" pitchFamily="50" charset="-128"/>
-                <a:cs typeface="Meiryo UI" panose="020B0604030504040204" pitchFamily="50" charset="-128"/>
-              </a:defRPr>
-            </a:lvl4pPr>
-            <a:lvl5pPr marL="2057400" indent="-228600" algn="l" rtl="0" eaLnBrk="1" fontAlgn="base" hangingPunct="1">
-              <a:spcBef>
-                <a:spcPct val="20000"/>
-              </a:spcBef>
-              <a:spcAft>
-                <a:spcPct val="0"/>
-              </a:spcAft>
-              <a:buChar char="»"/>
-              <a:defRPr kumimoji="1" sz="2000">
-                <a:solidFill>
-                  <a:schemeClr val="tx1"/>
-                </a:solidFill>
-                <a:latin typeface="+mj-lt"/>
-                <a:ea typeface="Meiryo UI" panose="020B0604030504040204" pitchFamily="50" charset="-128"/>
-                <a:cs typeface="Meiryo UI" panose="020B0604030504040204" pitchFamily="50" charset="-128"/>
-              </a:defRPr>
-            </a:lvl5pPr>
-            <a:lvl6pPr marL="2514600" indent="-228600" algn="l" rtl="0" eaLnBrk="1" fontAlgn="base" hangingPunct="1">
-              <a:spcBef>
-                <a:spcPct val="20000"/>
-              </a:spcBef>
-              <a:spcAft>
-                <a:spcPct val="0"/>
-              </a:spcAft>
-              <a:buChar char="»"/>
-              <a:defRPr kumimoji="1" sz="2000">
-                <a:solidFill>
-                  <a:schemeClr val="tx1"/>
-                </a:solidFill>
-                <a:latin typeface="+mn-lt"/>
-                <a:ea typeface="+mn-ea"/>
-              </a:defRPr>
-            </a:lvl6pPr>
-            <a:lvl7pPr marL="2971800" indent="-228600" algn="l" rtl="0" eaLnBrk="1" fontAlgn="base" hangingPunct="1">
-              <a:spcBef>
-                <a:spcPct val="20000"/>
-              </a:spcBef>
-              <a:spcAft>
-                <a:spcPct val="0"/>
-              </a:spcAft>
-              <a:buChar char="»"/>
-              <a:defRPr kumimoji="1" sz="2000">
-                <a:solidFill>
-                  <a:schemeClr val="tx1"/>
-                </a:solidFill>
-                <a:latin typeface="+mn-lt"/>
-                <a:ea typeface="+mn-ea"/>
-              </a:defRPr>
-            </a:lvl7pPr>
-            <a:lvl8pPr marL="3429000" indent="-228600" algn="l" rtl="0" eaLnBrk="1" fontAlgn="base" hangingPunct="1">
-              <a:spcBef>
-                <a:spcPct val="20000"/>
-              </a:spcBef>
-              <a:spcAft>
-                <a:spcPct val="0"/>
-              </a:spcAft>
-              <a:buChar char="»"/>
-              <a:defRPr kumimoji="1" sz="2000">
-                <a:solidFill>
-                  <a:schemeClr val="tx1"/>
-                </a:solidFill>
-                <a:latin typeface="+mn-lt"/>
-                <a:ea typeface="+mn-ea"/>
-              </a:defRPr>
-            </a:lvl8pPr>
-            <a:lvl9pPr marL="3886200" indent="-228600" algn="l" rtl="0" eaLnBrk="1" fontAlgn="base" hangingPunct="1">
-              <a:spcBef>
-                <a:spcPct val="20000"/>
-              </a:spcBef>
-              <a:spcAft>
-                <a:spcPct val="0"/>
-              </a:spcAft>
-              <a:buChar char="»"/>
-              <a:defRPr kumimoji="1" sz="2000">
-                <a:solidFill>
-                  <a:schemeClr val="tx1"/>
-                </a:solidFill>
-                <a:latin typeface="+mn-lt"/>
-                <a:ea typeface="+mn-ea"/>
-              </a:defRPr>
-            </a:lvl9pPr>
-          </a:lstStyle>
-          <a:p>
-            <a:pPr algn="just"/>
-            <a:r>
-              <a:rPr lang="ja-JP" altLang="ja-JP" sz="2000" dirty="0"/>
-              <a:t>Khi </a:t>
-            </a:r>
-            <a:r>
-              <a:rPr lang="en-US" altLang="ja-JP" sz="2000" dirty="0" err="1"/>
-              <a:t>chỉ</a:t>
-            </a:r>
-            <a:r>
-              <a:rPr lang="en-US" altLang="ja-JP" sz="2000" dirty="0"/>
-              <a:t> </a:t>
-            </a:r>
-            <a:r>
-              <a:rPr lang="ja-JP" altLang="ja-JP" sz="2000" dirty="0"/>
-              <a:t>có một dòng biểu thức duy nhất bên trong hàm lambda, chúng ta có thể sử dụng cú pháp lambda biểu thức thay vì cú pháp câu lệnh lambda để đơn giản hơn.</a:t>
-            </a:r>
-            <a:endParaRPr lang="ja-JP" altLang="en-US" sz="2000" b="0" kern="0" dirty="0"/>
-          </a:p>
-        </p:txBody>
-      </p:sp>
-    </p:spTree>
-    <p:extLst>
-      <p:ext uri="{BB962C8B-B14F-4D97-AF65-F5344CB8AC3E}">
-        <p14:creationId xmlns:p14="http://schemas.microsoft.com/office/powerpoint/2010/main" val="3935553914"/>
       </p:ext>
     </p:extLst>
   </p:cSld>

--- a/Java_Week11_LE.pptx
+++ b/Java_Week11_LE.pptx
@@ -6,17 +6,17 @@
     <p:sldMasterId id="2147483796" r:id="rId2"/>
   </p:sldMasterIdLst>
   <p:notesMasterIdLst>
-    <p:notesMasterId r:id="rId25"/>
+    <p:notesMasterId r:id="rId33"/>
   </p:notesMasterIdLst>
   <p:handoutMasterIdLst>
-    <p:handoutMasterId r:id="rId26"/>
+    <p:handoutMasterId r:id="rId34"/>
   </p:handoutMasterIdLst>
   <p:sldIdLst>
     <p:sldId id="689" r:id="rId3"/>
-    <p:sldId id="257" r:id="rId4"/>
-    <p:sldId id="258" r:id="rId5"/>
-    <p:sldId id="259" r:id="rId6"/>
-    <p:sldId id="260" r:id="rId7"/>
+    <p:sldId id="260" r:id="rId4"/>
+    <p:sldId id="257" r:id="rId5"/>
+    <p:sldId id="258" r:id="rId6"/>
+    <p:sldId id="259" r:id="rId7"/>
     <p:sldId id="705" r:id="rId8"/>
     <p:sldId id="696" r:id="rId9"/>
     <p:sldId id="698" r:id="rId10"/>
@@ -27,13 +27,21 @@
     <p:sldId id="692" r:id="rId15"/>
     <p:sldId id="706" r:id="rId16"/>
     <p:sldId id="708" r:id="rId17"/>
-    <p:sldId id="710" r:id="rId18"/>
-    <p:sldId id="691" r:id="rId19"/>
-    <p:sldId id="693" r:id="rId20"/>
-    <p:sldId id="702" r:id="rId21"/>
-    <p:sldId id="703" r:id="rId22"/>
-    <p:sldId id="704" r:id="rId23"/>
-    <p:sldId id="711" r:id="rId24"/>
+    <p:sldId id="691" r:id="rId18"/>
+    <p:sldId id="693" r:id="rId19"/>
+    <p:sldId id="702" r:id="rId20"/>
+    <p:sldId id="703" r:id="rId21"/>
+    <p:sldId id="704" r:id="rId22"/>
+    <p:sldId id="718" r:id="rId23"/>
+    <p:sldId id="719" r:id="rId24"/>
+    <p:sldId id="720" r:id="rId25"/>
+    <p:sldId id="721" r:id="rId26"/>
+    <p:sldId id="717" r:id="rId27"/>
+    <p:sldId id="711" r:id="rId28"/>
+    <p:sldId id="712" r:id="rId29"/>
+    <p:sldId id="713" r:id="rId30"/>
+    <p:sldId id="714" r:id="rId31"/>
+    <p:sldId id="716" r:id="rId32"/>
   </p:sldIdLst>
   <p:sldSz cx="9906000" cy="6858000" type="A4"/>
   <p:notesSz cx="7104063" cy="10234613"/>
@@ -1323,7 +1331,7 @@
     </p:spTree>
     <p:extLst>
       <p:ext uri="{BB962C8B-B14F-4D97-AF65-F5344CB8AC3E}">
-        <p14:creationId xmlns:p14="http://schemas.microsoft.com/office/powerpoint/2010/main" val="3955833012"/>
+        <p14:creationId xmlns:p14="http://schemas.microsoft.com/office/powerpoint/2010/main" val="3640096455"/>
       </p:ext>
     </p:extLst>
   </p:cSld>
@@ -1407,7 +1415,7 @@
     </p:spTree>
     <p:extLst>
       <p:ext uri="{BB962C8B-B14F-4D97-AF65-F5344CB8AC3E}">
-        <p14:creationId xmlns:p14="http://schemas.microsoft.com/office/powerpoint/2010/main" val="77340710"/>
+        <p14:creationId xmlns:p14="http://schemas.microsoft.com/office/powerpoint/2010/main" val="3955833012"/>
       </p:ext>
     </p:extLst>
   </p:cSld>
@@ -1491,7 +1499,7 @@
     </p:spTree>
     <p:extLst>
       <p:ext uri="{BB962C8B-B14F-4D97-AF65-F5344CB8AC3E}">
-        <p14:creationId xmlns:p14="http://schemas.microsoft.com/office/powerpoint/2010/main" val="2897709910"/>
+        <p14:creationId xmlns:p14="http://schemas.microsoft.com/office/powerpoint/2010/main" val="77340710"/>
       </p:ext>
     </p:extLst>
   </p:cSld>
@@ -1575,7 +1583,7 @@
     </p:spTree>
     <p:extLst>
       <p:ext uri="{BB962C8B-B14F-4D97-AF65-F5344CB8AC3E}">
-        <p14:creationId xmlns:p14="http://schemas.microsoft.com/office/powerpoint/2010/main" val="3640096455"/>
+        <p14:creationId xmlns:p14="http://schemas.microsoft.com/office/powerpoint/2010/main" val="2897709910"/>
       </p:ext>
     </p:extLst>
   </p:cSld>
@@ -6899,7 +6907,17 @@
           <a:p>
             <a:r>
               <a:rPr lang="ja-JP" altLang="ja-JP" dirty="0"/>
-              <a:t>Không tham số: () -&gt; System.out.println("Hello, Lambda!");</a:t>
+              <a:t>Không tham số: </a:t>
+            </a:r>
+            <a:endParaRPr lang="en-US" altLang="ja-JP" dirty="0"/>
+          </a:p>
+          <a:p>
+            <a:pPr marL="457200" lvl="1" indent="0">
+              <a:buNone/>
+            </a:pPr>
+            <a:r>
+              <a:rPr lang="ja-JP" altLang="ja-JP" dirty="0"/>
+              <a:t>() -&gt; System.out.println("Hello, Lambda!");</a:t>
             </a:r>
           </a:p>
           <a:p>
@@ -8061,528 +8079,6 @@
   <p:cSld>
     <p:spTree>
       <p:nvGrpSpPr>
-        <p:cNvPr id="1" name="">
-          <a:extLst>
-            <a:ext uri="{FF2B5EF4-FFF2-40B4-BE49-F238E27FC236}">
-              <a16:creationId xmlns:a16="http://schemas.microsoft.com/office/drawing/2014/main" id="{DC6546F3-236B-735F-4525-F42BD135150A}"/>
-            </a:ext>
-          </a:extLst>
-        </p:cNvPr>
-        <p:cNvGrpSpPr/>
-        <p:nvPr/>
-      </p:nvGrpSpPr>
-      <p:grpSpPr>
-        <a:xfrm>
-          <a:off x="0" y="0"/>
-          <a:ext cx="0" cy="0"/>
-          <a:chOff x="0" y="0"/>
-          <a:chExt cx="0" cy="0"/>
-        </a:xfrm>
-      </p:grpSpPr>
-      <p:sp>
-        <p:nvSpPr>
-          <p:cNvPr id="2" name="Title 1">
-            <a:extLst>
-              <a:ext uri="{FF2B5EF4-FFF2-40B4-BE49-F238E27FC236}">
-                <a16:creationId xmlns:a16="http://schemas.microsoft.com/office/drawing/2014/main" id="{A9FC6734-FDC1-9156-D707-0BF57148BD2A}"/>
-              </a:ext>
-            </a:extLst>
-          </p:cNvPr>
-          <p:cNvSpPr>
-            <a:spLocks noGrp="1"/>
-          </p:cNvSpPr>
-          <p:nvPr>
-            <p:ph type="title"/>
-          </p:nvPr>
-        </p:nvSpPr>
-        <p:spPr/>
-        <p:txBody>
-          <a:bodyPr>
-            <a:normAutofit fontScale="90000"/>
-          </a:bodyPr>
-          <a:lstStyle/>
-          <a:p>
-            <a:r>
-              <a:rPr kumimoji="1" lang="en-US" altLang="ja-JP" dirty="0" err="1"/>
-              <a:t>Ví</a:t>
-            </a:r>
-            <a:r>
-              <a:rPr kumimoji="1" lang="en-US" altLang="ja-JP" dirty="0"/>
-              <a:t> </a:t>
-            </a:r>
-            <a:r>
-              <a:rPr kumimoji="1" lang="en-US" altLang="ja-JP" dirty="0" err="1"/>
-              <a:t>dụ</a:t>
-            </a:r>
-            <a:r>
-              <a:rPr kumimoji="1" lang="en-US" altLang="ja-JP" dirty="0"/>
-              <a:t> 2 </a:t>
-            </a:r>
-            <a:endParaRPr kumimoji="1" lang="ja-JP" altLang="en-US" dirty="0"/>
-          </a:p>
-        </p:txBody>
-      </p:sp>
-      <p:sp>
-        <p:nvSpPr>
-          <p:cNvPr id="4" name="Slide Number Placeholder 3">
-            <a:extLst>
-              <a:ext uri="{FF2B5EF4-FFF2-40B4-BE49-F238E27FC236}">
-                <a16:creationId xmlns:a16="http://schemas.microsoft.com/office/drawing/2014/main" id="{43191E44-4071-D34A-E45F-1B044503129D}"/>
-              </a:ext>
-            </a:extLst>
-          </p:cNvPr>
-          <p:cNvSpPr>
-            <a:spLocks noGrp="1"/>
-          </p:cNvSpPr>
-          <p:nvPr>
-            <p:ph type="sldNum" sz="quarter" idx="11"/>
-          </p:nvPr>
-        </p:nvSpPr>
-        <p:spPr/>
-        <p:txBody>
-          <a:bodyPr/>
-          <a:lstStyle/>
-          <a:p>
-            <a:pPr>
-              <a:defRPr/>
-            </a:pPr>
-            <a:r>
-              <a:rPr lang="en-US" altLang="ja-JP"/>
-              <a:t>Page:</a:t>
-            </a:r>
-            <a:r>
-              <a:rPr lang="ja-JP" altLang="en-US"/>
-              <a:t> </a:t>
-            </a:r>
-            <a:fld id="{DC07468E-517B-4E9D-8840-A4568A307980}" type="slidenum">
-              <a:rPr lang="en-US" altLang="ja-JP" smtClean="0"/>
-              <a:pPr>
-                <a:defRPr/>
-              </a:pPr>
-              <a:t>16</a:t>
-            </a:fld>
-            <a:endParaRPr lang="en-US" altLang="ja-JP"/>
-          </a:p>
-        </p:txBody>
-      </p:sp>
-      <p:graphicFrame>
-        <p:nvGraphicFramePr>
-          <p:cNvPr id="10" name="Table 9">
-            <a:extLst>
-              <a:ext uri="{FF2B5EF4-FFF2-40B4-BE49-F238E27FC236}">
-                <a16:creationId xmlns:a16="http://schemas.microsoft.com/office/drawing/2014/main" id="{07683790-2C9C-4D46-F7DD-40034ABF5C79}"/>
-              </a:ext>
-            </a:extLst>
-          </p:cNvPr>
-          <p:cNvGraphicFramePr>
-            <a:graphicFrameLocks noGrp="1"/>
-          </p:cNvGraphicFramePr>
-          <p:nvPr/>
-        </p:nvGraphicFramePr>
-        <p:xfrm>
-          <a:off x="128464" y="1227666"/>
-          <a:ext cx="9648824" cy="640080"/>
-        </p:xfrm>
-        <a:graphic>
-          <a:graphicData uri="http://schemas.openxmlformats.org/drawingml/2006/table">
-            <a:tbl>
-              <a:tblPr firstRow="1" bandRow="1">
-                <a:tableStyleId>{22838BEF-8BB2-4498-84A7-C5851F593DF1}</a:tableStyleId>
-              </a:tblPr>
-              <a:tblGrid>
-                <a:gridCol w="4824412">
-                  <a:extLst>
-                    <a:ext uri="{9D8B030D-6E8A-4147-A177-3AD203B41FA5}">
-                      <a16:colId xmlns:a16="http://schemas.microsoft.com/office/drawing/2014/main" val="898902895"/>
-                    </a:ext>
-                  </a:extLst>
-                </a:gridCol>
-                <a:gridCol w="4824412">
-                  <a:extLst>
-                    <a:ext uri="{9D8B030D-6E8A-4147-A177-3AD203B41FA5}">
-                      <a16:colId xmlns:a16="http://schemas.microsoft.com/office/drawing/2014/main" val="1054030385"/>
-                    </a:ext>
-                  </a:extLst>
-                </a:gridCol>
-              </a:tblGrid>
-              <a:tr h="370840">
-                <a:tc>
-                  <a:txBody>
-                    <a:bodyPr/>
-                    <a:lstStyle/>
-                    <a:p>
-                      <a:pPr marL="0" marR="0" lvl="0" indent="0" algn="ctr" defTabSz="914400" rtl="0" eaLnBrk="1" fontAlgn="auto" latinLnBrk="0" hangingPunct="1">
-                        <a:lnSpc>
-                          <a:spcPct val="100000"/>
-                        </a:lnSpc>
-                        <a:spcBef>
-                          <a:spcPts val="0"/>
-                        </a:spcBef>
-                        <a:spcAft>
-                          <a:spcPts val="0"/>
-                        </a:spcAft>
-                        <a:buClrTx/>
-                        <a:buSzTx/>
-                        <a:buFontTx/>
-                        <a:buNone/>
-                        <a:tabLst/>
-                        <a:defRPr/>
-                      </a:pPr>
-                      <a:r>
-                        <a:rPr lang="en-US" altLang="ja-JP" b="0" kern="0" dirty="0"/>
-                        <a:t>Imperative		</a:t>
-                      </a:r>
-                      <a:endParaRPr lang="ja-JP" altLang="en-US" b="0" kern="0" dirty="0"/>
-                    </a:p>
-                    <a:p>
-                      <a:pPr algn="ctr"/>
-                      <a:endParaRPr kumimoji="1" lang="ja-JP" altLang="en-US" dirty="0"/>
-                    </a:p>
-                  </a:txBody>
-                  <a:tcPr/>
-                </a:tc>
-                <a:tc>
-                  <a:txBody>
-                    <a:bodyPr/>
-                    <a:lstStyle/>
-                    <a:p>
-                      <a:pPr algn="ctr"/>
-                      <a:r>
-                        <a:rPr kumimoji="1" lang="en-US" altLang="ja-JP" dirty="0"/>
-                        <a:t>Lambda Expression</a:t>
-                      </a:r>
-                      <a:endParaRPr kumimoji="1" lang="ja-JP" altLang="en-US" dirty="0"/>
-                    </a:p>
-                  </a:txBody>
-                  <a:tcPr/>
-                </a:tc>
-                <a:extLst>
-                  <a:ext uri="{0D108BD9-81ED-4DB2-BD59-A6C34878D82A}">
-                    <a16:rowId xmlns:a16="http://schemas.microsoft.com/office/drawing/2014/main" val="3886558097"/>
-                  </a:ext>
-                </a:extLst>
-              </a:tr>
-            </a:tbl>
-          </a:graphicData>
-        </a:graphic>
-      </p:graphicFrame>
-      <p:sp>
-        <p:nvSpPr>
-          <p:cNvPr id="13" name="Content Placeholder 2">
-            <a:extLst>
-              <a:ext uri="{FF2B5EF4-FFF2-40B4-BE49-F238E27FC236}">
-                <a16:creationId xmlns:a16="http://schemas.microsoft.com/office/drawing/2014/main" id="{40619C55-4B81-ED47-82B8-B93D46A18E86}"/>
-              </a:ext>
-            </a:extLst>
-          </p:cNvPr>
-          <p:cNvSpPr txBox="1">
-            <a:spLocks/>
-          </p:cNvSpPr>
-          <p:nvPr/>
-        </p:nvSpPr>
-        <p:spPr bwMode="auto">
-          <a:xfrm>
-            <a:off x="128216" y="3652005"/>
-            <a:ext cx="9648824" cy="640080"/>
-          </a:xfrm>
-          <a:prstGeom prst="rect">
-            <a:avLst/>
-          </a:prstGeom>
-          <a:noFill/>
-          <a:ln>
-            <a:noFill/>
-          </a:ln>
-          <a:effectLst/>
-          <a:extLst>
-            <a:ext uri="{909E8E84-426E-40DD-AFC4-6F175D3DCCD1}">
-              <a14:hiddenFill xmlns:a14="http://schemas.microsoft.com/office/drawing/2010/main">
-                <a:solidFill>
-                  <a:schemeClr val="accent1"/>
-                </a:solidFill>
-              </a14:hiddenFill>
-            </a:ext>
-            <a:ext uri="{91240B29-F687-4F45-9708-019B960494DF}">
-              <a14:hiddenLine xmlns:a14="http://schemas.microsoft.com/office/drawing/2010/main" w="9525">
-                <a:solidFill>
-                  <a:schemeClr val="tx1"/>
-                </a:solidFill>
-                <a:miter lim="800000"/>
-                <a:headEnd/>
-                <a:tailEnd/>
-              </a14:hiddenLine>
-            </a:ext>
-            <a:ext uri="{AF507438-7753-43E0-B8FC-AC1667EBCBE1}">
-              <a14:hiddenEffects xmlns:a14="http://schemas.microsoft.com/office/drawing/2010/main">
-                <a:effectLst>
-                  <a:outerShdw blurRad="63500" dist="38099" dir="2700000" algn="ctr" rotWithShape="0">
-                    <a:schemeClr val="bg2">
-                      <a:alpha val="74998"/>
-                    </a:schemeClr>
-                  </a:outerShdw>
-                </a:effectLst>
-              </a14:hiddenEffects>
-            </a:ext>
-            <a:ext uri="{FAA26D3D-D897-4be2-8F04-BA451C77F1D7}"/>
-          </a:extLst>
-        </p:spPr>
-        <p:txBody>
-          <a:bodyPr vert="horz" wrap="square" lIns="91440" tIns="45720" rIns="91440" bIns="45720" numCol="1" anchor="t" anchorCtr="0" compatLnSpc="1">
-            <a:prstTxWarp prst="textNoShape">
-              <a:avLst/>
-            </a:prstTxWarp>
-            <a:normAutofit fontScale="85000" lnSpcReduction="10000"/>
-          </a:bodyPr>
-          <a:lstStyle>
-            <a:lvl1pPr marL="342900" indent="-342900" algn="l" rtl="0" eaLnBrk="1" fontAlgn="base" hangingPunct="1">
-              <a:spcBef>
-                <a:spcPct val="20000"/>
-              </a:spcBef>
-              <a:spcAft>
-                <a:spcPct val="0"/>
-              </a:spcAft>
-              <a:buChar char="•"/>
-              <a:defRPr kumimoji="1" sz="3200">
-                <a:solidFill>
-                  <a:schemeClr val="tx1"/>
-                </a:solidFill>
-                <a:latin typeface="+mj-lt"/>
-                <a:ea typeface="Meiryo UI" panose="020B0604030504040204" pitchFamily="50" charset="-128"/>
-                <a:cs typeface="Meiryo UI" panose="020B0604030504040204" pitchFamily="50" charset="-128"/>
-              </a:defRPr>
-            </a:lvl1pPr>
-            <a:lvl2pPr marL="742950" indent="-285750" algn="l" rtl="0" eaLnBrk="1" fontAlgn="base" hangingPunct="1">
-              <a:spcBef>
-                <a:spcPct val="20000"/>
-              </a:spcBef>
-              <a:spcAft>
-                <a:spcPct val="0"/>
-              </a:spcAft>
-              <a:buChar char="–"/>
-              <a:defRPr kumimoji="1" sz="2800">
-                <a:solidFill>
-                  <a:schemeClr val="tx1"/>
-                </a:solidFill>
-                <a:latin typeface="+mj-lt"/>
-                <a:ea typeface="Meiryo UI" panose="020B0604030504040204" pitchFamily="50" charset="-128"/>
-                <a:cs typeface="Meiryo UI" panose="020B0604030504040204" pitchFamily="50" charset="-128"/>
-              </a:defRPr>
-            </a:lvl2pPr>
-            <a:lvl3pPr marL="1143000" indent="-228600" algn="l" rtl="0" eaLnBrk="1" fontAlgn="base" hangingPunct="1">
-              <a:spcBef>
-                <a:spcPct val="20000"/>
-              </a:spcBef>
-              <a:spcAft>
-                <a:spcPct val="0"/>
-              </a:spcAft>
-              <a:buChar char="•"/>
-              <a:defRPr kumimoji="1" sz="2400">
-                <a:solidFill>
-                  <a:schemeClr val="tx1"/>
-                </a:solidFill>
-                <a:latin typeface="+mj-lt"/>
-                <a:ea typeface="Meiryo UI" panose="020B0604030504040204" pitchFamily="50" charset="-128"/>
-                <a:cs typeface="Meiryo UI" panose="020B0604030504040204" pitchFamily="50" charset="-128"/>
-              </a:defRPr>
-            </a:lvl3pPr>
-            <a:lvl4pPr marL="1600200" indent="-228600" algn="l" rtl="0" eaLnBrk="1" fontAlgn="base" hangingPunct="1">
-              <a:spcBef>
-                <a:spcPct val="20000"/>
-              </a:spcBef>
-              <a:spcAft>
-                <a:spcPct val="0"/>
-              </a:spcAft>
-              <a:buChar char="–"/>
-              <a:defRPr kumimoji="1" sz="2000">
-                <a:solidFill>
-                  <a:schemeClr val="tx1"/>
-                </a:solidFill>
-                <a:latin typeface="+mj-lt"/>
-                <a:ea typeface="Meiryo UI" panose="020B0604030504040204" pitchFamily="50" charset="-128"/>
-                <a:cs typeface="Meiryo UI" panose="020B0604030504040204" pitchFamily="50" charset="-128"/>
-              </a:defRPr>
-            </a:lvl4pPr>
-            <a:lvl5pPr marL="2057400" indent="-228600" algn="l" rtl="0" eaLnBrk="1" fontAlgn="base" hangingPunct="1">
-              <a:spcBef>
-                <a:spcPct val="20000"/>
-              </a:spcBef>
-              <a:spcAft>
-                <a:spcPct val="0"/>
-              </a:spcAft>
-              <a:buChar char="»"/>
-              <a:defRPr kumimoji="1" sz="2000">
-                <a:solidFill>
-                  <a:schemeClr val="tx1"/>
-                </a:solidFill>
-                <a:latin typeface="+mj-lt"/>
-                <a:ea typeface="Meiryo UI" panose="020B0604030504040204" pitchFamily="50" charset="-128"/>
-                <a:cs typeface="Meiryo UI" panose="020B0604030504040204" pitchFamily="50" charset="-128"/>
-              </a:defRPr>
-            </a:lvl5pPr>
-            <a:lvl6pPr marL="2514600" indent="-228600" algn="l" rtl="0" eaLnBrk="1" fontAlgn="base" hangingPunct="1">
-              <a:spcBef>
-                <a:spcPct val="20000"/>
-              </a:spcBef>
-              <a:spcAft>
-                <a:spcPct val="0"/>
-              </a:spcAft>
-              <a:buChar char="»"/>
-              <a:defRPr kumimoji="1" sz="2000">
-                <a:solidFill>
-                  <a:schemeClr val="tx1"/>
-                </a:solidFill>
-                <a:latin typeface="+mn-lt"/>
-                <a:ea typeface="+mn-ea"/>
-              </a:defRPr>
-            </a:lvl6pPr>
-            <a:lvl7pPr marL="2971800" indent="-228600" algn="l" rtl="0" eaLnBrk="1" fontAlgn="base" hangingPunct="1">
-              <a:spcBef>
-                <a:spcPct val="20000"/>
-              </a:spcBef>
-              <a:spcAft>
-                <a:spcPct val="0"/>
-              </a:spcAft>
-              <a:buChar char="»"/>
-              <a:defRPr kumimoji="1" sz="2000">
-                <a:solidFill>
-                  <a:schemeClr val="tx1"/>
-                </a:solidFill>
-                <a:latin typeface="+mn-lt"/>
-                <a:ea typeface="+mn-ea"/>
-              </a:defRPr>
-            </a:lvl7pPr>
-            <a:lvl8pPr marL="3429000" indent="-228600" algn="l" rtl="0" eaLnBrk="1" fontAlgn="base" hangingPunct="1">
-              <a:spcBef>
-                <a:spcPct val="20000"/>
-              </a:spcBef>
-              <a:spcAft>
-                <a:spcPct val="0"/>
-              </a:spcAft>
-              <a:buChar char="»"/>
-              <a:defRPr kumimoji="1" sz="2000">
-                <a:solidFill>
-                  <a:schemeClr val="tx1"/>
-                </a:solidFill>
-                <a:latin typeface="+mn-lt"/>
-                <a:ea typeface="+mn-ea"/>
-              </a:defRPr>
-            </a:lvl8pPr>
-            <a:lvl9pPr marL="3886200" indent="-228600" algn="l" rtl="0" eaLnBrk="1" fontAlgn="base" hangingPunct="1">
-              <a:spcBef>
-                <a:spcPct val="20000"/>
-              </a:spcBef>
-              <a:spcAft>
-                <a:spcPct val="0"/>
-              </a:spcAft>
-              <a:buChar char="»"/>
-              <a:defRPr kumimoji="1" sz="2000">
-                <a:solidFill>
-                  <a:schemeClr val="tx1"/>
-                </a:solidFill>
-                <a:latin typeface="+mn-lt"/>
-                <a:ea typeface="+mn-ea"/>
-              </a:defRPr>
-            </a:lvl9pPr>
-          </a:lstStyle>
-          <a:p>
-            <a:pPr algn="just"/>
-            <a:r>
-              <a:rPr lang="ja-JP" altLang="ja-JP" sz="2000" dirty="0"/>
-              <a:t>Khi </a:t>
-            </a:r>
-            <a:r>
-              <a:rPr lang="en-US" altLang="ja-JP" sz="2000" dirty="0" err="1"/>
-              <a:t>chỉ</a:t>
-            </a:r>
-            <a:r>
-              <a:rPr lang="en-US" altLang="ja-JP" sz="2000" dirty="0"/>
-              <a:t> </a:t>
-            </a:r>
-            <a:r>
-              <a:rPr lang="ja-JP" altLang="ja-JP" sz="2000" dirty="0"/>
-              <a:t>có một dòng biểu thức duy nhất bên trong hàm lambda, chúng ta có thể sử dụng cú pháp lambda biểu thức thay vì cú pháp câu lệnh lambda để đơn giản hơn.</a:t>
-            </a:r>
-            <a:endParaRPr lang="ja-JP" altLang="en-US" sz="2000" b="0" kern="0" dirty="0"/>
-          </a:p>
-        </p:txBody>
-      </p:sp>
-      <p:pic>
-        <p:nvPicPr>
-          <p:cNvPr id="7" name="Picture 6">
-            <a:extLst>
-              <a:ext uri="{FF2B5EF4-FFF2-40B4-BE49-F238E27FC236}">
-                <a16:creationId xmlns:a16="http://schemas.microsoft.com/office/drawing/2014/main" id="{99A35D78-AC59-B9F3-F6BC-3A0E88AFB6A5}"/>
-              </a:ext>
-            </a:extLst>
-          </p:cNvPr>
-          <p:cNvPicPr>
-            <a:picLocks noChangeAspect="1"/>
-          </p:cNvPicPr>
-          <p:nvPr/>
-        </p:nvPicPr>
-        <p:blipFill>
-          <a:blip r:embed="rId2"/>
-          <a:stretch>
-            <a:fillRect/>
-          </a:stretch>
-        </p:blipFill>
-        <p:spPr>
-          <a:xfrm>
-            <a:off x="144463" y="1948044"/>
-            <a:ext cx="9632577" cy="1703961"/>
-          </a:xfrm>
-          <a:prstGeom prst="rect">
-            <a:avLst/>
-          </a:prstGeom>
-        </p:spPr>
-      </p:pic>
-      <p:pic>
-        <p:nvPicPr>
-          <p:cNvPr id="9" name="Picture 8">
-            <a:extLst>
-              <a:ext uri="{FF2B5EF4-FFF2-40B4-BE49-F238E27FC236}">
-                <a16:creationId xmlns:a16="http://schemas.microsoft.com/office/drawing/2014/main" id="{0CAF9675-A624-D170-B9ED-D5290CCEC90C}"/>
-              </a:ext>
-            </a:extLst>
-          </p:cNvPr>
-          <p:cNvPicPr>
-            <a:picLocks noChangeAspect="1"/>
-          </p:cNvPicPr>
-          <p:nvPr/>
-        </p:nvPicPr>
-        <p:blipFill>
-          <a:blip r:embed="rId3"/>
-          <a:stretch>
-            <a:fillRect/>
-          </a:stretch>
-        </p:blipFill>
-        <p:spPr>
-          <a:xfrm>
-            <a:off x="144463" y="4353196"/>
-            <a:ext cx="9632577" cy="1562877"/>
-          </a:xfrm>
-          <a:prstGeom prst="rect">
-            <a:avLst/>
-          </a:prstGeom>
-        </p:spPr>
-      </p:pic>
-    </p:spTree>
-    <p:extLst>
-      <p:ext uri="{BB962C8B-B14F-4D97-AF65-F5344CB8AC3E}">
-        <p14:creationId xmlns:p14="http://schemas.microsoft.com/office/powerpoint/2010/main" val="382454605"/>
-      </p:ext>
-    </p:extLst>
-  </p:cSld>
-  <p:clrMapOvr>
-    <a:masterClrMapping/>
-  </p:clrMapOvr>
-</p:sld>
-</file>
-
-<file path=ppt/slides/slide17.xml><?xml version="1.0" encoding="utf-8"?>
-<p:sld xmlns:a="http://schemas.openxmlformats.org/drawingml/2006/main" xmlns:r="http://schemas.openxmlformats.org/officeDocument/2006/relationships" xmlns:p="http://schemas.openxmlformats.org/presentationml/2006/main">
-  <p:cSld>
-    <p:spTree>
-      <p:nvGrpSpPr>
         <p:cNvPr id="1" name=""/>
         <p:cNvGrpSpPr/>
         <p:nvPr/>
@@ -8747,7 +8243,7 @@
               <a:pPr>
                 <a:defRPr/>
               </a:pPr>
-              <a:t>17</a:t>
+              <a:t>16</a:t>
             </a:fld>
             <a:endParaRPr lang="en-US" altLang="ja-JP"/>
           </a:p>
@@ -8766,7 +8262,7 @@
 </p:sld>
 </file>
 
-<file path=ppt/slides/slide18.xml><?xml version="1.0" encoding="utf-8"?>
+<file path=ppt/slides/slide17.xml><?xml version="1.0" encoding="utf-8"?>
 <p:sld xmlns:a="http://schemas.openxmlformats.org/drawingml/2006/main" xmlns:r="http://schemas.openxmlformats.org/officeDocument/2006/relationships" xmlns:p="http://schemas.openxmlformats.org/presentationml/2006/main">
   <p:cSld>
     <p:spTree>
@@ -8935,7 +8431,7 @@
               <a:pPr>
                 <a:defRPr/>
               </a:pPr>
-              <a:t>18</a:t>
+              <a:t>17</a:t>
             </a:fld>
             <a:endParaRPr lang="en-US" altLang="ja-JP"/>
           </a:p>
@@ -8954,7 +8450,7 @@
 </p:sld>
 </file>
 
-<file path=ppt/slides/slide19.xml><?xml version="1.0" encoding="utf-8"?>
+<file path=ppt/slides/slide18.xml><?xml version="1.0" encoding="utf-8"?>
 <p:sld xmlns:a="http://schemas.openxmlformats.org/drawingml/2006/main" xmlns:r="http://schemas.openxmlformats.org/officeDocument/2006/relationships" xmlns:p="http://schemas.openxmlformats.org/presentationml/2006/main">
   <p:cSld>
     <p:spTree>
@@ -9208,7 +8704,7 @@
               <a:pPr>
                 <a:defRPr/>
               </a:pPr>
-              <a:t>19</a:t>
+              <a:t>18</a:t>
             </a:fld>
             <a:endParaRPr lang="en-US" altLang="ja-JP"/>
           </a:p>
@@ -9364,395 +8860,7 @@
 </p:sld>
 </file>
 
-<file path=ppt/slides/slide2.xml><?xml version="1.0" encoding="utf-8"?>
-<p:sld xmlns:a="http://schemas.openxmlformats.org/drawingml/2006/main" xmlns:r="http://schemas.openxmlformats.org/officeDocument/2006/relationships" xmlns:p="http://schemas.openxmlformats.org/presentationml/2006/main">
-  <p:cSld>
-    <p:spTree>
-      <p:nvGrpSpPr>
-        <p:cNvPr id="1" name=""/>
-        <p:cNvGrpSpPr/>
-        <p:nvPr/>
-      </p:nvGrpSpPr>
-      <p:grpSpPr>
-        <a:xfrm>
-          <a:off x="0" y="0"/>
-          <a:ext cx="0" cy="0"/>
-          <a:chOff x="0" y="0"/>
-          <a:chExt cx="0" cy="0"/>
-        </a:xfrm>
-      </p:grpSpPr>
-      <p:sp>
-        <p:nvSpPr>
-          <p:cNvPr id="2" name="Text 0"/>
-          <p:cNvSpPr/>
-          <p:nvPr/>
-        </p:nvSpPr>
-        <p:spPr>
-          <a:xfrm>
-            <a:off x="33336" y="535036"/>
-            <a:ext cx="8915400" cy="371475"/>
-          </a:xfrm>
-          <a:prstGeom prst="rect">
-            <a:avLst/>
-          </a:prstGeom>
-          <a:noFill/>
-          <a:ln/>
-        </p:spPr>
-        <p:txBody>
-          <a:bodyPr wrap="square" rtlCol="0" anchor="ctr"/>
-          <a:lstStyle/>
-          <a:p>
-            <a:r>
-              <a:rPr lang="en-US" sz="4000" dirty="0" err="1">
-                <a:solidFill>
-                  <a:srgbClr val="1F4E79"/>
-                </a:solidFill>
-                <a:latin typeface="+mj-lt"/>
-              </a:rPr>
-              <a:t>Nêu</a:t>
-            </a:r>
-            <a:r>
-              <a:rPr lang="en-US" sz="4000" dirty="0">
-                <a:solidFill>
-                  <a:srgbClr val="1F4E79"/>
-                </a:solidFill>
-                <a:latin typeface="+mj-lt"/>
-              </a:rPr>
-              <a:t> </a:t>
-            </a:r>
-            <a:r>
-              <a:rPr lang="en-US" sz="4000" dirty="0" err="1">
-                <a:solidFill>
-                  <a:srgbClr val="1F4E79"/>
-                </a:solidFill>
-                <a:latin typeface="+mj-lt"/>
-              </a:rPr>
-              <a:t>vấn</a:t>
-            </a:r>
-            <a:r>
-              <a:rPr lang="en-US" sz="4000" dirty="0">
-                <a:solidFill>
-                  <a:srgbClr val="1F4E79"/>
-                </a:solidFill>
-                <a:latin typeface="+mj-lt"/>
-              </a:rPr>
-              <a:t> </a:t>
-            </a:r>
-            <a:r>
-              <a:rPr lang="en-US" sz="4000" dirty="0" err="1">
-                <a:solidFill>
-                  <a:srgbClr val="1F4E79"/>
-                </a:solidFill>
-                <a:latin typeface="+mj-lt"/>
-              </a:rPr>
-              <a:t>đề</a:t>
-            </a:r>
-            <a:endParaRPr lang="en-US" sz="4000" dirty="0">
-              <a:latin typeface="+mj-lt"/>
-            </a:endParaRPr>
-          </a:p>
-        </p:txBody>
-      </p:sp>
-      <p:sp>
-        <p:nvSpPr>
-          <p:cNvPr id="3" name="Text 1"/>
-          <p:cNvSpPr/>
-          <p:nvPr/>
-        </p:nvSpPr>
-        <p:spPr>
-          <a:xfrm>
-            <a:off x="371474" y="1385888"/>
-            <a:ext cx="8239125" cy="4481512"/>
-          </a:xfrm>
-          <a:prstGeom prst="rect">
-            <a:avLst/>
-          </a:prstGeom>
-          <a:noFill/>
-          <a:ln/>
-        </p:spPr>
-        <p:txBody>
-          <a:bodyPr wrap="square" rtlCol="0" anchor="ctr"/>
-          <a:lstStyle/>
-          <a:p>
-            <a:pPr algn="just"/>
-            <a:endParaRPr lang="en-US" sz="2800" dirty="0">
-              <a:latin typeface="+mj-lt"/>
-            </a:endParaRPr>
-          </a:p>
-        </p:txBody>
-      </p:sp>
-      <p:sp>
-        <p:nvSpPr>
-          <p:cNvPr id="4" name="Text 2"/>
-          <p:cNvSpPr/>
-          <p:nvPr/>
-        </p:nvSpPr>
-        <p:spPr>
-          <a:xfrm>
-            <a:off x="594360" y="2128838"/>
-            <a:ext cx="3714750" cy="1485900"/>
-          </a:xfrm>
-          <a:prstGeom prst="rect">
-            <a:avLst/>
-          </a:prstGeom>
-          <a:noFill/>
-          <a:ln/>
-        </p:spPr>
-        <p:txBody>
-          <a:bodyPr wrap="square" rtlCol="0" anchor="ctr"/>
-          <a:lstStyle/>
-          <a:p>
-            <a:endParaRPr lang="en-US" sz="1300" dirty="0"/>
-          </a:p>
-        </p:txBody>
-      </p:sp>
-      <p:sp>
-        <p:nvSpPr>
-          <p:cNvPr id="6" name="Content Placeholder 5">
-            <a:extLst>
-              <a:ext uri="{FF2B5EF4-FFF2-40B4-BE49-F238E27FC236}">
-                <a16:creationId xmlns:a16="http://schemas.microsoft.com/office/drawing/2014/main" id="{4925B110-462A-4703-6ABD-77769467DF38}"/>
-              </a:ext>
-            </a:extLst>
-          </p:cNvPr>
-          <p:cNvSpPr>
-            <a:spLocks noGrp="1"/>
-          </p:cNvSpPr>
-          <p:nvPr>
-            <p:ph idx="1"/>
-          </p:nvPr>
-        </p:nvSpPr>
-        <p:spPr>
-          <a:xfrm>
-            <a:off x="128464" y="1143000"/>
-            <a:ext cx="9649072" cy="5328592"/>
-          </a:xfrm>
-        </p:spPr>
-        <p:txBody>
-          <a:bodyPr/>
-          <a:lstStyle/>
-          <a:p>
-            <a:pPr algn="just">
-              <a:buFont typeface="Arial" panose="020B0604020202020204" pitchFamily="34" charset="0"/>
-              <a:buChar char="•"/>
-            </a:pPr>
-            <a:r>
-              <a:rPr lang="en-US" altLang="ja-JP" dirty="0" err="1"/>
-              <a:t>Ví</a:t>
-            </a:r>
-            <a:r>
-              <a:rPr lang="en-US" altLang="ja-JP" dirty="0"/>
-              <a:t> </a:t>
-            </a:r>
-            <a:r>
-              <a:rPr lang="en-US" altLang="ja-JP" dirty="0" err="1"/>
-              <a:t>dụ</a:t>
-            </a:r>
-            <a:r>
-              <a:rPr lang="en-US" altLang="ja-JP" dirty="0"/>
-              <a:t>: Danh </a:t>
-            </a:r>
-            <a:r>
-              <a:rPr lang="en-US" altLang="ja-JP" dirty="0" err="1"/>
-              <a:t>sách</a:t>
-            </a:r>
-            <a:r>
-              <a:rPr lang="en-US" altLang="ja-JP" dirty="0"/>
-              <a:t> </a:t>
-            </a:r>
-            <a:r>
-              <a:rPr lang="en-US" altLang="ja-JP" dirty="0" err="1"/>
-              <a:t>nhân</a:t>
-            </a:r>
-            <a:r>
-              <a:rPr lang="en-US" altLang="ja-JP" dirty="0"/>
-              <a:t> </a:t>
-            </a:r>
-            <a:r>
-              <a:rPr lang="en-US" altLang="ja-JP" dirty="0" err="1"/>
-              <a:t>viên</a:t>
-            </a:r>
-            <a:r>
-              <a:rPr lang="en-US" altLang="ja-JP" dirty="0"/>
-              <a:t> </a:t>
-            </a:r>
-            <a:r>
-              <a:rPr lang="en-US" altLang="ja-JP" dirty="0">
-                <a:sym typeface="Wingdings" panose="05000000000000000000" pitchFamily="2" charset="2"/>
-              </a:rPr>
-              <a:t></a:t>
-            </a:r>
-            <a:r>
-              <a:rPr lang="en-US" altLang="ja-JP" dirty="0"/>
-              <a:t> </a:t>
-            </a:r>
-            <a:r>
-              <a:rPr lang="en-US" altLang="ja-JP" dirty="0" err="1"/>
-              <a:t>Lọc</a:t>
-            </a:r>
-            <a:r>
-              <a:rPr lang="en-US" altLang="ja-JP" dirty="0"/>
-              <a:t> </a:t>
-            </a:r>
-            <a:r>
-              <a:rPr lang="en-US" altLang="ja-JP" dirty="0" err="1"/>
-              <a:t>nhân</a:t>
-            </a:r>
-            <a:r>
-              <a:rPr lang="en-US" altLang="ja-JP" dirty="0"/>
-              <a:t> </a:t>
-            </a:r>
-            <a:r>
-              <a:rPr lang="en-US" altLang="ja-JP" dirty="0" err="1"/>
-              <a:t>viên</a:t>
-            </a:r>
-            <a:r>
-              <a:rPr lang="en-US" altLang="ja-JP" dirty="0"/>
-              <a:t> </a:t>
-            </a:r>
-            <a:r>
-              <a:rPr lang="en-US" altLang="ja-JP" dirty="0" err="1"/>
-              <a:t>trên</a:t>
-            </a:r>
-            <a:r>
-              <a:rPr lang="en-US" altLang="ja-JP" dirty="0"/>
-              <a:t> 18 </a:t>
-            </a:r>
-            <a:r>
-              <a:rPr lang="en-US" altLang="ja-JP" dirty="0" err="1"/>
-              <a:t>tuổi</a:t>
-            </a:r>
-            <a:r>
-              <a:rPr lang="en-US" altLang="ja-JP" dirty="0"/>
-              <a:t> </a:t>
-            </a:r>
-            <a:r>
-              <a:rPr lang="en-US" altLang="ja-JP" dirty="0">
-                <a:sym typeface="Wingdings" panose="05000000000000000000" pitchFamily="2" charset="2"/>
-              </a:rPr>
-              <a:t></a:t>
-            </a:r>
-            <a:r>
-              <a:rPr lang="en-US" altLang="ja-JP" dirty="0"/>
-              <a:t> In </a:t>
-            </a:r>
-            <a:r>
-              <a:rPr lang="en-US" altLang="ja-JP" dirty="0" err="1"/>
-              <a:t>tên</a:t>
-            </a:r>
-            <a:endParaRPr lang="en-US" altLang="ja-JP" dirty="0"/>
-          </a:p>
-          <a:p>
-            <a:pPr algn="just">
-              <a:buFont typeface="Arial" panose="020B0604020202020204" pitchFamily="34" charset="0"/>
-              <a:buChar char="•"/>
-            </a:pPr>
-            <a:endParaRPr lang="en-US" altLang="ja-JP" dirty="0"/>
-          </a:p>
-          <a:p>
-            <a:pPr algn="just">
-              <a:buFont typeface="Arial" panose="020B0604020202020204" pitchFamily="34" charset="0"/>
-              <a:buChar char="•"/>
-            </a:pPr>
-            <a:r>
-              <a:rPr lang="en-US" altLang="ja-JP" dirty="0"/>
-              <a:t>OOP: </a:t>
-            </a:r>
-            <a:r>
-              <a:rPr lang="en-US" altLang="ja-JP" dirty="0" err="1"/>
-              <a:t>Đối</a:t>
-            </a:r>
-            <a:r>
-              <a:rPr lang="en-US" altLang="ja-JP" dirty="0"/>
-              <a:t> </a:t>
-            </a:r>
-            <a:r>
-              <a:rPr lang="en-US" altLang="ja-JP" dirty="0" err="1"/>
-              <a:t>tượng</a:t>
-            </a:r>
-            <a:r>
-              <a:rPr lang="en-US" altLang="ja-JP" dirty="0"/>
-              <a:t> </a:t>
-            </a:r>
-            <a:r>
-              <a:rPr lang="en-US" altLang="ja-JP" dirty="0" err="1"/>
-              <a:t>và</a:t>
-            </a:r>
-            <a:r>
-              <a:rPr lang="en-US" altLang="ja-JP" dirty="0"/>
-              <a:t> </a:t>
-            </a:r>
-            <a:r>
-              <a:rPr lang="en-US" altLang="ja-JP" dirty="0" err="1"/>
-              <a:t>hành</a:t>
-            </a:r>
-            <a:r>
-              <a:rPr lang="en-US" altLang="ja-JP" dirty="0"/>
-              <a:t> vi</a:t>
-            </a:r>
-          </a:p>
-          <a:p>
-            <a:pPr algn="just">
-              <a:buFont typeface="Arial" panose="020B0604020202020204" pitchFamily="34" charset="0"/>
-              <a:buChar char="•"/>
-            </a:pPr>
-            <a:r>
-              <a:rPr lang="en-US" altLang="ja-JP" dirty="0"/>
-              <a:t>FP: </a:t>
-            </a:r>
-            <a:r>
-              <a:rPr lang="en-US" altLang="ja-JP" dirty="0" err="1"/>
-              <a:t>Dữ</a:t>
-            </a:r>
-            <a:r>
-              <a:rPr lang="en-US" altLang="ja-JP" dirty="0"/>
-              <a:t> </a:t>
-            </a:r>
-            <a:r>
-              <a:rPr lang="en-US" altLang="ja-JP" dirty="0" err="1"/>
-              <a:t>liệu</a:t>
-            </a:r>
-            <a:r>
-              <a:rPr lang="en-US" altLang="ja-JP" dirty="0"/>
-              <a:t> </a:t>
-            </a:r>
-            <a:r>
-              <a:rPr lang="en-US" altLang="ja-JP" dirty="0" err="1"/>
-              <a:t>và</a:t>
-            </a:r>
-            <a:r>
-              <a:rPr lang="en-US" altLang="ja-JP" dirty="0"/>
-              <a:t> </a:t>
-            </a:r>
-            <a:r>
-              <a:rPr lang="en-US" altLang="ja-JP" dirty="0" err="1"/>
-              <a:t>hàm</a:t>
-            </a:r>
-            <a:endParaRPr lang="en-US" altLang="ja-JP" dirty="0"/>
-          </a:p>
-          <a:p>
-            <a:pPr algn="just"/>
-            <a:endParaRPr lang="en-US" altLang="ja-JP" dirty="0"/>
-          </a:p>
-          <a:p>
-            <a:endParaRPr lang="ja-JP" altLang="en-US" dirty="0"/>
-          </a:p>
-        </p:txBody>
-      </p:sp>
-    </p:spTree>
-    <p:extLst>
-      <p:ext uri="{BB962C8B-B14F-4D97-AF65-F5344CB8AC3E}">
-        <p14:creationId xmlns:p14="http://schemas.microsoft.com/office/powerpoint/2010/main" val="113548610"/>
-      </p:ext>
-    </p:extLst>
-  </p:cSld>
-  <p:clrMapOvr>
-    <a:masterClrMapping/>
-  </p:clrMapOvr>
-</p:sld>
-</file>
-
-<file path=ppt/slides/slide20.xml><?xml version="1.0" encoding="utf-8"?>
+<file path=ppt/slides/slide19.xml><?xml version="1.0" encoding="utf-8"?>
 <p:sld xmlns:a="http://schemas.openxmlformats.org/drawingml/2006/main" xmlns:r="http://schemas.openxmlformats.org/officeDocument/2006/relationships" xmlns:p="http://schemas.openxmlformats.org/presentationml/2006/main">
   <p:cSld>
     <p:spTree>
@@ -9975,7 +9083,7 @@
               <a:pPr>
                 <a:defRPr/>
               </a:pPr>
-              <a:t>20</a:t>
+              <a:t>19</a:t>
             </a:fld>
             <a:endParaRPr lang="en-US" altLang="ja-JP"/>
           </a:p>
@@ -10347,7 +9455,209 @@
 </p:sld>
 </file>
 
-<file path=ppt/slides/slide21.xml><?xml version="1.0" encoding="utf-8"?>
+<file path=ppt/slides/slide2.xml><?xml version="1.0" encoding="utf-8"?>
+<p:sld xmlns:a="http://schemas.openxmlformats.org/drawingml/2006/main" xmlns:r="http://schemas.openxmlformats.org/officeDocument/2006/relationships" xmlns:p="http://schemas.openxmlformats.org/presentationml/2006/main">
+  <p:cSld>
+    <p:spTree>
+      <p:nvGrpSpPr>
+        <p:cNvPr id="1" name=""/>
+        <p:cNvGrpSpPr/>
+        <p:nvPr/>
+      </p:nvGrpSpPr>
+      <p:grpSpPr>
+        <a:xfrm>
+          <a:off x="0" y="0"/>
+          <a:ext cx="0" cy="0"/>
+          <a:chOff x="0" y="0"/>
+          <a:chExt cx="0" cy="0"/>
+        </a:xfrm>
+      </p:grpSpPr>
+      <p:sp>
+        <p:nvSpPr>
+          <p:cNvPr id="2" name="Text 0"/>
+          <p:cNvSpPr/>
+          <p:nvPr/>
+        </p:nvSpPr>
+        <p:spPr>
+          <a:xfrm>
+            <a:off x="163923" y="404664"/>
+            <a:ext cx="8915400" cy="627698"/>
+          </a:xfrm>
+          <a:prstGeom prst="rect">
+            <a:avLst/>
+          </a:prstGeom>
+          <a:noFill/>
+          <a:ln/>
+        </p:spPr>
+        <p:txBody>
+          <a:bodyPr wrap="square" rtlCol="0" anchor="ctr"/>
+          <a:lstStyle/>
+          <a:p>
+            <a:r>
+              <a:rPr lang="en-US" sz="3200" dirty="0">
+                <a:solidFill>
+                  <a:srgbClr val="1F4E79"/>
+                </a:solidFill>
+                <a:latin typeface="+mj-lt"/>
+              </a:rPr>
+              <a:t>OOP </a:t>
+            </a:r>
+            <a:r>
+              <a:rPr lang="en-US" sz="3200" dirty="0" err="1">
+                <a:solidFill>
+                  <a:srgbClr val="1F4E79"/>
+                </a:solidFill>
+                <a:latin typeface="+mj-lt"/>
+              </a:rPr>
+              <a:t>và</a:t>
+            </a:r>
+            <a:r>
+              <a:rPr lang="en-US" sz="3200" dirty="0">
+                <a:solidFill>
+                  <a:srgbClr val="1F4E79"/>
+                </a:solidFill>
+                <a:latin typeface="+mj-lt"/>
+              </a:rPr>
+              <a:t> Function Programming</a:t>
+            </a:r>
+            <a:endParaRPr lang="en-US" sz="3200" dirty="0">
+              <a:latin typeface="+mj-lt"/>
+            </a:endParaRPr>
+          </a:p>
+        </p:txBody>
+      </p:sp>
+      <p:sp>
+        <p:nvSpPr>
+          <p:cNvPr id="3" name="Text 1"/>
+          <p:cNvSpPr/>
+          <p:nvPr/>
+        </p:nvSpPr>
+        <p:spPr>
+          <a:xfrm>
+            <a:off x="382037" y="1398006"/>
+            <a:ext cx="8848725" cy="2057400"/>
+          </a:xfrm>
+          <a:prstGeom prst="rect">
+            <a:avLst/>
+          </a:prstGeom>
+          <a:noFill/>
+          <a:ln/>
+        </p:spPr>
+        <p:txBody>
+          <a:bodyPr wrap="square" rtlCol="0" anchor="ctr"/>
+          <a:lstStyle/>
+          <a:p>
+            <a:pPr marL="457200" indent="-457200" algn="just">
+              <a:buFont typeface="Arial" panose="020B0604020202020204" pitchFamily="34" charset="0"/>
+              <a:buChar char="•"/>
+            </a:pPr>
+            <a:r>
+              <a:rPr lang="en-US" sz="2800" dirty="0">
+                <a:latin typeface="+mj-lt"/>
+              </a:rPr>
+              <a:t>OOP quản lý trạng thái và mô hình </a:t>
+            </a:r>
+            <a:r>
+              <a:rPr lang="en-US" sz="2800" dirty="0" err="1">
+                <a:latin typeface="+mj-lt"/>
+              </a:rPr>
+              <a:t>nghiệp</a:t>
+            </a:r>
+            <a:r>
+              <a:rPr lang="en-US" sz="2800" dirty="0">
+                <a:latin typeface="+mj-lt"/>
+              </a:rPr>
+              <a:t> </a:t>
+            </a:r>
+            <a:r>
+              <a:rPr lang="en-US" sz="2800" dirty="0" err="1">
+                <a:latin typeface="+mj-lt"/>
+              </a:rPr>
+              <a:t>vụ</a:t>
+            </a:r>
+            <a:endParaRPr lang="en-US" sz="2800" dirty="0">
+              <a:latin typeface="+mj-lt"/>
+            </a:endParaRPr>
+          </a:p>
+          <a:p>
+            <a:pPr marL="457200" indent="-457200" algn="just">
+              <a:buFont typeface="Arial" panose="020B0604020202020204" pitchFamily="34" charset="0"/>
+              <a:buChar char="•"/>
+            </a:pPr>
+            <a:endParaRPr lang="en-US" sz="2800" dirty="0">
+              <a:latin typeface="+mj-lt"/>
+            </a:endParaRPr>
+          </a:p>
+          <a:p>
+            <a:pPr marL="457200" indent="-457200" algn="just">
+              <a:buFont typeface="Arial" panose="020B0604020202020204" pitchFamily="34" charset="0"/>
+              <a:buChar char="•"/>
+            </a:pPr>
+            <a:r>
+              <a:rPr lang="en-US" sz="2800" dirty="0">
+                <a:latin typeface="+mj-lt"/>
+              </a:rPr>
+              <a:t>FP tối ưu cách xử lý </a:t>
+            </a:r>
+            <a:r>
+              <a:rPr lang="en-US" sz="2800" dirty="0" err="1">
+                <a:latin typeface="+mj-lt"/>
+              </a:rPr>
+              <a:t>dữ</a:t>
+            </a:r>
+            <a:r>
+              <a:rPr lang="en-US" sz="2800" dirty="0">
+                <a:latin typeface="+mj-lt"/>
+              </a:rPr>
+              <a:t> </a:t>
+            </a:r>
+            <a:r>
+              <a:rPr lang="en-US" sz="2800" dirty="0" err="1">
+                <a:latin typeface="+mj-lt"/>
+              </a:rPr>
+              <a:t>liệu</a:t>
+            </a:r>
+            <a:endParaRPr lang="en-US" sz="2800" dirty="0">
+              <a:latin typeface="+mj-lt"/>
+            </a:endParaRPr>
+          </a:p>
+          <a:p>
+            <a:pPr marL="457200" indent="-457200" algn="just">
+              <a:buFont typeface="Arial" panose="020B0604020202020204" pitchFamily="34" charset="0"/>
+              <a:buChar char="•"/>
+            </a:pPr>
+            <a:endParaRPr lang="en-US" sz="2800" dirty="0">
+              <a:latin typeface="+mj-lt"/>
+            </a:endParaRPr>
+          </a:p>
+          <a:p>
+            <a:pPr marL="457200" indent="-457200" algn="just">
+              <a:buFont typeface="Arial" panose="020B0604020202020204" pitchFamily="34" charset="0"/>
+              <a:buChar char="•"/>
+            </a:pPr>
+            <a:r>
+              <a:rPr lang="en-US" sz="2800" dirty="0">
+                <a:latin typeface="+mj-lt"/>
+              </a:rPr>
+              <a:t>Java hiện đại = OOP + FP</a:t>
+            </a:r>
+          </a:p>
+        </p:txBody>
+      </p:sp>
+    </p:spTree>
+    <p:extLst>
+      <p:ext uri="{BB962C8B-B14F-4D97-AF65-F5344CB8AC3E}">
+        <p14:creationId xmlns:p14="http://schemas.microsoft.com/office/powerpoint/2010/main" val="223843895"/>
+      </p:ext>
+    </p:extLst>
+  </p:cSld>
+  <p:clrMapOvr>
+    <a:masterClrMapping/>
+  </p:clrMapOvr>
+</p:sld>
+</file>
+
+<file path=ppt/slides/slide20.xml><?xml version="1.0" encoding="utf-8"?>
 <p:sld xmlns:a="http://schemas.openxmlformats.org/drawingml/2006/main" xmlns:r="http://schemas.openxmlformats.org/officeDocument/2006/relationships" xmlns:p="http://schemas.openxmlformats.org/presentationml/2006/main">
   <p:cSld>
     <p:spTree>
@@ -10551,7 +9861,7 @@
               <a:pPr>
                 <a:defRPr/>
               </a:pPr>
-              <a:t>21</a:t>
+              <a:t>20</a:t>
             </a:fld>
             <a:endParaRPr lang="en-US" altLang="ja-JP"/>
           </a:p>
@@ -10570,7 +9880,1214 @@
 </p:sld>
 </file>
 
+<file path=ppt/slides/slide21.xml><?xml version="1.0" encoding="utf-8"?>
+<p:sld xmlns:a="http://schemas.openxmlformats.org/drawingml/2006/main" xmlns:r="http://schemas.openxmlformats.org/officeDocument/2006/relationships" xmlns:p="http://schemas.openxmlformats.org/presentationml/2006/main">
+  <p:cSld>
+    <p:spTree>
+      <p:nvGrpSpPr>
+        <p:cNvPr id="1" name=""/>
+        <p:cNvGrpSpPr/>
+        <p:nvPr/>
+      </p:nvGrpSpPr>
+      <p:grpSpPr>
+        <a:xfrm>
+          <a:off x="0" y="0"/>
+          <a:ext cx="0" cy="0"/>
+          <a:chOff x="0" y="0"/>
+          <a:chExt cx="0" cy="0"/>
+        </a:xfrm>
+      </p:grpSpPr>
+      <p:sp>
+        <p:nvSpPr>
+          <p:cNvPr id="2" name="Title 1">
+            <a:extLst>
+              <a:ext uri="{FF2B5EF4-FFF2-40B4-BE49-F238E27FC236}">
+                <a16:creationId xmlns:a16="http://schemas.microsoft.com/office/drawing/2014/main" id="{8DC4C082-9ED2-2144-ACBD-DE645A35AE86}"/>
+              </a:ext>
+            </a:extLst>
+          </p:cNvPr>
+          <p:cNvSpPr>
+            <a:spLocks noGrp="1"/>
+          </p:cNvSpPr>
+          <p:nvPr>
+            <p:ph type="title"/>
+          </p:nvPr>
+        </p:nvSpPr>
+        <p:spPr/>
+        <p:txBody>
+          <a:bodyPr>
+            <a:normAutofit fontScale="90000"/>
+          </a:bodyPr>
+          <a:lstStyle/>
+          <a:p>
+            <a:r>
+              <a:rPr lang="ja-JP" altLang="ja-JP" dirty="0"/>
+              <a:t>Stream API</a:t>
+            </a:r>
+            <a:endParaRPr kumimoji="1" lang="ja-JP" altLang="en-US" dirty="0"/>
+          </a:p>
+        </p:txBody>
+      </p:sp>
+      <p:sp>
+        <p:nvSpPr>
+          <p:cNvPr id="3" name="Content Placeholder 2">
+            <a:extLst>
+              <a:ext uri="{FF2B5EF4-FFF2-40B4-BE49-F238E27FC236}">
+                <a16:creationId xmlns:a16="http://schemas.microsoft.com/office/drawing/2014/main" id="{ACC44DC1-FEF1-370B-971E-83837E85187B}"/>
+              </a:ext>
+            </a:extLst>
+          </p:cNvPr>
+          <p:cNvSpPr>
+            <a:spLocks noGrp="1"/>
+          </p:cNvSpPr>
+          <p:nvPr>
+            <p:ph idx="1"/>
+          </p:nvPr>
+        </p:nvSpPr>
+        <p:spPr/>
+        <p:txBody>
+          <a:bodyPr/>
+          <a:lstStyle/>
+          <a:p>
+            <a:pPr fontAlgn="t"/>
+            <a:r>
+              <a:rPr lang="ja-JP" altLang="ja-JP" dirty="0"/>
+              <a:t>Nguồn dữ liệu (Source)</a:t>
+            </a:r>
+          </a:p>
+          <a:p>
+            <a:pPr marL="0" indent="0" fontAlgn="t">
+              <a:buNone/>
+            </a:pPr>
+            <a:r>
+              <a:rPr lang="en-US" altLang="ja-JP" dirty="0"/>
+              <a:t>	</a:t>
+            </a:r>
+            <a:r>
+              <a:rPr lang="ja-JP" altLang="ja-JP" dirty="0"/>
+              <a:t>↓</a:t>
+            </a:r>
+          </a:p>
+          <a:p>
+            <a:pPr fontAlgn="t"/>
+            <a:r>
+              <a:rPr lang="ja-JP" altLang="ja-JP" dirty="0"/>
+              <a:t>Xử lý trung gian (Intermediate Operations)</a:t>
+            </a:r>
+          </a:p>
+          <a:p>
+            <a:pPr marL="0" indent="0" fontAlgn="t">
+              <a:buNone/>
+            </a:pPr>
+            <a:r>
+              <a:rPr lang="en-US" altLang="ja-JP" dirty="0"/>
+              <a:t>	</a:t>
+            </a:r>
+            <a:r>
+              <a:rPr lang="ja-JP" altLang="ja-JP" dirty="0"/>
+              <a:t>↓</a:t>
+            </a:r>
+          </a:p>
+          <a:p>
+            <a:pPr fontAlgn="t"/>
+            <a:r>
+              <a:rPr lang="ja-JP" altLang="ja-JP" dirty="0"/>
+              <a:t>Kết thúc (Terminal Operations)</a:t>
+            </a:r>
+          </a:p>
+          <a:p>
+            <a:endParaRPr kumimoji="1" lang="ja-JP" altLang="en-US" dirty="0"/>
+          </a:p>
+        </p:txBody>
+      </p:sp>
+      <p:sp>
+        <p:nvSpPr>
+          <p:cNvPr id="4" name="Slide Number Placeholder 3">
+            <a:extLst>
+              <a:ext uri="{FF2B5EF4-FFF2-40B4-BE49-F238E27FC236}">
+                <a16:creationId xmlns:a16="http://schemas.microsoft.com/office/drawing/2014/main" id="{B4DAAAAA-E5FD-95CD-647D-AB6FF51BB2DF}"/>
+              </a:ext>
+            </a:extLst>
+          </p:cNvPr>
+          <p:cNvSpPr>
+            <a:spLocks noGrp="1"/>
+          </p:cNvSpPr>
+          <p:nvPr>
+            <p:ph type="sldNum" sz="quarter" idx="11"/>
+          </p:nvPr>
+        </p:nvSpPr>
+        <p:spPr/>
+        <p:txBody>
+          <a:bodyPr/>
+          <a:lstStyle/>
+          <a:p>
+            <a:pPr>
+              <a:defRPr/>
+            </a:pPr>
+            <a:r>
+              <a:rPr lang="en-US" altLang="ja-JP"/>
+              <a:t>Page:</a:t>
+            </a:r>
+            <a:r>
+              <a:rPr lang="ja-JP" altLang="en-US"/>
+              <a:t> </a:t>
+            </a:r>
+            <a:fld id="{DC07468E-517B-4E9D-8840-A4568A307980}" type="slidenum">
+              <a:rPr lang="en-US" altLang="ja-JP" smtClean="0"/>
+              <a:pPr>
+                <a:defRPr/>
+              </a:pPr>
+              <a:t>21</a:t>
+            </a:fld>
+            <a:endParaRPr lang="en-US" altLang="ja-JP"/>
+          </a:p>
+        </p:txBody>
+      </p:sp>
+    </p:spTree>
+    <p:extLst>
+      <p:ext uri="{BB962C8B-B14F-4D97-AF65-F5344CB8AC3E}">
+        <p14:creationId xmlns:p14="http://schemas.microsoft.com/office/powerpoint/2010/main" val="1801423288"/>
+      </p:ext>
+    </p:extLst>
+  </p:cSld>
+  <p:clrMapOvr>
+    <a:masterClrMapping/>
+  </p:clrMapOvr>
+</p:sld>
+</file>
+
 <file path=ppt/slides/slide22.xml><?xml version="1.0" encoding="utf-8"?>
+<p:sld xmlns:a="http://schemas.openxmlformats.org/drawingml/2006/main" xmlns:r="http://schemas.openxmlformats.org/officeDocument/2006/relationships" xmlns:p="http://schemas.openxmlformats.org/presentationml/2006/main">
+  <p:cSld>
+    <p:spTree>
+      <p:nvGrpSpPr>
+        <p:cNvPr id="1" name=""/>
+        <p:cNvGrpSpPr/>
+        <p:nvPr/>
+      </p:nvGrpSpPr>
+      <p:grpSpPr>
+        <a:xfrm>
+          <a:off x="0" y="0"/>
+          <a:ext cx="0" cy="0"/>
+          <a:chOff x="0" y="0"/>
+          <a:chExt cx="0" cy="0"/>
+        </a:xfrm>
+      </p:grpSpPr>
+      <p:sp>
+        <p:nvSpPr>
+          <p:cNvPr id="2" name="Title 1">
+            <a:extLst>
+              <a:ext uri="{FF2B5EF4-FFF2-40B4-BE49-F238E27FC236}">
+                <a16:creationId xmlns:a16="http://schemas.microsoft.com/office/drawing/2014/main" id="{DABE1D86-31B8-3771-F624-ACA02482D698}"/>
+              </a:ext>
+            </a:extLst>
+          </p:cNvPr>
+          <p:cNvSpPr>
+            <a:spLocks noGrp="1"/>
+          </p:cNvSpPr>
+          <p:nvPr>
+            <p:ph type="title"/>
+          </p:nvPr>
+        </p:nvSpPr>
+        <p:spPr/>
+        <p:txBody>
+          <a:bodyPr>
+            <a:normAutofit fontScale="90000"/>
+          </a:bodyPr>
+          <a:lstStyle/>
+          <a:p>
+            <a:r>
+              <a:rPr kumimoji="1" lang="en-US" altLang="ja-JP" dirty="0" err="1"/>
+              <a:t>Nguồn</a:t>
+            </a:r>
+            <a:r>
+              <a:rPr kumimoji="1" lang="en-US" altLang="ja-JP" dirty="0"/>
+              <a:t> </a:t>
+            </a:r>
+            <a:r>
+              <a:rPr kumimoji="1" lang="en-US" altLang="ja-JP" dirty="0" err="1"/>
+              <a:t>dữ</a:t>
+            </a:r>
+            <a:r>
+              <a:rPr kumimoji="1" lang="en-US" altLang="ja-JP" dirty="0"/>
+              <a:t> </a:t>
+            </a:r>
+            <a:r>
+              <a:rPr kumimoji="1" lang="en-US" altLang="ja-JP" dirty="0" err="1"/>
+              <a:t>liệu</a:t>
+            </a:r>
+            <a:endParaRPr kumimoji="1" lang="ja-JP" altLang="en-US" dirty="0"/>
+          </a:p>
+        </p:txBody>
+      </p:sp>
+      <p:sp>
+        <p:nvSpPr>
+          <p:cNvPr id="3" name="Content Placeholder 2">
+            <a:extLst>
+              <a:ext uri="{FF2B5EF4-FFF2-40B4-BE49-F238E27FC236}">
+                <a16:creationId xmlns:a16="http://schemas.microsoft.com/office/drawing/2014/main" id="{71466DBA-1DBB-6D89-EC9B-A8E154AAEE3D}"/>
+              </a:ext>
+            </a:extLst>
+          </p:cNvPr>
+          <p:cNvSpPr>
+            <a:spLocks noGrp="1"/>
+          </p:cNvSpPr>
+          <p:nvPr>
+            <p:ph idx="1"/>
+          </p:nvPr>
+        </p:nvSpPr>
+        <p:spPr/>
+        <p:txBody>
+          <a:bodyPr>
+            <a:normAutofit/>
+          </a:bodyPr>
+          <a:lstStyle/>
+          <a:p>
+            <a:pPr fontAlgn="t"/>
+            <a:r>
+              <a:rPr lang="ja-JP" altLang="ja-JP" dirty="0"/>
+              <a:t>Tạo Stream</a:t>
+            </a:r>
+            <a:endParaRPr lang="en-US" altLang="ja-JP" dirty="0"/>
+          </a:p>
+          <a:p>
+            <a:pPr lvl="1" fontAlgn="t"/>
+            <a:r>
+              <a:rPr lang="ja-JP" altLang="ja-JP" dirty="0"/>
+              <a:t>Tạo Stream từ Collection</a:t>
+            </a:r>
+          </a:p>
+          <a:p>
+            <a:pPr fontAlgn="t">
+              <a:lnSpc>
+                <a:spcPct val="100000"/>
+              </a:lnSpc>
+              <a:buNone/>
+            </a:pPr>
+            <a:r>
+              <a:rPr lang="en-US" altLang="ja-JP" dirty="0"/>
+              <a:t>		</a:t>
+            </a:r>
+            <a:r>
+              <a:rPr lang="ja-JP" altLang="ja-JP" dirty="0"/>
+              <a:t>list.stream();</a:t>
+            </a:r>
+          </a:p>
+          <a:p>
+            <a:pPr lvl="1" fontAlgn="t">
+              <a:buNone/>
+            </a:pPr>
+            <a:r>
+              <a:rPr lang="ja-JP" altLang="ja-JP" dirty="0"/>
+              <a:t>Ví dụ:</a:t>
+            </a:r>
+          </a:p>
+          <a:p>
+            <a:pPr lvl="1" fontAlgn="t">
+              <a:buNone/>
+            </a:pPr>
+            <a:r>
+              <a:rPr lang="ja-JP" altLang="ja-JP" i="1" dirty="0"/>
+              <a:t>List&lt;String&gt; names = List.of("An", "Bình", "Cường");</a:t>
+            </a:r>
+          </a:p>
+          <a:p>
+            <a:pPr lvl="1" fontAlgn="t">
+              <a:buNone/>
+            </a:pPr>
+            <a:r>
+              <a:rPr lang="ja-JP" altLang="ja-JP" i="1" dirty="0"/>
+              <a:t>names.stream();</a:t>
+            </a:r>
+          </a:p>
+          <a:p>
+            <a:pPr lvl="1" fontAlgn="t"/>
+            <a:r>
+              <a:rPr lang="en-US" altLang="ja-JP" dirty="0"/>
+              <a:t>	</a:t>
+            </a:r>
+            <a:r>
+              <a:rPr lang="ja-JP" altLang="ja-JP" dirty="0"/>
+              <a:t>Tạo Stream trực tiếp</a:t>
+            </a:r>
+            <a:r>
+              <a:rPr lang="en-US" altLang="ja-JP" dirty="0"/>
+              <a:t> : </a:t>
+            </a:r>
+            <a:r>
+              <a:rPr lang="ja-JP" altLang="ja-JP" b="1" dirty="0"/>
+              <a:t>Stream.of()</a:t>
+            </a:r>
+            <a:endParaRPr lang="en-US" altLang="ja-JP" dirty="0"/>
+          </a:p>
+          <a:p>
+            <a:pPr fontAlgn="t">
+              <a:buNone/>
+            </a:pPr>
+            <a:r>
+              <a:rPr lang="en-US" altLang="ja-JP" dirty="0"/>
+              <a:t>	</a:t>
+            </a:r>
+            <a:r>
+              <a:rPr lang="en-US" altLang="ja-JP" sz="2800" i="1" dirty="0" err="1"/>
+              <a:t>Ví</a:t>
+            </a:r>
+            <a:r>
+              <a:rPr lang="en-US" altLang="ja-JP" sz="2800" i="1" dirty="0"/>
+              <a:t> </a:t>
+            </a:r>
+            <a:r>
+              <a:rPr lang="en-US" altLang="ja-JP" sz="2800" i="1" dirty="0" err="1"/>
+              <a:t>dụ</a:t>
+            </a:r>
+            <a:r>
+              <a:rPr lang="en-US" altLang="ja-JP" sz="2800" i="1" dirty="0"/>
+              <a:t>: </a:t>
+            </a:r>
+            <a:r>
+              <a:rPr lang="ja-JP" altLang="ja-JP" sz="2800" i="1" dirty="0"/>
+              <a:t>Stream.of("A", "B", "C");</a:t>
+            </a:r>
+          </a:p>
+          <a:p>
+            <a:pPr fontAlgn="t">
+              <a:lnSpc>
+                <a:spcPct val="100000"/>
+              </a:lnSpc>
+              <a:buNone/>
+            </a:pPr>
+            <a:endParaRPr lang="ja-JP" altLang="ja-JP" dirty="0"/>
+          </a:p>
+          <a:p>
+            <a:endParaRPr kumimoji="1" lang="ja-JP" altLang="en-US" dirty="0"/>
+          </a:p>
+        </p:txBody>
+      </p:sp>
+      <p:sp>
+        <p:nvSpPr>
+          <p:cNvPr id="4" name="Slide Number Placeholder 3">
+            <a:extLst>
+              <a:ext uri="{FF2B5EF4-FFF2-40B4-BE49-F238E27FC236}">
+                <a16:creationId xmlns:a16="http://schemas.microsoft.com/office/drawing/2014/main" id="{C69E40CB-BC58-C50E-805E-35F3BFC17F66}"/>
+              </a:ext>
+            </a:extLst>
+          </p:cNvPr>
+          <p:cNvSpPr>
+            <a:spLocks noGrp="1"/>
+          </p:cNvSpPr>
+          <p:nvPr>
+            <p:ph type="sldNum" sz="quarter" idx="11"/>
+          </p:nvPr>
+        </p:nvSpPr>
+        <p:spPr/>
+        <p:txBody>
+          <a:bodyPr/>
+          <a:lstStyle/>
+          <a:p>
+            <a:pPr>
+              <a:defRPr/>
+            </a:pPr>
+            <a:r>
+              <a:rPr lang="en-US" altLang="ja-JP"/>
+              <a:t>Page:</a:t>
+            </a:r>
+            <a:r>
+              <a:rPr lang="ja-JP" altLang="en-US"/>
+              <a:t> </a:t>
+            </a:r>
+            <a:fld id="{DC07468E-517B-4E9D-8840-A4568A307980}" type="slidenum">
+              <a:rPr lang="en-US" altLang="ja-JP" smtClean="0"/>
+              <a:pPr>
+                <a:defRPr/>
+              </a:pPr>
+              <a:t>22</a:t>
+            </a:fld>
+            <a:endParaRPr lang="en-US" altLang="ja-JP"/>
+          </a:p>
+        </p:txBody>
+      </p:sp>
+    </p:spTree>
+    <p:extLst>
+      <p:ext uri="{BB962C8B-B14F-4D97-AF65-F5344CB8AC3E}">
+        <p14:creationId xmlns:p14="http://schemas.microsoft.com/office/powerpoint/2010/main" val="1749262178"/>
+      </p:ext>
+    </p:extLst>
+  </p:cSld>
+  <p:clrMapOvr>
+    <a:masterClrMapping/>
+  </p:clrMapOvr>
+</p:sld>
+</file>
+
+<file path=ppt/slides/slide23.xml><?xml version="1.0" encoding="utf-8"?>
+<p:sld xmlns:a="http://schemas.openxmlformats.org/drawingml/2006/main" xmlns:r="http://schemas.openxmlformats.org/officeDocument/2006/relationships" xmlns:p="http://schemas.openxmlformats.org/presentationml/2006/main">
+  <p:cSld>
+    <p:spTree>
+      <p:nvGrpSpPr>
+        <p:cNvPr id="1" name=""/>
+        <p:cNvGrpSpPr/>
+        <p:nvPr/>
+      </p:nvGrpSpPr>
+      <p:grpSpPr>
+        <a:xfrm>
+          <a:off x="0" y="0"/>
+          <a:ext cx="0" cy="0"/>
+          <a:chOff x="0" y="0"/>
+          <a:chExt cx="0" cy="0"/>
+        </a:xfrm>
+      </p:grpSpPr>
+      <p:sp>
+        <p:nvSpPr>
+          <p:cNvPr id="2" name="Title 1">
+            <a:extLst>
+              <a:ext uri="{FF2B5EF4-FFF2-40B4-BE49-F238E27FC236}">
+                <a16:creationId xmlns:a16="http://schemas.microsoft.com/office/drawing/2014/main" id="{C62B8BFC-76DD-7163-58CB-3DD8ED7B552C}"/>
+              </a:ext>
+            </a:extLst>
+          </p:cNvPr>
+          <p:cNvSpPr>
+            <a:spLocks noGrp="1"/>
+          </p:cNvSpPr>
+          <p:nvPr>
+            <p:ph type="title"/>
+          </p:nvPr>
+        </p:nvSpPr>
+        <p:spPr/>
+        <p:txBody>
+          <a:bodyPr>
+            <a:normAutofit fontScale="90000"/>
+          </a:bodyPr>
+          <a:lstStyle/>
+          <a:p>
+            <a:r>
+              <a:rPr lang="en-US" altLang="ja-JP" dirty="0"/>
+              <a:t>I</a:t>
+            </a:r>
+            <a:r>
+              <a:rPr lang="ja-JP" altLang="ja-JP" dirty="0"/>
+              <a:t>ntermediate Operations</a:t>
+            </a:r>
+            <a:r>
+              <a:rPr lang="en-US" altLang="ja-JP" dirty="0"/>
+              <a:t> - </a:t>
+            </a:r>
+            <a:r>
+              <a:rPr kumimoji="1" lang="en-US" altLang="ja-JP" dirty="0"/>
+              <a:t>Các </a:t>
+            </a:r>
+            <a:r>
+              <a:rPr kumimoji="1" lang="en-US" altLang="ja-JP" dirty="0" err="1"/>
+              <a:t>hàm</a:t>
+            </a:r>
+            <a:r>
+              <a:rPr kumimoji="1" lang="en-US" altLang="ja-JP" dirty="0"/>
+              <a:t> </a:t>
+            </a:r>
+            <a:r>
+              <a:rPr kumimoji="1" lang="en-US" altLang="ja-JP" dirty="0" err="1"/>
+              <a:t>biến</a:t>
+            </a:r>
+            <a:r>
+              <a:rPr kumimoji="1" lang="en-US" altLang="ja-JP" dirty="0"/>
+              <a:t> </a:t>
+            </a:r>
+            <a:r>
+              <a:rPr kumimoji="1" lang="en-US" altLang="ja-JP" dirty="0" err="1"/>
+              <a:t>đổi</a:t>
+            </a:r>
+            <a:r>
+              <a:rPr kumimoji="1" lang="en-US" altLang="ja-JP" dirty="0"/>
+              <a:t> </a:t>
+            </a:r>
+            <a:r>
+              <a:rPr kumimoji="1" lang="en-US" altLang="ja-JP" dirty="0" err="1"/>
+              <a:t>dữ</a:t>
+            </a:r>
+            <a:r>
+              <a:rPr kumimoji="1" lang="en-US" altLang="ja-JP" dirty="0"/>
+              <a:t> </a:t>
+            </a:r>
+            <a:r>
+              <a:rPr kumimoji="1" lang="en-US" altLang="ja-JP" dirty="0" err="1"/>
+              <a:t>liệu</a:t>
+            </a:r>
+            <a:endParaRPr kumimoji="1" lang="ja-JP" altLang="en-US" dirty="0"/>
+          </a:p>
+        </p:txBody>
+      </p:sp>
+      <p:sp>
+        <p:nvSpPr>
+          <p:cNvPr id="3" name="Content Placeholder 2">
+            <a:extLst>
+              <a:ext uri="{FF2B5EF4-FFF2-40B4-BE49-F238E27FC236}">
+                <a16:creationId xmlns:a16="http://schemas.microsoft.com/office/drawing/2014/main" id="{076C31A5-EF7A-1668-3090-2D9245AE9B09}"/>
+              </a:ext>
+            </a:extLst>
+          </p:cNvPr>
+          <p:cNvSpPr>
+            <a:spLocks noGrp="1"/>
+          </p:cNvSpPr>
+          <p:nvPr>
+            <p:ph idx="1"/>
+          </p:nvPr>
+        </p:nvSpPr>
+        <p:spPr/>
+        <p:txBody>
+          <a:bodyPr/>
+          <a:lstStyle/>
+          <a:p>
+            <a:pPr fontAlgn="t">
+              <a:lnSpc>
+                <a:spcPct val="100000"/>
+              </a:lnSpc>
+              <a:buNone/>
+            </a:pPr>
+            <a:r>
+              <a:rPr lang="ja-JP" altLang="ja-JP" dirty="0"/>
+              <a:t>Đặc điểm:</a:t>
+            </a:r>
+          </a:p>
+          <a:p>
+            <a:pPr lvl="0" fontAlgn="t">
+              <a:buFont typeface="Arial" panose="020B0604020202020204" pitchFamily="34" charset="0"/>
+              <a:buChar char="•"/>
+            </a:pPr>
+            <a:r>
+              <a:rPr lang="ja-JP" altLang="ja-JP" dirty="0"/>
+              <a:t>Trả về Stream mới</a:t>
+            </a:r>
+          </a:p>
+          <a:p>
+            <a:pPr lvl="0" fontAlgn="t">
+              <a:buFont typeface="Arial" panose="020B0604020202020204" pitchFamily="34" charset="0"/>
+              <a:buChar char="•"/>
+            </a:pPr>
+            <a:r>
+              <a:rPr lang="ja-JP" altLang="ja-JP" dirty="0"/>
+              <a:t>Chưa chạy ngay</a:t>
+            </a:r>
+          </a:p>
+          <a:p>
+            <a:pPr lvl="0" fontAlgn="t">
+              <a:buFont typeface="Arial" panose="020B0604020202020204" pitchFamily="34" charset="0"/>
+              <a:buChar char="•"/>
+            </a:pPr>
+            <a:r>
+              <a:rPr lang="ja-JP" altLang="ja-JP" dirty="0"/>
+              <a:t>Chỉ chạy khi có Terminal Operation</a:t>
+            </a:r>
+          </a:p>
+          <a:p>
+            <a:r>
+              <a:rPr lang="ja-JP" altLang="ja-JP" dirty="0"/>
+              <a:t>filter()</a:t>
+            </a:r>
+            <a:r>
+              <a:rPr lang="en-US" altLang="ja-JP" dirty="0"/>
+              <a:t>, </a:t>
+            </a:r>
+            <a:r>
+              <a:rPr lang="ja-JP" altLang="ja-JP" dirty="0"/>
+              <a:t>map() </a:t>
+            </a:r>
+            <a:r>
+              <a:rPr lang="en-US" altLang="ja-JP" dirty="0"/>
+              <a:t>,</a:t>
+            </a:r>
+            <a:r>
+              <a:rPr lang="ja-JP" altLang="ja-JP" dirty="0"/>
+              <a:t>flatMap() </a:t>
+            </a:r>
+            <a:r>
+              <a:rPr lang="en-US" altLang="ja-JP" dirty="0"/>
+              <a:t>,</a:t>
+            </a:r>
+            <a:r>
+              <a:rPr lang="ja-JP" altLang="ja-JP" dirty="0"/>
+              <a:t>distinct()</a:t>
+            </a:r>
+            <a:r>
+              <a:rPr lang="en-US" altLang="ja-JP" dirty="0"/>
+              <a:t>, </a:t>
+            </a:r>
+            <a:r>
+              <a:rPr lang="ja-JP" altLang="ja-JP" dirty="0"/>
+              <a:t>sorted()</a:t>
+            </a:r>
+            <a:r>
+              <a:rPr lang="en-US" altLang="ja-JP" dirty="0"/>
+              <a:t>,…</a:t>
+            </a:r>
+            <a:endParaRPr lang="ja-JP" altLang="ja-JP" dirty="0"/>
+          </a:p>
+          <a:p>
+            <a:endParaRPr lang="ja-JP" altLang="ja-JP" dirty="0"/>
+          </a:p>
+          <a:p>
+            <a:endParaRPr lang="ja-JP" altLang="ja-JP" dirty="0"/>
+          </a:p>
+          <a:p>
+            <a:endParaRPr lang="ja-JP" altLang="ja-JP" dirty="0"/>
+          </a:p>
+          <a:p>
+            <a:endParaRPr lang="ja-JP" altLang="ja-JP" dirty="0"/>
+          </a:p>
+          <a:p>
+            <a:endParaRPr kumimoji="1" lang="ja-JP" altLang="en-US" dirty="0"/>
+          </a:p>
+        </p:txBody>
+      </p:sp>
+      <p:sp>
+        <p:nvSpPr>
+          <p:cNvPr id="4" name="Slide Number Placeholder 3">
+            <a:extLst>
+              <a:ext uri="{FF2B5EF4-FFF2-40B4-BE49-F238E27FC236}">
+                <a16:creationId xmlns:a16="http://schemas.microsoft.com/office/drawing/2014/main" id="{8B6C69A1-285D-1E17-14B1-7AA185F52849}"/>
+              </a:ext>
+            </a:extLst>
+          </p:cNvPr>
+          <p:cNvSpPr>
+            <a:spLocks noGrp="1"/>
+          </p:cNvSpPr>
+          <p:nvPr>
+            <p:ph type="sldNum" sz="quarter" idx="11"/>
+          </p:nvPr>
+        </p:nvSpPr>
+        <p:spPr/>
+        <p:txBody>
+          <a:bodyPr/>
+          <a:lstStyle/>
+          <a:p>
+            <a:pPr>
+              <a:defRPr/>
+            </a:pPr>
+            <a:r>
+              <a:rPr lang="en-US" altLang="ja-JP"/>
+              <a:t>Page:</a:t>
+            </a:r>
+            <a:r>
+              <a:rPr lang="ja-JP" altLang="en-US"/>
+              <a:t> </a:t>
+            </a:r>
+            <a:fld id="{DC07468E-517B-4E9D-8840-A4568A307980}" type="slidenum">
+              <a:rPr lang="en-US" altLang="ja-JP" smtClean="0"/>
+              <a:pPr>
+                <a:defRPr/>
+              </a:pPr>
+              <a:t>23</a:t>
+            </a:fld>
+            <a:endParaRPr lang="en-US" altLang="ja-JP"/>
+          </a:p>
+        </p:txBody>
+      </p:sp>
+    </p:spTree>
+    <p:extLst>
+      <p:ext uri="{BB962C8B-B14F-4D97-AF65-F5344CB8AC3E}">
+        <p14:creationId xmlns:p14="http://schemas.microsoft.com/office/powerpoint/2010/main" val="769532370"/>
+      </p:ext>
+    </p:extLst>
+  </p:cSld>
+  <p:clrMapOvr>
+    <a:masterClrMapping/>
+  </p:clrMapOvr>
+</p:sld>
+</file>
+
+<file path=ppt/slides/slide24.xml><?xml version="1.0" encoding="utf-8"?>
+<p:sld xmlns:a="http://schemas.openxmlformats.org/drawingml/2006/main" xmlns:r="http://schemas.openxmlformats.org/officeDocument/2006/relationships" xmlns:p="http://schemas.openxmlformats.org/presentationml/2006/main">
+  <p:cSld>
+    <p:spTree>
+      <p:nvGrpSpPr>
+        <p:cNvPr id="1" name=""/>
+        <p:cNvGrpSpPr/>
+        <p:nvPr/>
+      </p:nvGrpSpPr>
+      <p:grpSpPr>
+        <a:xfrm>
+          <a:off x="0" y="0"/>
+          <a:ext cx="0" cy="0"/>
+          <a:chOff x="0" y="0"/>
+          <a:chExt cx="0" cy="0"/>
+        </a:xfrm>
+      </p:grpSpPr>
+      <p:sp>
+        <p:nvSpPr>
+          <p:cNvPr id="2" name="Title 1">
+            <a:extLst>
+              <a:ext uri="{FF2B5EF4-FFF2-40B4-BE49-F238E27FC236}">
+                <a16:creationId xmlns:a16="http://schemas.microsoft.com/office/drawing/2014/main" id="{805BAE4A-84EA-D621-9299-2029F246A5B2}"/>
+              </a:ext>
+            </a:extLst>
+          </p:cNvPr>
+          <p:cNvSpPr>
+            <a:spLocks noGrp="1"/>
+          </p:cNvSpPr>
+          <p:nvPr>
+            <p:ph type="title"/>
+          </p:nvPr>
+        </p:nvSpPr>
+        <p:spPr/>
+        <p:txBody>
+          <a:bodyPr>
+            <a:normAutofit fontScale="90000"/>
+          </a:bodyPr>
+          <a:lstStyle/>
+          <a:p>
+            <a:r>
+              <a:rPr lang="ja-JP" altLang="ja-JP" dirty="0"/>
+              <a:t>Terminal Operations</a:t>
+            </a:r>
+            <a:r>
+              <a:rPr lang="en-US" altLang="ja-JP" dirty="0"/>
+              <a:t> - </a:t>
+            </a:r>
+            <a:r>
+              <a:rPr lang="ja-JP" altLang="ja-JP" dirty="0"/>
+              <a:t>Kích hoạt Stream chạy thật</a:t>
+            </a:r>
+            <a:endParaRPr kumimoji="1" lang="ja-JP" altLang="en-US" dirty="0"/>
+          </a:p>
+        </p:txBody>
+      </p:sp>
+      <p:sp>
+        <p:nvSpPr>
+          <p:cNvPr id="3" name="Content Placeholder 2">
+            <a:extLst>
+              <a:ext uri="{FF2B5EF4-FFF2-40B4-BE49-F238E27FC236}">
+                <a16:creationId xmlns:a16="http://schemas.microsoft.com/office/drawing/2014/main" id="{5BA81E2C-3A89-4934-7995-0D92AC78A2F7}"/>
+              </a:ext>
+            </a:extLst>
+          </p:cNvPr>
+          <p:cNvSpPr>
+            <a:spLocks noGrp="1"/>
+          </p:cNvSpPr>
+          <p:nvPr>
+            <p:ph idx="1"/>
+          </p:nvPr>
+        </p:nvSpPr>
+        <p:spPr>
+          <a:xfrm>
+            <a:off x="128464" y="1219200"/>
+            <a:ext cx="9649072" cy="5328592"/>
+          </a:xfrm>
+        </p:spPr>
+        <p:txBody>
+          <a:bodyPr/>
+          <a:lstStyle/>
+          <a:p>
+            <a:r>
+              <a:rPr lang="ja-JP" altLang="ja-JP" dirty="0"/>
+              <a:t>forEach()</a:t>
+            </a:r>
+            <a:r>
+              <a:rPr lang="en-US" altLang="ja-JP" dirty="0"/>
+              <a:t>: </a:t>
+            </a:r>
+            <a:r>
+              <a:rPr lang="ja-JP" altLang="ja-JP" dirty="0"/>
+              <a:t>Duyệt từng phần tử</a:t>
+            </a:r>
+            <a:endParaRPr lang="en-US" altLang="ja-JP" dirty="0"/>
+          </a:p>
+          <a:p>
+            <a:r>
+              <a:rPr lang="ja-JP" altLang="ja-JP" dirty="0"/>
+              <a:t>collect()</a:t>
+            </a:r>
+            <a:r>
+              <a:rPr lang="en-US" altLang="ja-JP" dirty="0"/>
+              <a:t>: </a:t>
+            </a:r>
+            <a:r>
+              <a:rPr lang="ja-JP" altLang="ja-JP" dirty="0"/>
+              <a:t>Thu kết quả về Collection</a:t>
+            </a:r>
+            <a:endParaRPr lang="en-US" altLang="ja-JP" dirty="0"/>
+          </a:p>
+          <a:p>
+            <a:r>
+              <a:rPr lang="en-US" altLang="ja-JP" dirty="0" err="1"/>
+              <a:t>toSet</a:t>
+            </a:r>
+            <a:r>
+              <a:rPr lang="en-US" altLang="ja-JP" dirty="0"/>
+              <a:t>(), </a:t>
+            </a:r>
+            <a:r>
+              <a:rPr lang="en-US" altLang="ja-JP" dirty="0" err="1"/>
+              <a:t>toMap</a:t>
+            </a:r>
+            <a:r>
+              <a:rPr lang="en-US" altLang="ja-JP" dirty="0"/>
+              <a:t>()</a:t>
+            </a:r>
+          </a:p>
+          <a:p>
+            <a:r>
+              <a:rPr lang="en-US" altLang="ja-JP" dirty="0"/>
+              <a:t>count():</a:t>
+            </a:r>
+            <a:r>
+              <a:rPr lang="ja-JP" altLang="ja-JP" dirty="0"/>
+              <a:t>Đếm số lượng</a:t>
+            </a:r>
+          </a:p>
+          <a:p>
+            <a:r>
+              <a:rPr lang="ja-JP" altLang="ja-JP" dirty="0"/>
+              <a:t>findFirst()</a:t>
+            </a:r>
+            <a:r>
+              <a:rPr lang="en-US" altLang="ja-JP" dirty="0"/>
+              <a:t>: </a:t>
+            </a:r>
+            <a:r>
+              <a:rPr lang="ja-JP" altLang="ja-JP" dirty="0"/>
+              <a:t>Lấy phần tử đầu tiên.</a:t>
+            </a:r>
+            <a:endParaRPr lang="en-US" altLang="ja-JP" dirty="0"/>
+          </a:p>
+          <a:p>
+            <a:r>
+              <a:rPr lang="en-US" altLang="ja-JP" dirty="0"/>
+              <a:t>…</a:t>
+            </a:r>
+          </a:p>
+          <a:p>
+            <a:r>
+              <a:rPr lang="en-US" altLang="ja-JP" dirty="0"/>
+              <a:t>…</a:t>
+            </a:r>
+          </a:p>
+          <a:p>
+            <a:r>
+              <a:rPr lang="ja-JP" altLang="ja-JP" dirty="0"/>
+              <a:t>reduce()</a:t>
+            </a:r>
+            <a:r>
+              <a:rPr lang="en-US" altLang="ja-JP" dirty="0"/>
+              <a:t>: </a:t>
+            </a:r>
+            <a:r>
+              <a:rPr lang="ja-JP" altLang="ja-JP" dirty="0"/>
+              <a:t>Gộp nhiều phần tử thành một kết quả</a:t>
+            </a:r>
+          </a:p>
+          <a:p>
+            <a:endParaRPr lang="ja-JP" altLang="ja-JP" dirty="0"/>
+          </a:p>
+          <a:p>
+            <a:endParaRPr lang="en-US" altLang="ja-JP" dirty="0"/>
+          </a:p>
+          <a:p>
+            <a:endParaRPr lang="ja-JP" altLang="ja-JP" dirty="0"/>
+          </a:p>
+          <a:p>
+            <a:endParaRPr lang="ja-JP" altLang="ja-JP" dirty="0"/>
+          </a:p>
+          <a:p>
+            <a:endParaRPr lang="ja-JP" altLang="ja-JP" dirty="0"/>
+          </a:p>
+          <a:p>
+            <a:endParaRPr lang="ja-JP" altLang="ja-JP" dirty="0"/>
+          </a:p>
+          <a:p>
+            <a:endParaRPr lang="ja-JP" altLang="ja-JP" dirty="0"/>
+          </a:p>
+          <a:p>
+            <a:endParaRPr kumimoji="1" lang="ja-JP" altLang="en-US" dirty="0"/>
+          </a:p>
+        </p:txBody>
+      </p:sp>
+      <p:sp>
+        <p:nvSpPr>
+          <p:cNvPr id="4" name="Slide Number Placeholder 3">
+            <a:extLst>
+              <a:ext uri="{FF2B5EF4-FFF2-40B4-BE49-F238E27FC236}">
+                <a16:creationId xmlns:a16="http://schemas.microsoft.com/office/drawing/2014/main" id="{0C28B2ED-58CE-8B32-820D-B7F77100BEFD}"/>
+              </a:ext>
+            </a:extLst>
+          </p:cNvPr>
+          <p:cNvSpPr>
+            <a:spLocks noGrp="1"/>
+          </p:cNvSpPr>
+          <p:nvPr>
+            <p:ph type="sldNum" sz="quarter" idx="11"/>
+          </p:nvPr>
+        </p:nvSpPr>
+        <p:spPr/>
+        <p:txBody>
+          <a:bodyPr/>
+          <a:lstStyle/>
+          <a:p>
+            <a:pPr>
+              <a:defRPr/>
+            </a:pPr>
+            <a:r>
+              <a:rPr lang="en-US" altLang="ja-JP"/>
+              <a:t>Page:</a:t>
+            </a:r>
+            <a:r>
+              <a:rPr lang="ja-JP" altLang="en-US"/>
+              <a:t> </a:t>
+            </a:r>
+            <a:fld id="{DC07468E-517B-4E9D-8840-A4568A307980}" type="slidenum">
+              <a:rPr lang="en-US" altLang="ja-JP" smtClean="0"/>
+              <a:pPr>
+                <a:defRPr/>
+              </a:pPr>
+              <a:t>24</a:t>
+            </a:fld>
+            <a:endParaRPr lang="en-US" altLang="ja-JP"/>
+          </a:p>
+        </p:txBody>
+      </p:sp>
+    </p:spTree>
+    <p:extLst>
+      <p:ext uri="{BB962C8B-B14F-4D97-AF65-F5344CB8AC3E}">
+        <p14:creationId xmlns:p14="http://schemas.microsoft.com/office/powerpoint/2010/main" val="3481011409"/>
+      </p:ext>
+    </p:extLst>
+  </p:cSld>
+  <p:clrMapOvr>
+    <a:masterClrMapping/>
+  </p:clrMapOvr>
+</p:sld>
+</file>
+
+<file path=ppt/slides/slide25.xml><?xml version="1.0" encoding="utf-8"?>
+<p:sld xmlns:a="http://schemas.openxmlformats.org/drawingml/2006/main" xmlns:r="http://schemas.openxmlformats.org/officeDocument/2006/relationships" xmlns:p="http://schemas.openxmlformats.org/presentationml/2006/main">
+  <p:cSld>
+    <p:spTree>
+      <p:nvGrpSpPr>
+        <p:cNvPr id="1" name=""/>
+        <p:cNvGrpSpPr/>
+        <p:nvPr/>
+      </p:nvGrpSpPr>
+      <p:grpSpPr>
+        <a:xfrm>
+          <a:off x="0" y="0"/>
+          <a:ext cx="0" cy="0"/>
+          <a:chOff x="0" y="0"/>
+          <a:chExt cx="0" cy="0"/>
+        </a:xfrm>
+      </p:grpSpPr>
+      <p:sp>
+        <p:nvSpPr>
+          <p:cNvPr id="2" name="Title 1">
+            <a:extLst>
+              <a:ext uri="{FF2B5EF4-FFF2-40B4-BE49-F238E27FC236}">
+                <a16:creationId xmlns:a16="http://schemas.microsoft.com/office/drawing/2014/main" id="{392EF75F-401B-C676-C27A-49995091CEDA}"/>
+              </a:ext>
+            </a:extLst>
+          </p:cNvPr>
+          <p:cNvSpPr>
+            <a:spLocks noGrp="1"/>
+          </p:cNvSpPr>
+          <p:nvPr>
+            <p:ph type="title"/>
+          </p:nvPr>
+        </p:nvSpPr>
+        <p:spPr/>
+        <p:txBody>
+          <a:bodyPr>
+            <a:normAutofit fontScale="90000"/>
+          </a:bodyPr>
+          <a:lstStyle/>
+          <a:p>
+            <a:r>
+              <a:rPr kumimoji="1" lang="en-US" altLang="ja-JP" dirty="0"/>
+              <a:t>Function Interface</a:t>
+            </a:r>
+            <a:endParaRPr kumimoji="1" lang="ja-JP" altLang="en-US" dirty="0"/>
+          </a:p>
+        </p:txBody>
+      </p:sp>
+      <p:sp>
+        <p:nvSpPr>
+          <p:cNvPr id="3" name="Content Placeholder 2">
+            <a:extLst>
+              <a:ext uri="{FF2B5EF4-FFF2-40B4-BE49-F238E27FC236}">
+                <a16:creationId xmlns:a16="http://schemas.microsoft.com/office/drawing/2014/main" id="{F92E4A60-22DA-91D4-F018-44FD29457381}"/>
+              </a:ext>
+            </a:extLst>
+          </p:cNvPr>
+          <p:cNvSpPr>
+            <a:spLocks noGrp="1"/>
+          </p:cNvSpPr>
+          <p:nvPr>
+            <p:ph idx="1"/>
+          </p:nvPr>
+        </p:nvSpPr>
+        <p:spPr/>
+        <p:txBody>
+          <a:bodyPr>
+            <a:normAutofit/>
+          </a:bodyPr>
+          <a:lstStyle/>
+          <a:p>
+            <a:pPr marL="0" indent="0" algn="just">
+              <a:buNone/>
+            </a:pPr>
+            <a:r>
+              <a:rPr lang="en-US" altLang="ja-JP" sz="2800" dirty="0">
+                <a:sym typeface="Wingdings" panose="05000000000000000000" pitchFamily="2" charset="2"/>
+              </a:rPr>
+              <a:t> </a:t>
+            </a:r>
+            <a:r>
+              <a:rPr lang="ja-JP" altLang="ja-JP" sz="2800" dirty="0"/>
+              <a:t>Trình biên dịch Java hoạt động mà không cần biết tên phương thức, kiểu dữ liệu tham số và kiểu trả về</a:t>
+            </a:r>
+            <a:endParaRPr lang="en-US" altLang="ja-JP" sz="2800" dirty="0"/>
+          </a:p>
+          <a:p>
+            <a:pPr algn="just"/>
+            <a:r>
+              <a:rPr lang="ja-JP" altLang="ja-JP" sz="2800" dirty="0"/>
+              <a:t>Một </a:t>
+            </a:r>
+            <a:r>
+              <a:rPr lang="en-US" altLang="ja-JP" sz="2800" dirty="0"/>
+              <a:t>Function Interface </a:t>
+            </a:r>
+            <a:r>
+              <a:rPr lang="ja-JP" altLang="ja-JP" sz="2800" dirty="0"/>
+              <a:t>là một giao diện chỉ định chính xác một phương thức trừu tượng duy nhất (S</a:t>
+            </a:r>
+            <a:r>
+              <a:rPr lang="en-US" altLang="ja-JP" sz="2800" dirty="0"/>
+              <a:t>ingle </a:t>
+            </a:r>
+            <a:r>
+              <a:rPr lang="ja-JP" altLang="ja-JP" sz="2800" dirty="0"/>
+              <a:t>A</a:t>
+            </a:r>
+            <a:r>
+              <a:rPr lang="en-US" altLang="ja-JP" sz="2800" dirty="0" err="1"/>
+              <a:t>bstract</a:t>
+            </a:r>
+            <a:r>
+              <a:rPr lang="en-US" altLang="ja-JP" sz="2800" dirty="0"/>
+              <a:t> </a:t>
+            </a:r>
+            <a:r>
+              <a:rPr lang="ja-JP" altLang="ja-JP" sz="2800" dirty="0"/>
+              <a:t>M</a:t>
+            </a:r>
+            <a:r>
+              <a:rPr lang="en-US" altLang="ja-JP" sz="2800" dirty="0" err="1"/>
+              <a:t>ethod</a:t>
+            </a:r>
+            <a:r>
+              <a:rPr lang="en-US" altLang="ja-JP" sz="2800" dirty="0"/>
+              <a:t> - SAM</a:t>
+            </a:r>
+            <a:r>
+              <a:rPr lang="ja-JP" altLang="ja-JP" sz="2800" dirty="0"/>
+              <a:t>). </a:t>
+            </a:r>
+            <a:endParaRPr lang="en-US" altLang="ja-JP" sz="2800" dirty="0"/>
+          </a:p>
+          <a:p>
+            <a:pPr algn="just"/>
+            <a:r>
+              <a:rPr lang="ja-JP" altLang="ja-JP" sz="2800" dirty="0"/>
+              <a:t>@ FunctionalInterface </a:t>
+            </a:r>
+            <a:r>
+              <a:rPr lang="en-US" altLang="ja-JP" sz="2800" dirty="0"/>
+              <a:t>: Khai </a:t>
+            </a:r>
+            <a:r>
+              <a:rPr lang="en-US" altLang="ja-JP" sz="2800" dirty="0" err="1"/>
+              <a:t>báo</a:t>
+            </a:r>
+            <a:r>
+              <a:rPr lang="en-US" altLang="ja-JP" sz="2800" dirty="0"/>
+              <a:t> </a:t>
+            </a:r>
+            <a:r>
+              <a:rPr lang="ja-JP" altLang="ja-JP" sz="2800" dirty="0"/>
+              <a:t>trên đầu </a:t>
+            </a:r>
+            <a:r>
+              <a:rPr lang="en-US" altLang="ja-JP" sz="2800" dirty="0"/>
+              <a:t>Interface</a:t>
+            </a:r>
+            <a:r>
+              <a:rPr lang="ja-JP" altLang="ja-JP" sz="2800" dirty="0"/>
+              <a:t> để đảm bảo rằng không thể thêm phương thức trừu tượng thứ hai. </a:t>
+            </a:r>
+            <a:endParaRPr lang="en-US" altLang="ja-JP" sz="2800" dirty="0"/>
+          </a:p>
+          <a:p>
+            <a:pPr algn="just"/>
+            <a:r>
+              <a:rPr lang="ja-JP" altLang="ja-JP" sz="2800" dirty="0"/>
+              <a:t>Chỉ cho phép 1 phương thức trừu tượng</a:t>
+            </a:r>
+            <a:endParaRPr kumimoji="1" lang="ja-JP" altLang="en-US" sz="2400" dirty="0"/>
+          </a:p>
+        </p:txBody>
+      </p:sp>
+      <p:sp>
+        <p:nvSpPr>
+          <p:cNvPr id="4" name="Slide Number Placeholder 3">
+            <a:extLst>
+              <a:ext uri="{FF2B5EF4-FFF2-40B4-BE49-F238E27FC236}">
+                <a16:creationId xmlns:a16="http://schemas.microsoft.com/office/drawing/2014/main" id="{65B2FAAA-377B-5951-9A4F-2AB5DAB2516C}"/>
+              </a:ext>
+            </a:extLst>
+          </p:cNvPr>
+          <p:cNvSpPr>
+            <a:spLocks noGrp="1"/>
+          </p:cNvSpPr>
+          <p:nvPr>
+            <p:ph type="sldNum" sz="quarter" idx="11"/>
+          </p:nvPr>
+        </p:nvSpPr>
+        <p:spPr/>
+        <p:txBody>
+          <a:bodyPr/>
+          <a:lstStyle/>
+          <a:p>
+            <a:pPr>
+              <a:defRPr/>
+            </a:pPr>
+            <a:r>
+              <a:rPr lang="en-US" altLang="ja-JP"/>
+              <a:t>Page:</a:t>
+            </a:r>
+            <a:r>
+              <a:rPr lang="ja-JP" altLang="en-US"/>
+              <a:t> </a:t>
+            </a:r>
+            <a:fld id="{DC07468E-517B-4E9D-8840-A4568A307980}" type="slidenum">
+              <a:rPr lang="en-US" altLang="ja-JP" smtClean="0"/>
+              <a:pPr>
+                <a:defRPr/>
+              </a:pPr>
+              <a:t>25</a:t>
+            </a:fld>
+            <a:endParaRPr lang="en-US" altLang="ja-JP"/>
+          </a:p>
+        </p:txBody>
+      </p:sp>
+    </p:spTree>
+    <p:extLst>
+      <p:ext uri="{BB962C8B-B14F-4D97-AF65-F5344CB8AC3E}">
+        <p14:creationId xmlns:p14="http://schemas.microsoft.com/office/powerpoint/2010/main" val="1792861020"/>
+      </p:ext>
+    </p:extLst>
+  </p:cSld>
+  <p:clrMapOvr>
+    <a:masterClrMapping/>
+  </p:clrMapOvr>
+</p:sld>
+</file>
+
+<file path=ppt/slides/slide26.xml><?xml version="1.0" encoding="utf-8"?>
 <p:sld xmlns:a="http://schemas.openxmlformats.org/drawingml/2006/main" xmlns:r="http://schemas.openxmlformats.org/officeDocument/2006/relationships" xmlns:p="http://schemas.openxmlformats.org/presentationml/2006/main">
   <p:cSld>
     <p:spTree>
@@ -10916,7 +11433,7 @@
               <a:pPr>
                 <a:defRPr/>
               </a:pPr>
-              <a:t>22</a:t>
+              <a:t>26</a:t>
             </a:fld>
             <a:endParaRPr lang="en-US" altLang="ja-JP"/>
           </a:p>
@@ -10935,7 +11452,1245 @@
 </p:sld>
 </file>
 
+<file path=ppt/slides/slide27.xml><?xml version="1.0" encoding="utf-8"?>
+<p:sld xmlns:a="http://schemas.openxmlformats.org/drawingml/2006/main" xmlns:r="http://schemas.openxmlformats.org/officeDocument/2006/relationships" xmlns:p="http://schemas.openxmlformats.org/presentationml/2006/main">
+  <p:cSld>
+    <p:spTree>
+      <p:nvGrpSpPr>
+        <p:cNvPr id="1" name=""/>
+        <p:cNvGrpSpPr/>
+        <p:nvPr/>
+      </p:nvGrpSpPr>
+      <p:grpSpPr>
+        <a:xfrm>
+          <a:off x="0" y="0"/>
+          <a:ext cx="0" cy="0"/>
+          <a:chOff x="0" y="0"/>
+          <a:chExt cx="0" cy="0"/>
+        </a:xfrm>
+      </p:grpSpPr>
+      <p:sp>
+        <p:nvSpPr>
+          <p:cNvPr id="2" name="Title 1">
+            <a:extLst>
+              <a:ext uri="{FF2B5EF4-FFF2-40B4-BE49-F238E27FC236}">
+                <a16:creationId xmlns:a16="http://schemas.microsoft.com/office/drawing/2014/main" id="{4197FD2C-249B-323F-263E-384382DDE855}"/>
+              </a:ext>
+            </a:extLst>
+          </p:cNvPr>
+          <p:cNvSpPr>
+            <a:spLocks noGrp="1"/>
+          </p:cNvSpPr>
+          <p:nvPr>
+            <p:ph type="title"/>
+          </p:nvPr>
+        </p:nvSpPr>
+        <p:spPr/>
+        <p:txBody>
+          <a:bodyPr>
+            <a:normAutofit fontScale="90000"/>
+          </a:bodyPr>
+          <a:lstStyle/>
+          <a:p>
+            <a:r>
+              <a:rPr lang="en-US" altLang="ja-JP" dirty="0">
+                <a:solidFill>
+                  <a:srgbClr val="000000"/>
+                </a:solidFill>
+              </a:rPr>
+              <a:t>Function&lt;T,R&gt; : </a:t>
+            </a:r>
+            <a:r>
+              <a:rPr lang="en-US" altLang="ja-JP" dirty="0" err="1">
+                <a:solidFill>
+                  <a:srgbClr val="000000"/>
+                </a:solidFill>
+              </a:rPr>
+              <a:t>Biến</a:t>
+            </a:r>
+            <a:r>
+              <a:rPr lang="en-US" altLang="ja-JP" dirty="0">
+                <a:solidFill>
+                  <a:srgbClr val="000000"/>
+                </a:solidFill>
+              </a:rPr>
+              <a:t> </a:t>
+            </a:r>
+            <a:r>
+              <a:rPr lang="en-US" altLang="ja-JP" dirty="0" err="1">
+                <a:solidFill>
+                  <a:srgbClr val="000000"/>
+                </a:solidFill>
+              </a:rPr>
+              <a:t>đổi</a:t>
+            </a:r>
+            <a:r>
+              <a:rPr lang="en-US" altLang="ja-JP" dirty="0">
+                <a:solidFill>
+                  <a:srgbClr val="000000"/>
+                </a:solidFill>
+              </a:rPr>
+              <a:t> </a:t>
+            </a:r>
+            <a:r>
+              <a:rPr lang="en-US" altLang="ja-JP" dirty="0" err="1">
+                <a:solidFill>
+                  <a:srgbClr val="000000"/>
+                </a:solidFill>
+              </a:rPr>
+              <a:t>dữ</a:t>
+            </a:r>
+            <a:r>
+              <a:rPr lang="en-US" altLang="ja-JP" dirty="0">
+                <a:solidFill>
+                  <a:srgbClr val="000000"/>
+                </a:solidFill>
+              </a:rPr>
+              <a:t> </a:t>
+            </a:r>
+            <a:r>
+              <a:rPr lang="en-US" altLang="ja-JP" dirty="0" err="1">
+                <a:solidFill>
+                  <a:srgbClr val="000000"/>
+                </a:solidFill>
+              </a:rPr>
+              <a:t>liệu</a:t>
+            </a:r>
+            <a:endParaRPr kumimoji="1" lang="ja-JP" altLang="en-US" dirty="0"/>
+          </a:p>
+        </p:txBody>
+      </p:sp>
+      <p:sp>
+        <p:nvSpPr>
+          <p:cNvPr id="3" name="Content Placeholder 2">
+            <a:extLst>
+              <a:ext uri="{FF2B5EF4-FFF2-40B4-BE49-F238E27FC236}">
+                <a16:creationId xmlns:a16="http://schemas.microsoft.com/office/drawing/2014/main" id="{0C76022A-DE68-23B7-0B46-C4E6C5FC8A9F}"/>
+              </a:ext>
+            </a:extLst>
+          </p:cNvPr>
+          <p:cNvSpPr>
+            <a:spLocks noGrp="1"/>
+          </p:cNvSpPr>
+          <p:nvPr>
+            <p:ph idx="1"/>
+          </p:nvPr>
+        </p:nvSpPr>
+        <p:spPr/>
+        <p:txBody>
+          <a:bodyPr>
+            <a:normAutofit/>
+          </a:bodyPr>
+          <a:lstStyle/>
+          <a:p>
+            <a:r>
+              <a:rPr lang="ja-JP" altLang="ja-JP" sz="2800" dirty="0"/>
+              <a:t>Function&lt;String, Integer&gt; length =  s -&gt; s.length();</a:t>
+            </a:r>
+            <a:endParaRPr lang="en-US" altLang="ja-JP" sz="2800" dirty="0"/>
+          </a:p>
+          <a:p>
+            <a:r>
+              <a:rPr lang="ja-JP" altLang="ja-JP" sz="2800" dirty="0"/>
+              <a:t>System.out.println(length.apply("Java"));</a:t>
+            </a:r>
+          </a:p>
+          <a:p>
+            <a:endParaRPr lang="en-US" altLang="ja-JP" sz="2800" dirty="0"/>
+          </a:p>
+          <a:p>
+            <a:r>
+              <a:rPr lang="en-US" altLang="ja-JP" sz="2800" dirty="0" err="1"/>
+              <a:t>Kết</a:t>
+            </a:r>
+            <a:r>
+              <a:rPr lang="en-US" altLang="ja-JP" sz="2800" dirty="0"/>
+              <a:t> </a:t>
+            </a:r>
+            <a:r>
+              <a:rPr lang="en-US" altLang="ja-JP" sz="2800" dirty="0" err="1"/>
+              <a:t>quả</a:t>
+            </a:r>
+            <a:r>
+              <a:rPr lang="en-US" altLang="ja-JP" sz="2800" dirty="0"/>
+              <a:t>: 4</a:t>
+            </a:r>
+            <a:endParaRPr lang="ja-JP" altLang="ja-JP" sz="2800" dirty="0"/>
+          </a:p>
+          <a:p>
+            <a:endParaRPr kumimoji="1" lang="ja-JP" altLang="en-US" sz="2800" dirty="0"/>
+          </a:p>
+        </p:txBody>
+      </p:sp>
+      <p:sp>
+        <p:nvSpPr>
+          <p:cNvPr id="4" name="Slide Number Placeholder 3">
+            <a:extLst>
+              <a:ext uri="{FF2B5EF4-FFF2-40B4-BE49-F238E27FC236}">
+                <a16:creationId xmlns:a16="http://schemas.microsoft.com/office/drawing/2014/main" id="{FDF1FBA5-BB88-5195-6B46-AC71FAF0DF15}"/>
+              </a:ext>
+            </a:extLst>
+          </p:cNvPr>
+          <p:cNvSpPr>
+            <a:spLocks noGrp="1"/>
+          </p:cNvSpPr>
+          <p:nvPr>
+            <p:ph type="sldNum" sz="quarter" idx="11"/>
+          </p:nvPr>
+        </p:nvSpPr>
+        <p:spPr/>
+        <p:txBody>
+          <a:bodyPr/>
+          <a:lstStyle/>
+          <a:p>
+            <a:pPr>
+              <a:defRPr/>
+            </a:pPr>
+            <a:r>
+              <a:rPr lang="en-US" altLang="ja-JP"/>
+              <a:t>Page:</a:t>
+            </a:r>
+            <a:r>
+              <a:rPr lang="ja-JP" altLang="en-US"/>
+              <a:t> </a:t>
+            </a:r>
+            <a:fld id="{DC07468E-517B-4E9D-8840-A4568A307980}" type="slidenum">
+              <a:rPr lang="en-US" altLang="ja-JP" smtClean="0"/>
+              <a:pPr>
+                <a:defRPr/>
+              </a:pPr>
+              <a:t>27</a:t>
+            </a:fld>
+            <a:endParaRPr lang="en-US" altLang="ja-JP"/>
+          </a:p>
+        </p:txBody>
+      </p:sp>
+    </p:spTree>
+    <p:extLst>
+      <p:ext uri="{BB962C8B-B14F-4D97-AF65-F5344CB8AC3E}">
+        <p14:creationId xmlns:p14="http://schemas.microsoft.com/office/powerpoint/2010/main" val="4110830437"/>
+      </p:ext>
+    </p:extLst>
+  </p:cSld>
+  <p:clrMapOvr>
+    <a:masterClrMapping/>
+  </p:clrMapOvr>
+</p:sld>
+</file>
+
+<file path=ppt/slides/slide28.xml><?xml version="1.0" encoding="utf-8"?>
+<p:sld xmlns:a="http://schemas.openxmlformats.org/drawingml/2006/main" xmlns:r="http://schemas.openxmlformats.org/officeDocument/2006/relationships" xmlns:p="http://schemas.openxmlformats.org/presentationml/2006/main">
+  <p:cSld>
+    <p:spTree>
+      <p:nvGrpSpPr>
+        <p:cNvPr id="1" name="">
+          <a:extLst>
+            <a:ext uri="{FF2B5EF4-FFF2-40B4-BE49-F238E27FC236}">
+              <a16:creationId xmlns:a16="http://schemas.microsoft.com/office/drawing/2014/main" id="{D487E13B-B200-C527-EAB9-69749738C97E}"/>
+            </a:ext>
+          </a:extLst>
+        </p:cNvPr>
+        <p:cNvGrpSpPr/>
+        <p:nvPr/>
+      </p:nvGrpSpPr>
+      <p:grpSpPr>
+        <a:xfrm>
+          <a:off x="0" y="0"/>
+          <a:ext cx="0" cy="0"/>
+          <a:chOff x="0" y="0"/>
+          <a:chExt cx="0" cy="0"/>
+        </a:xfrm>
+      </p:grpSpPr>
+      <p:sp>
+        <p:nvSpPr>
+          <p:cNvPr id="2" name="Title 1">
+            <a:extLst>
+              <a:ext uri="{FF2B5EF4-FFF2-40B4-BE49-F238E27FC236}">
+                <a16:creationId xmlns:a16="http://schemas.microsoft.com/office/drawing/2014/main" id="{463E5B1C-695B-569C-FC68-4214E42EC67D}"/>
+              </a:ext>
+            </a:extLst>
+          </p:cNvPr>
+          <p:cNvSpPr>
+            <a:spLocks noGrp="1"/>
+          </p:cNvSpPr>
+          <p:nvPr>
+            <p:ph type="title"/>
+          </p:nvPr>
+        </p:nvSpPr>
+        <p:spPr/>
+        <p:txBody>
+          <a:bodyPr>
+            <a:normAutofit fontScale="90000"/>
+          </a:bodyPr>
+          <a:lstStyle/>
+          <a:p>
+            <a:r>
+              <a:rPr lang="en-US" altLang="ja-JP" dirty="0">
+                <a:solidFill>
+                  <a:srgbClr val="000000"/>
+                </a:solidFill>
+              </a:rPr>
+              <a:t>Predicate&lt;T&gt; : </a:t>
+            </a:r>
+            <a:r>
+              <a:rPr lang="en-US" altLang="ja-JP" dirty="0" err="1">
+                <a:solidFill>
+                  <a:srgbClr val="000000"/>
+                </a:solidFill>
+              </a:rPr>
+              <a:t>Kiểm</a:t>
+            </a:r>
+            <a:r>
+              <a:rPr lang="en-US" altLang="ja-JP" dirty="0">
+                <a:solidFill>
+                  <a:srgbClr val="000000"/>
+                </a:solidFill>
+              </a:rPr>
+              <a:t> </a:t>
+            </a:r>
+            <a:r>
+              <a:rPr lang="en-US" altLang="ja-JP" dirty="0" err="1">
+                <a:solidFill>
+                  <a:srgbClr val="000000"/>
+                </a:solidFill>
+              </a:rPr>
+              <a:t>tra</a:t>
+            </a:r>
+            <a:r>
+              <a:rPr lang="en-US" altLang="ja-JP" dirty="0">
+                <a:solidFill>
+                  <a:srgbClr val="000000"/>
+                </a:solidFill>
+              </a:rPr>
+              <a:t> </a:t>
+            </a:r>
+            <a:r>
+              <a:rPr lang="en-US" altLang="ja-JP" dirty="0" err="1">
+                <a:solidFill>
+                  <a:srgbClr val="000000"/>
+                </a:solidFill>
+              </a:rPr>
+              <a:t>điều</a:t>
+            </a:r>
+            <a:r>
+              <a:rPr lang="en-US" altLang="ja-JP" dirty="0">
+                <a:solidFill>
+                  <a:srgbClr val="000000"/>
+                </a:solidFill>
+              </a:rPr>
+              <a:t> </a:t>
+            </a:r>
+            <a:r>
+              <a:rPr lang="en-US" altLang="ja-JP" dirty="0" err="1">
+                <a:solidFill>
+                  <a:srgbClr val="000000"/>
+                </a:solidFill>
+              </a:rPr>
+              <a:t>kiện</a:t>
+            </a:r>
+            <a:endParaRPr lang="en-US" altLang="ja-JP" dirty="0"/>
+          </a:p>
+        </p:txBody>
+      </p:sp>
+      <p:sp>
+        <p:nvSpPr>
+          <p:cNvPr id="3" name="Content Placeholder 2">
+            <a:extLst>
+              <a:ext uri="{FF2B5EF4-FFF2-40B4-BE49-F238E27FC236}">
+                <a16:creationId xmlns:a16="http://schemas.microsoft.com/office/drawing/2014/main" id="{457F6EEC-7C56-B18F-8A7A-A1D9F7957BB8}"/>
+              </a:ext>
+            </a:extLst>
+          </p:cNvPr>
+          <p:cNvSpPr>
+            <a:spLocks noGrp="1"/>
+          </p:cNvSpPr>
+          <p:nvPr>
+            <p:ph idx="1"/>
+          </p:nvPr>
+        </p:nvSpPr>
+        <p:spPr/>
+        <p:txBody>
+          <a:bodyPr>
+            <a:normAutofit/>
+          </a:bodyPr>
+          <a:lstStyle/>
+          <a:p>
+            <a:r>
+              <a:rPr lang="ja-JP" altLang="ja-JP" sz="2800" dirty="0"/>
+              <a:t>Predicate&lt;Integer&gt; isAdult =</a:t>
+            </a:r>
+            <a:r>
+              <a:rPr lang="en-US" altLang="ja-JP" sz="2800" dirty="0"/>
+              <a:t> </a:t>
+            </a:r>
+            <a:r>
+              <a:rPr lang="ja-JP" altLang="ja-JP" sz="2800" dirty="0"/>
+              <a:t>age -&gt; age &gt;= 18;</a:t>
+            </a:r>
+          </a:p>
+          <a:p>
+            <a:r>
+              <a:rPr lang="ja-JP" altLang="ja-JP" sz="2800" dirty="0"/>
+              <a:t>System.out.println(isAdult.test(20));</a:t>
+            </a:r>
+          </a:p>
+          <a:p>
+            <a:endParaRPr lang="en-US" altLang="ja-JP" sz="2800" dirty="0"/>
+          </a:p>
+          <a:p>
+            <a:r>
+              <a:rPr lang="en-US" altLang="ja-JP" sz="2800" dirty="0" err="1"/>
+              <a:t>Kết</a:t>
+            </a:r>
+            <a:r>
+              <a:rPr lang="en-US" altLang="ja-JP" sz="2800" dirty="0"/>
+              <a:t> </a:t>
+            </a:r>
+            <a:r>
+              <a:rPr lang="en-US" altLang="ja-JP" sz="2800" dirty="0" err="1"/>
+              <a:t>quả</a:t>
+            </a:r>
+            <a:r>
+              <a:rPr lang="en-US" altLang="ja-JP" sz="2800" dirty="0"/>
+              <a:t>: True</a:t>
+            </a:r>
+            <a:endParaRPr lang="ja-JP" altLang="ja-JP" sz="2800" dirty="0"/>
+          </a:p>
+          <a:p>
+            <a:endParaRPr kumimoji="1" lang="ja-JP" altLang="en-US" sz="2800" dirty="0"/>
+          </a:p>
+        </p:txBody>
+      </p:sp>
+      <p:sp>
+        <p:nvSpPr>
+          <p:cNvPr id="4" name="Slide Number Placeholder 3">
+            <a:extLst>
+              <a:ext uri="{FF2B5EF4-FFF2-40B4-BE49-F238E27FC236}">
+                <a16:creationId xmlns:a16="http://schemas.microsoft.com/office/drawing/2014/main" id="{0EC0EB6F-8295-03F3-C673-E91923650F2B}"/>
+              </a:ext>
+            </a:extLst>
+          </p:cNvPr>
+          <p:cNvSpPr>
+            <a:spLocks noGrp="1"/>
+          </p:cNvSpPr>
+          <p:nvPr>
+            <p:ph type="sldNum" sz="quarter" idx="11"/>
+          </p:nvPr>
+        </p:nvSpPr>
+        <p:spPr/>
+        <p:txBody>
+          <a:bodyPr/>
+          <a:lstStyle/>
+          <a:p>
+            <a:pPr>
+              <a:defRPr/>
+            </a:pPr>
+            <a:r>
+              <a:rPr lang="en-US" altLang="ja-JP"/>
+              <a:t>Page:</a:t>
+            </a:r>
+            <a:r>
+              <a:rPr lang="ja-JP" altLang="en-US"/>
+              <a:t> </a:t>
+            </a:r>
+            <a:fld id="{DC07468E-517B-4E9D-8840-A4568A307980}" type="slidenum">
+              <a:rPr lang="en-US" altLang="ja-JP" smtClean="0"/>
+              <a:pPr>
+                <a:defRPr/>
+              </a:pPr>
+              <a:t>28</a:t>
+            </a:fld>
+            <a:endParaRPr lang="en-US" altLang="ja-JP"/>
+          </a:p>
+        </p:txBody>
+      </p:sp>
+    </p:spTree>
+    <p:extLst>
+      <p:ext uri="{BB962C8B-B14F-4D97-AF65-F5344CB8AC3E}">
+        <p14:creationId xmlns:p14="http://schemas.microsoft.com/office/powerpoint/2010/main" val="3549906401"/>
+      </p:ext>
+    </p:extLst>
+  </p:cSld>
+  <p:clrMapOvr>
+    <a:masterClrMapping/>
+  </p:clrMapOvr>
+</p:sld>
+</file>
+
+<file path=ppt/slides/slide29.xml><?xml version="1.0" encoding="utf-8"?>
+<p:sld xmlns:a="http://schemas.openxmlformats.org/drawingml/2006/main" xmlns:r="http://schemas.openxmlformats.org/officeDocument/2006/relationships" xmlns:p="http://schemas.openxmlformats.org/presentationml/2006/main">
+  <p:cSld>
+    <p:spTree>
+      <p:nvGrpSpPr>
+        <p:cNvPr id="1" name="">
+          <a:extLst>
+            <a:ext uri="{FF2B5EF4-FFF2-40B4-BE49-F238E27FC236}">
+              <a16:creationId xmlns:a16="http://schemas.microsoft.com/office/drawing/2014/main" id="{0FF48B7D-FE98-6F8A-1ED9-8E7450CD0CAD}"/>
+            </a:ext>
+          </a:extLst>
+        </p:cNvPr>
+        <p:cNvGrpSpPr/>
+        <p:nvPr/>
+      </p:nvGrpSpPr>
+      <p:grpSpPr>
+        <a:xfrm>
+          <a:off x="0" y="0"/>
+          <a:ext cx="0" cy="0"/>
+          <a:chOff x="0" y="0"/>
+          <a:chExt cx="0" cy="0"/>
+        </a:xfrm>
+      </p:grpSpPr>
+      <p:sp>
+        <p:nvSpPr>
+          <p:cNvPr id="2" name="Title 1">
+            <a:extLst>
+              <a:ext uri="{FF2B5EF4-FFF2-40B4-BE49-F238E27FC236}">
+                <a16:creationId xmlns:a16="http://schemas.microsoft.com/office/drawing/2014/main" id="{09D37D74-0B67-8C36-D678-F19B0E1299D4}"/>
+              </a:ext>
+            </a:extLst>
+          </p:cNvPr>
+          <p:cNvSpPr>
+            <a:spLocks noGrp="1"/>
+          </p:cNvSpPr>
+          <p:nvPr>
+            <p:ph type="title"/>
+          </p:nvPr>
+        </p:nvSpPr>
+        <p:spPr/>
+        <p:txBody>
+          <a:bodyPr>
+            <a:normAutofit fontScale="90000"/>
+          </a:bodyPr>
+          <a:lstStyle/>
+          <a:p>
+            <a:r>
+              <a:rPr lang="en-US" altLang="ja-JP" dirty="0">
+                <a:solidFill>
+                  <a:srgbClr val="000000"/>
+                </a:solidFill>
+              </a:rPr>
+              <a:t>Consumer&lt;T&gt; : </a:t>
+            </a:r>
+            <a:r>
+              <a:rPr lang="en-US" altLang="ja-JP" dirty="0" err="1">
+                <a:solidFill>
+                  <a:srgbClr val="000000"/>
+                </a:solidFill>
+              </a:rPr>
+              <a:t>Thực</a:t>
+            </a:r>
+            <a:r>
+              <a:rPr lang="en-US" altLang="ja-JP" dirty="0">
+                <a:solidFill>
+                  <a:srgbClr val="000000"/>
+                </a:solidFill>
+              </a:rPr>
+              <a:t> </a:t>
+            </a:r>
+            <a:r>
+              <a:rPr lang="en-US" altLang="ja-JP" dirty="0" err="1">
+                <a:solidFill>
+                  <a:srgbClr val="000000"/>
+                </a:solidFill>
+              </a:rPr>
+              <a:t>hiện</a:t>
+            </a:r>
+            <a:r>
+              <a:rPr lang="en-US" altLang="ja-JP" dirty="0">
+                <a:solidFill>
+                  <a:srgbClr val="000000"/>
+                </a:solidFill>
+              </a:rPr>
+              <a:t> </a:t>
+            </a:r>
+            <a:r>
+              <a:rPr lang="en-US" altLang="ja-JP" dirty="0" err="1">
+                <a:solidFill>
+                  <a:srgbClr val="000000"/>
+                </a:solidFill>
+              </a:rPr>
+              <a:t>hành</a:t>
+            </a:r>
+            <a:r>
+              <a:rPr lang="en-US" altLang="ja-JP" dirty="0">
+                <a:solidFill>
+                  <a:srgbClr val="000000"/>
+                </a:solidFill>
+              </a:rPr>
+              <a:t> </a:t>
+            </a:r>
+            <a:r>
+              <a:rPr lang="en-US" altLang="ja-JP" dirty="0" err="1">
+                <a:solidFill>
+                  <a:srgbClr val="000000"/>
+                </a:solidFill>
+              </a:rPr>
+              <a:t>động</a:t>
+            </a:r>
+            <a:endParaRPr lang="en-US" altLang="ja-JP" dirty="0"/>
+          </a:p>
+        </p:txBody>
+      </p:sp>
+      <p:sp>
+        <p:nvSpPr>
+          <p:cNvPr id="3" name="Content Placeholder 2">
+            <a:extLst>
+              <a:ext uri="{FF2B5EF4-FFF2-40B4-BE49-F238E27FC236}">
+                <a16:creationId xmlns:a16="http://schemas.microsoft.com/office/drawing/2014/main" id="{FFD8461E-3AFA-59E6-668E-F206D88297E0}"/>
+              </a:ext>
+            </a:extLst>
+          </p:cNvPr>
+          <p:cNvSpPr>
+            <a:spLocks noGrp="1"/>
+          </p:cNvSpPr>
+          <p:nvPr>
+            <p:ph idx="1"/>
+          </p:nvPr>
+        </p:nvSpPr>
+        <p:spPr/>
+        <p:txBody>
+          <a:bodyPr>
+            <a:normAutofit/>
+          </a:bodyPr>
+          <a:lstStyle/>
+          <a:p>
+            <a:r>
+              <a:rPr lang="ja-JP" altLang="ja-JP" sz="2400" dirty="0"/>
+              <a:t>Consumer&lt;String&gt; printer =</a:t>
+            </a:r>
+            <a:r>
+              <a:rPr lang="en-US" altLang="ja-JP" sz="2400" dirty="0"/>
+              <a:t> </a:t>
+            </a:r>
+            <a:r>
+              <a:rPr lang="ja-JP" altLang="ja-JP" sz="2400" dirty="0"/>
+              <a:t>name -&gt; System.out.println(name);</a:t>
+            </a:r>
+          </a:p>
+          <a:p>
+            <a:r>
+              <a:rPr lang="en-US" altLang="ja-JP" sz="2400" dirty="0" err="1"/>
+              <a:t>printer.accept</a:t>
+            </a:r>
+            <a:r>
+              <a:rPr lang="en-US" altLang="ja-JP" sz="2400" dirty="0"/>
+              <a:t>("Khuong");</a:t>
+            </a:r>
+          </a:p>
+          <a:p>
+            <a:endParaRPr lang="en-US" altLang="ja-JP" sz="2400" dirty="0"/>
+          </a:p>
+          <a:p>
+            <a:r>
+              <a:rPr lang="en-US" altLang="ja-JP" sz="2400" dirty="0" err="1"/>
+              <a:t>Kết</a:t>
+            </a:r>
+            <a:r>
+              <a:rPr lang="en-US" altLang="ja-JP" sz="2400" dirty="0"/>
+              <a:t> </a:t>
+            </a:r>
+            <a:r>
+              <a:rPr lang="en-US" altLang="ja-JP" sz="2400" dirty="0" err="1"/>
+              <a:t>quả</a:t>
+            </a:r>
+            <a:r>
+              <a:rPr lang="en-US" altLang="ja-JP" sz="2400" dirty="0"/>
+              <a:t>: print Khuong</a:t>
+            </a:r>
+            <a:endParaRPr lang="ja-JP" altLang="ja-JP" sz="2400" dirty="0"/>
+          </a:p>
+          <a:p>
+            <a:endParaRPr kumimoji="1" lang="ja-JP" altLang="en-US" sz="2800" dirty="0"/>
+          </a:p>
+        </p:txBody>
+      </p:sp>
+      <p:sp>
+        <p:nvSpPr>
+          <p:cNvPr id="4" name="Slide Number Placeholder 3">
+            <a:extLst>
+              <a:ext uri="{FF2B5EF4-FFF2-40B4-BE49-F238E27FC236}">
+                <a16:creationId xmlns:a16="http://schemas.microsoft.com/office/drawing/2014/main" id="{558C26C8-7E1F-611E-456D-75794BDFDBA3}"/>
+              </a:ext>
+            </a:extLst>
+          </p:cNvPr>
+          <p:cNvSpPr>
+            <a:spLocks noGrp="1"/>
+          </p:cNvSpPr>
+          <p:nvPr>
+            <p:ph type="sldNum" sz="quarter" idx="11"/>
+          </p:nvPr>
+        </p:nvSpPr>
+        <p:spPr/>
+        <p:txBody>
+          <a:bodyPr/>
+          <a:lstStyle/>
+          <a:p>
+            <a:pPr>
+              <a:defRPr/>
+            </a:pPr>
+            <a:r>
+              <a:rPr lang="en-US" altLang="ja-JP"/>
+              <a:t>Page:</a:t>
+            </a:r>
+            <a:r>
+              <a:rPr lang="ja-JP" altLang="en-US"/>
+              <a:t> </a:t>
+            </a:r>
+            <a:fld id="{DC07468E-517B-4E9D-8840-A4568A307980}" type="slidenum">
+              <a:rPr lang="en-US" altLang="ja-JP" smtClean="0"/>
+              <a:pPr>
+                <a:defRPr/>
+              </a:pPr>
+              <a:t>29</a:t>
+            </a:fld>
+            <a:endParaRPr lang="en-US" altLang="ja-JP"/>
+          </a:p>
+        </p:txBody>
+      </p:sp>
+    </p:spTree>
+    <p:extLst>
+      <p:ext uri="{BB962C8B-B14F-4D97-AF65-F5344CB8AC3E}">
+        <p14:creationId xmlns:p14="http://schemas.microsoft.com/office/powerpoint/2010/main" val="484706508"/>
+      </p:ext>
+    </p:extLst>
+  </p:cSld>
+  <p:clrMapOvr>
+    <a:masterClrMapping/>
+  </p:clrMapOvr>
+</p:sld>
+</file>
+
 <file path=ppt/slides/slide3.xml><?xml version="1.0" encoding="utf-8"?>
+<p:sld xmlns:a="http://schemas.openxmlformats.org/drawingml/2006/main" xmlns:r="http://schemas.openxmlformats.org/officeDocument/2006/relationships" xmlns:p="http://schemas.openxmlformats.org/presentationml/2006/main">
+  <p:cSld>
+    <p:spTree>
+      <p:nvGrpSpPr>
+        <p:cNvPr id="1" name=""/>
+        <p:cNvGrpSpPr/>
+        <p:nvPr/>
+      </p:nvGrpSpPr>
+      <p:grpSpPr>
+        <a:xfrm>
+          <a:off x="0" y="0"/>
+          <a:ext cx="0" cy="0"/>
+          <a:chOff x="0" y="0"/>
+          <a:chExt cx="0" cy="0"/>
+        </a:xfrm>
+      </p:grpSpPr>
+      <p:sp>
+        <p:nvSpPr>
+          <p:cNvPr id="2" name="Text 0"/>
+          <p:cNvSpPr/>
+          <p:nvPr/>
+        </p:nvSpPr>
+        <p:spPr>
+          <a:xfrm>
+            <a:off x="33336" y="535036"/>
+            <a:ext cx="8915400" cy="371475"/>
+          </a:xfrm>
+          <a:prstGeom prst="rect">
+            <a:avLst/>
+          </a:prstGeom>
+          <a:noFill/>
+          <a:ln/>
+        </p:spPr>
+        <p:txBody>
+          <a:bodyPr wrap="square" rtlCol="0" anchor="ctr"/>
+          <a:lstStyle/>
+          <a:p>
+            <a:r>
+              <a:rPr lang="en-US" sz="4000" dirty="0" err="1">
+                <a:solidFill>
+                  <a:srgbClr val="1F4E79"/>
+                </a:solidFill>
+                <a:latin typeface="+mj-lt"/>
+              </a:rPr>
+              <a:t>Nêu</a:t>
+            </a:r>
+            <a:r>
+              <a:rPr lang="en-US" sz="4000" dirty="0">
+                <a:solidFill>
+                  <a:srgbClr val="1F4E79"/>
+                </a:solidFill>
+                <a:latin typeface="+mj-lt"/>
+              </a:rPr>
+              <a:t> </a:t>
+            </a:r>
+            <a:r>
+              <a:rPr lang="en-US" sz="4000" dirty="0" err="1">
+                <a:solidFill>
+                  <a:srgbClr val="1F4E79"/>
+                </a:solidFill>
+                <a:latin typeface="+mj-lt"/>
+              </a:rPr>
+              <a:t>vấn</a:t>
+            </a:r>
+            <a:r>
+              <a:rPr lang="en-US" sz="4000" dirty="0">
+                <a:solidFill>
+                  <a:srgbClr val="1F4E79"/>
+                </a:solidFill>
+                <a:latin typeface="+mj-lt"/>
+              </a:rPr>
+              <a:t> </a:t>
+            </a:r>
+            <a:r>
+              <a:rPr lang="en-US" sz="4000" dirty="0" err="1">
+                <a:solidFill>
+                  <a:srgbClr val="1F4E79"/>
+                </a:solidFill>
+                <a:latin typeface="+mj-lt"/>
+              </a:rPr>
+              <a:t>đề</a:t>
+            </a:r>
+            <a:endParaRPr lang="en-US" sz="4000" dirty="0">
+              <a:latin typeface="+mj-lt"/>
+            </a:endParaRPr>
+          </a:p>
+        </p:txBody>
+      </p:sp>
+      <p:sp>
+        <p:nvSpPr>
+          <p:cNvPr id="3" name="Text 1"/>
+          <p:cNvSpPr/>
+          <p:nvPr/>
+        </p:nvSpPr>
+        <p:spPr>
+          <a:xfrm>
+            <a:off x="371474" y="1385888"/>
+            <a:ext cx="8239125" cy="4481512"/>
+          </a:xfrm>
+          <a:prstGeom prst="rect">
+            <a:avLst/>
+          </a:prstGeom>
+          <a:noFill/>
+          <a:ln/>
+        </p:spPr>
+        <p:txBody>
+          <a:bodyPr wrap="square" rtlCol="0" anchor="ctr"/>
+          <a:lstStyle/>
+          <a:p>
+            <a:pPr algn="just"/>
+            <a:endParaRPr lang="en-US" sz="2800" dirty="0">
+              <a:latin typeface="+mj-lt"/>
+            </a:endParaRPr>
+          </a:p>
+        </p:txBody>
+      </p:sp>
+      <p:sp>
+        <p:nvSpPr>
+          <p:cNvPr id="4" name="Text 2"/>
+          <p:cNvSpPr/>
+          <p:nvPr/>
+        </p:nvSpPr>
+        <p:spPr>
+          <a:xfrm>
+            <a:off x="594360" y="2128838"/>
+            <a:ext cx="3714750" cy="1485900"/>
+          </a:xfrm>
+          <a:prstGeom prst="rect">
+            <a:avLst/>
+          </a:prstGeom>
+          <a:noFill/>
+          <a:ln/>
+        </p:spPr>
+        <p:txBody>
+          <a:bodyPr wrap="square" rtlCol="0" anchor="ctr"/>
+          <a:lstStyle/>
+          <a:p>
+            <a:endParaRPr lang="en-US" sz="1300" dirty="0"/>
+          </a:p>
+        </p:txBody>
+      </p:sp>
+      <p:sp>
+        <p:nvSpPr>
+          <p:cNvPr id="6" name="Content Placeholder 5">
+            <a:extLst>
+              <a:ext uri="{FF2B5EF4-FFF2-40B4-BE49-F238E27FC236}">
+                <a16:creationId xmlns:a16="http://schemas.microsoft.com/office/drawing/2014/main" id="{4925B110-462A-4703-6ABD-77769467DF38}"/>
+              </a:ext>
+            </a:extLst>
+          </p:cNvPr>
+          <p:cNvSpPr>
+            <a:spLocks noGrp="1"/>
+          </p:cNvSpPr>
+          <p:nvPr>
+            <p:ph idx="1"/>
+          </p:nvPr>
+        </p:nvSpPr>
+        <p:spPr>
+          <a:xfrm>
+            <a:off x="128464" y="1143000"/>
+            <a:ext cx="9649072" cy="5328592"/>
+          </a:xfrm>
+        </p:spPr>
+        <p:txBody>
+          <a:bodyPr/>
+          <a:lstStyle/>
+          <a:p>
+            <a:pPr algn="just">
+              <a:buFont typeface="Arial" panose="020B0604020202020204" pitchFamily="34" charset="0"/>
+              <a:buChar char="•"/>
+            </a:pPr>
+            <a:r>
+              <a:rPr lang="en-US" altLang="ja-JP" dirty="0" err="1"/>
+              <a:t>Ví</a:t>
+            </a:r>
+            <a:r>
+              <a:rPr lang="en-US" altLang="ja-JP" dirty="0"/>
+              <a:t> </a:t>
+            </a:r>
+            <a:r>
+              <a:rPr lang="en-US" altLang="ja-JP" dirty="0" err="1"/>
+              <a:t>dụ</a:t>
+            </a:r>
+            <a:r>
+              <a:rPr lang="en-US" altLang="ja-JP" dirty="0"/>
+              <a:t>: Danh </a:t>
+            </a:r>
+            <a:r>
+              <a:rPr lang="en-US" altLang="ja-JP" dirty="0" err="1"/>
+              <a:t>sách</a:t>
+            </a:r>
+            <a:r>
+              <a:rPr lang="en-US" altLang="ja-JP" dirty="0"/>
+              <a:t> </a:t>
+            </a:r>
+            <a:r>
+              <a:rPr lang="en-US" altLang="ja-JP" dirty="0" err="1"/>
+              <a:t>nhân</a:t>
+            </a:r>
+            <a:r>
+              <a:rPr lang="en-US" altLang="ja-JP" dirty="0"/>
+              <a:t> </a:t>
+            </a:r>
+            <a:r>
+              <a:rPr lang="en-US" altLang="ja-JP" dirty="0" err="1"/>
+              <a:t>viên</a:t>
+            </a:r>
+            <a:r>
+              <a:rPr lang="en-US" altLang="ja-JP" dirty="0"/>
+              <a:t> </a:t>
+            </a:r>
+            <a:r>
+              <a:rPr lang="en-US" altLang="ja-JP" dirty="0">
+                <a:sym typeface="Wingdings" panose="05000000000000000000" pitchFamily="2" charset="2"/>
+              </a:rPr>
+              <a:t></a:t>
+            </a:r>
+            <a:r>
+              <a:rPr lang="en-US" altLang="ja-JP" dirty="0"/>
+              <a:t> </a:t>
+            </a:r>
+            <a:r>
+              <a:rPr lang="en-US" altLang="ja-JP" dirty="0" err="1"/>
+              <a:t>Lọc</a:t>
+            </a:r>
+            <a:r>
+              <a:rPr lang="en-US" altLang="ja-JP" dirty="0"/>
+              <a:t> </a:t>
+            </a:r>
+            <a:r>
+              <a:rPr lang="en-US" altLang="ja-JP" dirty="0" err="1"/>
+              <a:t>nhân</a:t>
+            </a:r>
+            <a:r>
+              <a:rPr lang="en-US" altLang="ja-JP" dirty="0"/>
+              <a:t> </a:t>
+            </a:r>
+            <a:r>
+              <a:rPr lang="en-US" altLang="ja-JP" dirty="0" err="1"/>
+              <a:t>viên</a:t>
+            </a:r>
+            <a:r>
+              <a:rPr lang="en-US" altLang="ja-JP" dirty="0"/>
+              <a:t> </a:t>
+            </a:r>
+            <a:r>
+              <a:rPr lang="en-US" altLang="ja-JP" dirty="0" err="1"/>
+              <a:t>trên</a:t>
+            </a:r>
+            <a:r>
+              <a:rPr lang="en-US" altLang="ja-JP" dirty="0"/>
+              <a:t> 18 </a:t>
+            </a:r>
+            <a:r>
+              <a:rPr lang="en-US" altLang="ja-JP" dirty="0" err="1"/>
+              <a:t>tuổi</a:t>
+            </a:r>
+            <a:r>
+              <a:rPr lang="en-US" altLang="ja-JP" dirty="0"/>
+              <a:t> </a:t>
+            </a:r>
+            <a:r>
+              <a:rPr lang="en-US" altLang="ja-JP" dirty="0">
+                <a:sym typeface="Wingdings" panose="05000000000000000000" pitchFamily="2" charset="2"/>
+              </a:rPr>
+              <a:t></a:t>
+            </a:r>
+            <a:r>
+              <a:rPr lang="en-US" altLang="ja-JP" dirty="0"/>
+              <a:t> In </a:t>
+            </a:r>
+            <a:r>
+              <a:rPr lang="en-US" altLang="ja-JP" dirty="0" err="1"/>
+              <a:t>tên</a:t>
+            </a:r>
+            <a:endParaRPr lang="en-US" altLang="ja-JP" dirty="0"/>
+          </a:p>
+          <a:p>
+            <a:pPr algn="just">
+              <a:buFont typeface="Arial" panose="020B0604020202020204" pitchFamily="34" charset="0"/>
+              <a:buChar char="•"/>
+            </a:pPr>
+            <a:endParaRPr lang="en-US" altLang="ja-JP" dirty="0"/>
+          </a:p>
+          <a:p>
+            <a:pPr fontAlgn="t"/>
+            <a:r>
+              <a:rPr lang="ja-JP" altLang="ja-JP" b="1" dirty="0"/>
+              <a:t>OOP trả lời: "Khách hàng là ai?"</a:t>
+            </a:r>
+            <a:endParaRPr lang="ja-JP" altLang="ja-JP" dirty="0"/>
+          </a:p>
+          <a:p>
+            <a:pPr fontAlgn="t"/>
+            <a:r>
+              <a:rPr lang="ja-JP" altLang="ja-JP" b="1" dirty="0"/>
+              <a:t>Functional Programming trả lời: "Xử lý khách hàng như thế nào?"</a:t>
+            </a:r>
+            <a:endParaRPr lang="ja-JP" altLang="ja-JP" dirty="0"/>
+          </a:p>
+          <a:p>
+            <a:pPr algn="just"/>
+            <a:endParaRPr lang="en-US" altLang="ja-JP" dirty="0"/>
+          </a:p>
+          <a:p>
+            <a:endParaRPr lang="ja-JP" altLang="en-US" dirty="0"/>
+          </a:p>
+        </p:txBody>
+      </p:sp>
+    </p:spTree>
+    <p:extLst>
+      <p:ext uri="{BB962C8B-B14F-4D97-AF65-F5344CB8AC3E}">
+        <p14:creationId xmlns:p14="http://schemas.microsoft.com/office/powerpoint/2010/main" val="113548610"/>
+      </p:ext>
+    </p:extLst>
+  </p:cSld>
+  <p:clrMapOvr>
+    <a:masterClrMapping/>
+  </p:clrMapOvr>
+</p:sld>
+</file>
+
+<file path=ppt/slides/slide30.xml><?xml version="1.0" encoding="utf-8"?>
+<p:sld xmlns:a="http://schemas.openxmlformats.org/drawingml/2006/main" xmlns:r="http://schemas.openxmlformats.org/officeDocument/2006/relationships" xmlns:p="http://schemas.openxmlformats.org/presentationml/2006/main">
+  <p:cSld>
+    <p:spTree>
+      <p:nvGrpSpPr>
+        <p:cNvPr id="1" name="">
+          <a:extLst>
+            <a:ext uri="{FF2B5EF4-FFF2-40B4-BE49-F238E27FC236}">
+              <a16:creationId xmlns:a16="http://schemas.microsoft.com/office/drawing/2014/main" id="{02C8E57C-3CB7-4D88-5072-23EE340D656F}"/>
+            </a:ext>
+          </a:extLst>
+        </p:cNvPr>
+        <p:cNvGrpSpPr/>
+        <p:nvPr/>
+      </p:nvGrpSpPr>
+      <p:grpSpPr>
+        <a:xfrm>
+          <a:off x="0" y="0"/>
+          <a:ext cx="0" cy="0"/>
+          <a:chOff x="0" y="0"/>
+          <a:chExt cx="0" cy="0"/>
+        </a:xfrm>
+      </p:grpSpPr>
+      <p:sp>
+        <p:nvSpPr>
+          <p:cNvPr id="2" name="Title 1">
+            <a:extLst>
+              <a:ext uri="{FF2B5EF4-FFF2-40B4-BE49-F238E27FC236}">
+                <a16:creationId xmlns:a16="http://schemas.microsoft.com/office/drawing/2014/main" id="{F786415A-3E40-5492-057F-70063AEE1AA6}"/>
+              </a:ext>
+            </a:extLst>
+          </p:cNvPr>
+          <p:cNvSpPr>
+            <a:spLocks noGrp="1"/>
+          </p:cNvSpPr>
+          <p:nvPr>
+            <p:ph type="title"/>
+          </p:nvPr>
+        </p:nvSpPr>
+        <p:spPr/>
+        <p:txBody>
+          <a:bodyPr>
+            <a:normAutofit fontScale="90000"/>
+          </a:bodyPr>
+          <a:lstStyle/>
+          <a:p>
+            <a:r>
+              <a:rPr lang="en-US" altLang="ja-JP" dirty="0">
+                <a:solidFill>
+                  <a:srgbClr val="000000"/>
+                </a:solidFill>
+              </a:rPr>
+              <a:t>Supplier&lt;T&gt; : Sinh </a:t>
+            </a:r>
+            <a:r>
+              <a:rPr lang="en-US" altLang="ja-JP" dirty="0" err="1">
+                <a:solidFill>
+                  <a:srgbClr val="000000"/>
+                </a:solidFill>
+              </a:rPr>
+              <a:t>dữ</a:t>
+            </a:r>
+            <a:r>
+              <a:rPr lang="en-US" altLang="ja-JP" dirty="0">
+                <a:solidFill>
+                  <a:srgbClr val="000000"/>
+                </a:solidFill>
+              </a:rPr>
+              <a:t> </a:t>
+            </a:r>
+            <a:r>
+              <a:rPr lang="en-US" altLang="ja-JP" dirty="0" err="1">
+                <a:solidFill>
+                  <a:srgbClr val="000000"/>
+                </a:solidFill>
+              </a:rPr>
+              <a:t>liệu</a:t>
+            </a:r>
+            <a:endParaRPr lang="en-US" altLang="ja-JP" dirty="0"/>
+          </a:p>
+        </p:txBody>
+      </p:sp>
+      <p:sp>
+        <p:nvSpPr>
+          <p:cNvPr id="3" name="Content Placeholder 2">
+            <a:extLst>
+              <a:ext uri="{FF2B5EF4-FFF2-40B4-BE49-F238E27FC236}">
+                <a16:creationId xmlns:a16="http://schemas.microsoft.com/office/drawing/2014/main" id="{E77AF79E-6F45-4B08-D3DE-28A8122FF1EB}"/>
+              </a:ext>
+            </a:extLst>
+          </p:cNvPr>
+          <p:cNvSpPr>
+            <a:spLocks noGrp="1"/>
+          </p:cNvSpPr>
+          <p:nvPr>
+            <p:ph idx="1"/>
+          </p:nvPr>
+        </p:nvSpPr>
+        <p:spPr/>
+        <p:txBody>
+          <a:bodyPr>
+            <a:normAutofit/>
+          </a:bodyPr>
+          <a:lstStyle/>
+          <a:p>
+            <a:r>
+              <a:rPr lang="ja-JP" altLang="ja-JP" sz="2400" dirty="0"/>
+              <a:t>Supplier&lt;String&gt; code =  () -&gt; "EMP001";</a:t>
+            </a:r>
+          </a:p>
+          <a:p>
+            <a:r>
+              <a:rPr lang="ja-JP" altLang="ja-JP" sz="2400" dirty="0"/>
+              <a:t>System.out.println(code.get());</a:t>
+            </a:r>
+          </a:p>
+          <a:p>
+            <a:endParaRPr lang="en-US" altLang="ja-JP" sz="2400" dirty="0"/>
+          </a:p>
+          <a:p>
+            <a:r>
+              <a:rPr lang="en-US" altLang="ja-JP" sz="2400" dirty="0" err="1"/>
+              <a:t>Kết</a:t>
+            </a:r>
+            <a:r>
+              <a:rPr lang="en-US" altLang="ja-JP" sz="2400" dirty="0"/>
+              <a:t> </a:t>
+            </a:r>
+            <a:r>
+              <a:rPr lang="en-US" altLang="ja-JP" sz="2400" dirty="0" err="1"/>
+              <a:t>quả</a:t>
+            </a:r>
+            <a:r>
+              <a:rPr lang="en-US" altLang="ja-JP" sz="2400" dirty="0"/>
+              <a:t>: </a:t>
+            </a:r>
+            <a:r>
+              <a:rPr lang="en-US" altLang="ja-JP" sz="2400" dirty="0" err="1"/>
+              <a:t>sinh</a:t>
+            </a:r>
+            <a:r>
+              <a:rPr lang="en-US" altLang="ja-JP" sz="2400" dirty="0"/>
+              <a:t> code “EMP001”</a:t>
+            </a:r>
+            <a:endParaRPr lang="ja-JP" altLang="ja-JP" sz="2400" dirty="0"/>
+          </a:p>
+          <a:p>
+            <a:endParaRPr kumimoji="1" lang="ja-JP" altLang="en-US" sz="2800" dirty="0"/>
+          </a:p>
+        </p:txBody>
+      </p:sp>
+      <p:sp>
+        <p:nvSpPr>
+          <p:cNvPr id="4" name="Slide Number Placeholder 3">
+            <a:extLst>
+              <a:ext uri="{FF2B5EF4-FFF2-40B4-BE49-F238E27FC236}">
+                <a16:creationId xmlns:a16="http://schemas.microsoft.com/office/drawing/2014/main" id="{BF070305-021F-384F-57E9-E1671F98DF3B}"/>
+              </a:ext>
+            </a:extLst>
+          </p:cNvPr>
+          <p:cNvSpPr>
+            <a:spLocks noGrp="1"/>
+          </p:cNvSpPr>
+          <p:nvPr>
+            <p:ph type="sldNum" sz="quarter" idx="11"/>
+          </p:nvPr>
+        </p:nvSpPr>
+        <p:spPr/>
+        <p:txBody>
+          <a:bodyPr/>
+          <a:lstStyle/>
+          <a:p>
+            <a:pPr>
+              <a:defRPr/>
+            </a:pPr>
+            <a:r>
+              <a:rPr lang="en-US" altLang="ja-JP"/>
+              <a:t>Page:</a:t>
+            </a:r>
+            <a:r>
+              <a:rPr lang="ja-JP" altLang="en-US"/>
+              <a:t> </a:t>
+            </a:r>
+            <a:fld id="{DC07468E-517B-4E9D-8840-A4568A307980}" type="slidenum">
+              <a:rPr lang="en-US" altLang="ja-JP" smtClean="0"/>
+              <a:pPr>
+                <a:defRPr/>
+              </a:pPr>
+              <a:t>30</a:t>
+            </a:fld>
+            <a:endParaRPr lang="en-US" altLang="ja-JP"/>
+          </a:p>
+        </p:txBody>
+      </p:sp>
+    </p:spTree>
+    <p:extLst>
+      <p:ext uri="{BB962C8B-B14F-4D97-AF65-F5344CB8AC3E}">
+        <p14:creationId xmlns:p14="http://schemas.microsoft.com/office/powerpoint/2010/main" val="1953671184"/>
+      </p:ext>
+    </p:extLst>
+  </p:cSld>
+  <p:clrMapOvr>
+    <a:masterClrMapping/>
+  </p:clrMapOvr>
+</p:sld>
+</file>
+
+<file path=ppt/slides/slide4.xml><?xml version="1.0" encoding="utf-8"?>
 <p:sld xmlns:a="http://schemas.openxmlformats.org/drawingml/2006/main" xmlns:r="http://schemas.openxmlformats.org/officeDocument/2006/relationships" xmlns:p="http://schemas.openxmlformats.org/presentationml/2006/main">
   <p:cSld>
     <p:spTree>
@@ -11113,7 +12868,7 @@
 </p:sld>
 </file>
 
-<file path=ppt/slides/slide4.xml><?xml version="1.0" encoding="utf-8"?>
+<file path=ppt/slides/slide5.xml><?xml version="1.0" encoding="utf-8"?>
 <p:sld xmlns:a="http://schemas.openxmlformats.org/drawingml/2006/main" xmlns:r="http://schemas.openxmlformats.org/officeDocument/2006/relationships" xmlns:p="http://schemas.openxmlformats.org/presentationml/2006/main">
   <p:cSld>
     <p:spTree>
@@ -11632,233 +13387,6 @@
     <p:extLst>
       <p:ext uri="{BB962C8B-B14F-4D97-AF65-F5344CB8AC3E}">
         <p14:creationId xmlns:p14="http://schemas.microsoft.com/office/powerpoint/2010/main" val="2703959338"/>
-      </p:ext>
-    </p:extLst>
-  </p:cSld>
-  <p:clrMapOvr>
-    <a:masterClrMapping/>
-  </p:clrMapOvr>
-</p:sld>
-</file>
-
-<file path=ppt/slides/slide5.xml><?xml version="1.0" encoding="utf-8"?>
-<p:sld xmlns:a="http://schemas.openxmlformats.org/drawingml/2006/main" xmlns:r="http://schemas.openxmlformats.org/officeDocument/2006/relationships" xmlns:p="http://schemas.openxmlformats.org/presentationml/2006/main">
-  <p:cSld>
-    <p:spTree>
-      <p:nvGrpSpPr>
-        <p:cNvPr id="1" name=""/>
-        <p:cNvGrpSpPr/>
-        <p:nvPr/>
-      </p:nvGrpSpPr>
-      <p:grpSpPr>
-        <a:xfrm>
-          <a:off x="0" y="0"/>
-          <a:ext cx="0" cy="0"/>
-          <a:chOff x="0" y="0"/>
-          <a:chExt cx="0" cy="0"/>
-        </a:xfrm>
-      </p:grpSpPr>
-      <p:sp>
-        <p:nvSpPr>
-          <p:cNvPr id="2" name="Text 0"/>
-          <p:cNvSpPr/>
-          <p:nvPr/>
-        </p:nvSpPr>
-        <p:spPr>
-          <a:xfrm>
-            <a:off x="163923" y="404664"/>
-            <a:ext cx="8915400" cy="627698"/>
-          </a:xfrm>
-          <a:prstGeom prst="rect">
-            <a:avLst/>
-          </a:prstGeom>
-          <a:noFill/>
-          <a:ln/>
-        </p:spPr>
-        <p:txBody>
-          <a:bodyPr wrap="square" rtlCol="0" anchor="ctr"/>
-          <a:lstStyle/>
-          <a:p>
-            <a:r>
-              <a:rPr lang="en-US" sz="3200" dirty="0">
-                <a:solidFill>
-                  <a:srgbClr val="1F4E79"/>
-                </a:solidFill>
-                <a:latin typeface="+mj-lt"/>
-              </a:rPr>
-              <a:t>OOP </a:t>
-            </a:r>
-            <a:r>
-              <a:rPr lang="en-US" sz="3200" dirty="0" err="1">
-                <a:solidFill>
-                  <a:srgbClr val="1F4E79"/>
-                </a:solidFill>
-                <a:latin typeface="+mj-lt"/>
-              </a:rPr>
-              <a:t>và</a:t>
-            </a:r>
-            <a:r>
-              <a:rPr lang="en-US" sz="3200" dirty="0">
-                <a:solidFill>
-                  <a:srgbClr val="1F4E79"/>
-                </a:solidFill>
-                <a:latin typeface="+mj-lt"/>
-              </a:rPr>
-              <a:t> FP</a:t>
-            </a:r>
-            <a:endParaRPr lang="en-US" sz="3200" dirty="0">
-              <a:latin typeface="+mj-lt"/>
-            </a:endParaRPr>
-          </a:p>
-        </p:txBody>
-      </p:sp>
-      <p:sp>
-        <p:nvSpPr>
-          <p:cNvPr id="3" name="Text 1"/>
-          <p:cNvSpPr/>
-          <p:nvPr/>
-        </p:nvSpPr>
-        <p:spPr>
-          <a:xfrm>
-            <a:off x="382037" y="1398006"/>
-            <a:ext cx="8848725" cy="2057400"/>
-          </a:xfrm>
-          <a:prstGeom prst="rect">
-            <a:avLst/>
-          </a:prstGeom>
-          <a:noFill/>
-          <a:ln/>
-        </p:spPr>
-        <p:txBody>
-          <a:bodyPr wrap="square" rtlCol="0" anchor="ctr"/>
-          <a:lstStyle/>
-          <a:p>
-            <a:pPr marL="457200" indent="-457200" algn="just">
-              <a:buFont typeface="Arial" panose="020B0604020202020204" pitchFamily="34" charset="0"/>
-              <a:buChar char="•"/>
-            </a:pPr>
-            <a:r>
-              <a:rPr lang="en-US" sz="2800" dirty="0">
-                <a:latin typeface="+mj-lt"/>
-              </a:rPr>
-              <a:t>OOP quản lý trạng thái và mô hình </a:t>
-            </a:r>
-            <a:r>
-              <a:rPr lang="en-US" sz="2800" dirty="0" err="1">
-                <a:latin typeface="+mj-lt"/>
-              </a:rPr>
-              <a:t>nghiệp</a:t>
-            </a:r>
-            <a:r>
-              <a:rPr lang="en-US" sz="2800" dirty="0">
-                <a:latin typeface="+mj-lt"/>
-              </a:rPr>
-              <a:t> </a:t>
-            </a:r>
-            <a:r>
-              <a:rPr lang="en-US" sz="2800" dirty="0" err="1">
-                <a:latin typeface="+mj-lt"/>
-              </a:rPr>
-              <a:t>vụ</a:t>
-            </a:r>
-            <a:endParaRPr lang="en-US" sz="2800" dirty="0">
-              <a:latin typeface="+mj-lt"/>
-            </a:endParaRPr>
-          </a:p>
-          <a:p>
-            <a:pPr marL="457200" indent="-457200" algn="just">
-              <a:buFont typeface="Arial" panose="020B0604020202020204" pitchFamily="34" charset="0"/>
-              <a:buChar char="•"/>
-            </a:pPr>
-            <a:endParaRPr lang="en-US" sz="2800" dirty="0">
-              <a:latin typeface="+mj-lt"/>
-            </a:endParaRPr>
-          </a:p>
-          <a:p>
-            <a:pPr marL="457200" indent="-457200" algn="just">
-              <a:buFont typeface="Arial" panose="020B0604020202020204" pitchFamily="34" charset="0"/>
-              <a:buChar char="•"/>
-            </a:pPr>
-            <a:r>
-              <a:rPr lang="en-US" sz="2800" dirty="0">
-                <a:latin typeface="+mj-lt"/>
-              </a:rPr>
-              <a:t>FP tối ưu cách xử lý </a:t>
-            </a:r>
-            <a:r>
-              <a:rPr lang="en-US" sz="2800" dirty="0" err="1">
-                <a:latin typeface="+mj-lt"/>
-              </a:rPr>
-              <a:t>dữ</a:t>
-            </a:r>
-            <a:r>
-              <a:rPr lang="en-US" sz="2800" dirty="0">
-                <a:latin typeface="+mj-lt"/>
-              </a:rPr>
-              <a:t> </a:t>
-            </a:r>
-            <a:r>
-              <a:rPr lang="en-US" sz="2800" dirty="0" err="1">
-                <a:latin typeface="+mj-lt"/>
-              </a:rPr>
-              <a:t>liệu</a:t>
-            </a:r>
-            <a:endParaRPr lang="en-US" sz="2800" dirty="0">
-              <a:latin typeface="+mj-lt"/>
-            </a:endParaRPr>
-          </a:p>
-          <a:p>
-            <a:pPr marL="457200" indent="-457200" algn="just">
-              <a:buFont typeface="Arial" panose="020B0604020202020204" pitchFamily="34" charset="0"/>
-              <a:buChar char="•"/>
-            </a:pPr>
-            <a:endParaRPr lang="en-US" sz="2800" dirty="0">
-              <a:latin typeface="+mj-lt"/>
-            </a:endParaRPr>
-          </a:p>
-          <a:p>
-            <a:pPr marL="457200" indent="-457200" algn="just">
-              <a:buFont typeface="Arial" panose="020B0604020202020204" pitchFamily="34" charset="0"/>
-              <a:buChar char="•"/>
-            </a:pPr>
-            <a:r>
-              <a:rPr lang="en-US" sz="2800" dirty="0">
-                <a:latin typeface="+mj-lt"/>
-              </a:rPr>
-              <a:t>Java hiện đại = OOP + FP</a:t>
-            </a:r>
-          </a:p>
-        </p:txBody>
-      </p:sp>
-      <p:sp>
-        <p:nvSpPr>
-          <p:cNvPr id="6" name="Content Placeholder 5">
-            <a:extLst>
-              <a:ext uri="{FF2B5EF4-FFF2-40B4-BE49-F238E27FC236}">
-                <a16:creationId xmlns:a16="http://schemas.microsoft.com/office/drawing/2014/main" id="{606E4519-B350-25BB-401E-B2D423AEA47C}"/>
-              </a:ext>
-            </a:extLst>
-          </p:cNvPr>
-          <p:cNvSpPr>
-            <a:spLocks noGrp="1"/>
-          </p:cNvSpPr>
-          <p:nvPr>
-            <p:ph idx="1"/>
-          </p:nvPr>
-        </p:nvSpPr>
-        <p:spPr/>
-        <p:txBody>
-          <a:bodyPr/>
-          <a:lstStyle/>
-          <a:p>
-            <a:endParaRPr lang="ja-JP" altLang="en-US" dirty="0"/>
-          </a:p>
-        </p:txBody>
-      </p:sp>
-    </p:spTree>
-    <p:extLst>
-      <p:ext uri="{BB962C8B-B14F-4D97-AF65-F5344CB8AC3E}">
-        <p14:creationId xmlns:p14="http://schemas.microsoft.com/office/powerpoint/2010/main" val="223843895"/>
       </p:ext>
     </p:extLst>
   </p:cSld>
